--- a/ahukannah_consultant_solutions.pptx
+++ b/ahukannah_consultant_solutions.pptx
@@ -1425,7 +1425,7 @@
           <a:lstStyle/>
           <a:p>
             <a:r>
-              <a:t>This is IberiaNex in one slide, so everyone has the same picture before I go into the detail.</a:t>
+              <a:t>Before I go into the detail, let me play back what I understood about the business — partly so the room has the picture, and partly so you can stop me if I have any of it wrong.</a:t>
             </a:r>
           </a:p>
           <a:p/>

--- a/ahukannah_consultant_solutions.pptx
+++ b/ahukannah_consultant_solutions.pptx
@@ -10813,7 +10813,7 @@
                 <a:ea typeface="Calibri" pitchFamily="34" charset="-122"/>
                 <a:cs typeface="Calibri" pitchFamily="34" charset="-120"/>
               </a:rPr>
-              <a:t>A Madrid hub business where the e-commerce promise is the hardest part of the day.</a:t>
+              <a:t>One hub, two flows — and the e-commerce promise is the hardest part of the day.</a:t>
             </a:r>
             <a:endParaRPr lang="en-US" sz="1050" dirty="0"/>
           </a:p>
@@ -10922,14 +10922,489 @@
       </p:sp>
       <p:sp>
         <p:nvSpPr>
-          <p:cNvPr id="12" name="Shape 9"/>
+          <p:cNvPr id="12" name="Text 9"/>
           <p:cNvSpPr/>
           <p:nvPr/>
         </p:nvSpPr>
         <p:spPr>
           <a:xfrm>
             <a:off x="566928" y="2395728"/>
-            <a:ext cx="3502152" cy="2606040"/>
+            <a:ext cx="1828800" cy="237744"/>
+          </a:xfrm>
+          <a:prstGeom prst="rect">
+            <a:avLst/>
+          </a:prstGeom>
+          <a:noFill/>
+          <a:ln/>
+        </p:spPr>
+        <p:txBody>
+          <a:bodyPr wrap="square" lIns="0" tIns="0" rIns="0" bIns="0" rtlCol="0" anchor="ctr"/>
+          <a:lstStyle/>
+          <a:p>
+            <a:pPr indent="0" marL="0">
+              <a:buNone/>
+            </a:pPr>
+            <a:r>
+              <a:rPr lang="en-US" sz="850" b="1" spc="120" kern="0" dirty="0">
+                <a:solidFill>
+                  <a:srgbClr val="6B7C86"/>
+                </a:solidFill>
+                <a:latin typeface="Calibri" pitchFamily="34" charset="0"/>
+                <a:ea typeface="Calibri" pitchFamily="34" charset="-122"/>
+                <a:cs typeface="Calibri" pitchFamily="34" charset="-120"/>
+              </a:rPr>
+              <a:t>PALLET FREIGHT IN</a:t>
+            </a:r>
+            <a:endParaRPr lang="en-US" sz="850" dirty="0"/>
+          </a:p>
+        </p:txBody>
+      </p:sp>
+      <p:sp>
+        <p:nvSpPr>
+          <p:cNvPr id="13" name="Text 10"/>
+          <p:cNvSpPr/>
+          <p:nvPr/>
+        </p:nvSpPr>
+        <p:spPr>
+          <a:xfrm>
+            <a:off x="4754880" y="2395728"/>
+            <a:ext cx="2194560" cy="237744"/>
+          </a:xfrm>
+          <a:prstGeom prst="rect">
+            <a:avLst/>
+          </a:prstGeom>
+          <a:noFill/>
+          <a:ln/>
+        </p:spPr>
+        <p:txBody>
+          <a:bodyPr wrap="square" lIns="0" tIns="0" rIns="0" bIns="0" rtlCol="0" anchor="ctr"/>
+          <a:lstStyle/>
+          <a:p>
+            <a:pPr indent="0" marL="0">
+              <a:buNone/>
+            </a:pPr>
+            <a:r>
+              <a:rPr lang="en-US" sz="850" b="1" spc="120" kern="0" dirty="0">
+                <a:solidFill>
+                  <a:srgbClr val="6B7C86"/>
+                </a:solidFill>
+                <a:latin typeface="Calibri" pitchFamily="34" charset="0"/>
+                <a:ea typeface="Calibri" pitchFamily="34" charset="-122"/>
+                <a:cs typeface="Calibri" pitchFamily="34" charset="-120"/>
+              </a:rPr>
+              <a:t>LAST MILE OUT</a:t>
+            </a:r>
+            <a:endParaRPr lang="en-US" sz="850" dirty="0"/>
+          </a:p>
+        </p:txBody>
+      </p:sp>
+      <p:sp>
+        <p:nvSpPr>
+          <p:cNvPr id="14" name="Shape 11"/>
+          <p:cNvSpPr/>
+          <p:nvPr/>
+        </p:nvSpPr>
+        <p:spPr>
+          <a:xfrm>
+            <a:off x="566928" y="2724912"/>
+            <a:ext cx="1280160" cy="530352"/>
+          </a:xfrm>
+          <a:prstGeom prst="roundRect">
+            <a:avLst>
+              <a:gd name="adj" fmla="val 10345"/>
+            </a:avLst>
+          </a:prstGeom>
+          <a:solidFill>
+            <a:srgbClr val="FFFFFF"/>
+          </a:solidFill>
+          <a:ln w="12700">
+            <a:solidFill>
+              <a:srgbClr val="D6E2E8"/>
+            </a:solidFill>
+            <a:prstDash val="solid"/>
+          </a:ln>
+        </p:spPr>
+      </p:sp>
+      <p:sp>
+        <p:nvSpPr>
+          <p:cNvPr id="15" name="Text 12"/>
+          <p:cNvSpPr/>
+          <p:nvPr/>
+        </p:nvSpPr>
+        <p:spPr>
+          <a:xfrm>
+            <a:off x="621792" y="2724912"/>
+            <a:ext cx="1170432" cy="530352"/>
+          </a:xfrm>
+          <a:prstGeom prst="rect">
+            <a:avLst/>
+          </a:prstGeom>
+          <a:noFill/>
+          <a:ln/>
+        </p:spPr>
+        <p:txBody>
+          <a:bodyPr wrap="square" lIns="0" tIns="0" rIns="0" bIns="0" rtlCol="0" anchor="ctr"/>
+          <a:lstStyle/>
+          <a:p>
+            <a:pPr algn="ctr" indent="0" marL="0">
+              <a:buNone/>
+            </a:pPr>
+            <a:r>
+              <a:rPr lang="en-US" sz="1200" b="1" dirty="0">
+                <a:solidFill>
+                  <a:srgbClr val="16232B"/>
+                </a:solidFill>
+                <a:latin typeface="Calibri" pitchFamily="34" charset="0"/>
+                <a:ea typeface="Calibri" pitchFamily="34" charset="-122"/>
+                <a:cs typeface="Calibri" pitchFamily="34" charset="-120"/>
+              </a:rPr>
+              <a:t>Valencia</a:t>
+            </a:r>
+            <a:endParaRPr lang="en-US" sz="1200" dirty="0"/>
+          </a:p>
+        </p:txBody>
+      </p:sp>
+      <p:sp>
+        <p:nvSpPr>
+          <p:cNvPr id="16" name="Shape 13"/>
+          <p:cNvSpPr/>
+          <p:nvPr/>
+        </p:nvSpPr>
+        <p:spPr>
+          <a:xfrm>
+            <a:off x="566928" y="3456432"/>
+            <a:ext cx="1280160" cy="530352"/>
+          </a:xfrm>
+          <a:prstGeom prst="roundRect">
+            <a:avLst>
+              <a:gd name="adj" fmla="val 10345"/>
+            </a:avLst>
+          </a:prstGeom>
+          <a:solidFill>
+            <a:srgbClr val="FFFFFF"/>
+          </a:solidFill>
+          <a:ln w="12700">
+            <a:solidFill>
+              <a:srgbClr val="D6E2E8"/>
+            </a:solidFill>
+            <a:prstDash val="solid"/>
+          </a:ln>
+        </p:spPr>
+      </p:sp>
+      <p:sp>
+        <p:nvSpPr>
+          <p:cNvPr id="17" name="Text 14"/>
+          <p:cNvSpPr/>
+          <p:nvPr/>
+        </p:nvSpPr>
+        <p:spPr>
+          <a:xfrm>
+            <a:off x="621792" y="3456432"/>
+            <a:ext cx="1170432" cy="530352"/>
+          </a:xfrm>
+          <a:prstGeom prst="rect">
+            <a:avLst/>
+          </a:prstGeom>
+          <a:noFill/>
+          <a:ln/>
+        </p:spPr>
+        <p:txBody>
+          <a:bodyPr wrap="square" lIns="0" tIns="0" rIns="0" bIns="0" rtlCol="0" anchor="ctr"/>
+          <a:lstStyle/>
+          <a:p>
+            <a:pPr algn="ctr" indent="0" marL="0">
+              <a:buNone/>
+            </a:pPr>
+            <a:r>
+              <a:rPr lang="en-US" sz="1200" b="1" dirty="0">
+                <a:solidFill>
+                  <a:srgbClr val="16232B"/>
+                </a:solidFill>
+                <a:latin typeface="Calibri" pitchFamily="34" charset="0"/>
+                <a:ea typeface="Calibri" pitchFamily="34" charset="-122"/>
+                <a:cs typeface="Calibri" pitchFamily="34" charset="-120"/>
+              </a:rPr>
+              <a:t>Catalonia</a:t>
+            </a:r>
+            <a:endParaRPr lang="en-US" sz="1200" dirty="0"/>
+          </a:p>
+        </p:txBody>
+      </p:sp>
+      <p:sp>
+        <p:nvSpPr>
+          <p:cNvPr id="18" name="Shape 15"/>
+          <p:cNvSpPr/>
+          <p:nvPr/>
+        </p:nvSpPr>
+        <p:spPr>
+          <a:xfrm>
+            <a:off x="1920240" y="2862072"/>
+            <a:ext cx="384048" cy="274320"/>
+          </a:xfrm>
+          <a:prstGeom prst="rightArrow">
+            <a:avLst/>
+          </a:prstGeom>
+          <a:solidFill>
+            <a:srgbClr val="CFE0E7"/>
+          </a:solidFill>
+          <a:ln/>
+        </p:spPr>
+      </p:sp>
+      <p:sp>
+        <p:nvSpPr>
+          <p:cNvPr id="19" name="Shape 16"/>
+          <p:cNvSpPr/>
+          <p:nvPr/>
+        </p:nvSpPr>
+        <p:spPr>
+          <a:xfrm>
+            <a:off x="1920240" y="3593592"/>
+            <a:ext cx="384048" cy="274320"/>
+          </a:xfrm>
+          <a:prstGeom prst="rightArrow">
+            <a:avLst/>
+          </a:prstGeom>
+          <a:solidFill>
+            <a:srgbClr val="CFE0E7"/>
+          </a:solidFill>
+          <a:ln/>
+        </p:spPr>
+      </p:sp>
+      <p:sp>
+        <p:nvSpPr>
+          <p:cNvPr id="20" name="Shape 17"/>
+          <p:cNvSpPr/>
+          <p:nvPr/>
+        </p:nvSpPr>
+        <p:spPr>
+          <a:xfrm>
+            <a:off x="2395728" y="2670048"/>
+            <a:ext cx="1828800" cy="1371600"/>
+          </a:xfrm>
+          <a:prstGeom prst="roundRect">
+            <a:avLst>
+              <a:gd name="adj" fmla="val 4000"/>
+            </a:avLst>
+          </a:prstGeom>
+          <a:solidFill>
+            <a:srgbClr val="17384A"/>
+          </a:solidFill>
+          <a:ln w="12700">
+            <a:solidFill>
+              <a:srgbClr val="17384A"/>
+            </a:solidFill>
+            <a:prstDash val="solid"/>
+          </a:ln>
+        </p:spPr>
+      </p:sp>
+      <p:sp>
+        <p:nvSpPr>
+          <p:cNvPr id="21" name="Text 18"/>
+          <p:cNvSpPr/>
+          <p:nvPr/>
+        </p:nvSpPr>
+        <p:spPr>
+          <a:xfrm>
+            <a:off x="2450592" y="2670048"/>
+            <a:ext cx="1719072" cy="1371600"/>
+          </a:xfrm>
+          <a:prstGeom prst="rect">
+            <a:avLst/>
+          </a:prstGeom>
+          <a:noFill/>
+          <a:ln/>
+        </p:spPr>
+        <p:txBody>
+          <a:bodyPr wrap="square" lIns="0" tIns="0" rIns="0" bIns="0" rtlCol="0" anchor="ctr"/>
+          <a:lstStyle/>
+          <a:p>
+            <a:pPr algn="ctr" indent="0" marL="0">
+              <a:buNone/>
+            </a:pPr>
+            <a:r>
+              <a:rPr lang="en-US" sz="1200" b="1" dirty="0">
+                <a:solidFill>
+                  <a:srgbClr val="FFFFFF"/>
+                </a:solidFill>
+                <a:latin typeface="Calibri" pitchFamily="34" charset="0"/>
+                <a:ea typeface="Calibri" pitchFamily="34" charset="-122"/>
+                <a:cs typeface="Calibri" pitchFamily="34" charset="-120"/>
+              </a:rPr>
+              <a:t>COSLADA HUB</a:t>
+            </a:r>
+            <a:endParaRPr lang="en-US" sz="1200" dirty="0"/>
+          </a:p>
+          <a:p>
+            <a:pPr algn="ctr" indent="0" marL="0">
+              <a:buNone/>
+            </a:pPr>
+            <a:r>
+              <a:rPr lang="en-US" sz="900" dirty="0">
+                <a:solidFill>
+                  <a:srgbClr val="CFE0E7"/>
+                </a:solidFill>
+                <a:latin typeface="Calibri" pitchFamily="34" charset="0"/>
+                <a:ea typeface="Calibri" pitchFamily="34" charset="-122"/>
+                <a:cs typeface="Calibri" pitchFamily="34" charset="-120"/>
+              </a:rPr>
+              <a:t>Madrid</a:t>
+            </a:r>
+            <a:endParaRPr lang="en-US" sz="1200" dirty="0"/>
+          </a:p>
+        </p:txBody>
+      </p:sp>
+      <p:sp>
+        <p:nvSpPr>
+          <p:cNvPr id="22" name="Shape 19"/>
+          <p:cNvSpPr/>
+          <p:nvPr/>
+        </p:nvSpPr>
+        <p:spPr>
+          <a:xfrm>
+            <a:off x="4297680" y="3218688"/>
+            <a:ext cx="384048" cy="274320"/>
+          </a:xfrm>
+          <a:prstGeom prst="rightArrow">
+            <a:avLst/>
+          </a:prstGeom>
+          <a:solidFill>
+            <a:srgbClr val="CFE0E7"/>
+          </a:solidFill>
+          <a:ln/>
+        </p:spPr>
+      </p:sp>
+      <p:sp>
+        <p:nvSpPr>
+          <p:cNvPr id="23" name="Shape 20"/>
+          <p:cNvSpPr/>
+          <p:nvPr/>
+        </p:nvSpPr>
+        <p:spPr>
+          <a:xfrm>
+            <a:off x="4754880" y="2852928"/>
+            <a:ext cx="2194560" cy="1005840"/>
+          </a:xfrm>
+          <a:prstGeom prst="roundRect">
+            <a:avLst>
+              <a:gd name="adj" fmla="val 5455"/>
+            </a:avLst>
+          </a:prstGeom>
+          <a:solidFill>
+            <a:srgbClr val="D97706"/>
+          </a:solidFill>
+          <a:ln w="12700">
+            <a:solidFill>
+              <a:srgbClr val="D97706"/>
+            </a:solidFill>
+            <a:prstDash val="solid"/>
+          </a:ln>
+        </p:spPr>
+      </p:sp>
+      <p:sp>
+        <p:nvSpPr>
+          <p:cNvPr id="24" name="Text 21"/>
+          <p:cNvSpPr/>
+          <p:nvPr/>
+        </p:nvSpPr>
+        <p:spPr>
+          <a:xfrm>
+            <a:off x="4809744" y="2852928"/>
+            <a:ext cx="2084832" cy="1005840"/>
+          </a:xfrm>
+          <a:prstGeom prst="rect">
+            <a:avLst/>
+          </a:prstGeom>
+          <a:noFill/>
+          <a:ln/>
+        </p:spPr>
+        <p:txBody>
+          <a:bodyPr wrap="square" lIns="0" tIns="0" rIns="0" bIns="0" rtlCol="0" anchor="ctr"/>
+          <a:lstStyle/>
+          <a:p>
+            <a:pPr algn="ctr" indent="0" marL="0">
+              <a:buNone/>
+            </a:pPr>
+            <a:r>
+              <a:rPr lang="en-US" sz="1200" b="1" dirty="0">
+                <a:solidFill>
+                  <a:srgbClr val="0F1F2B"/>
+                </a:solidFill>
+                <a:latin typeface="Calibri" pitchFamily="34" charset="0"/>
+                <a:ea typeface="Calibri" pitchFamily="34" charset="-122"/>
+                <a:cs typeface="Calibri" pitchFamily="34" charset="-120"/>
+              </a:rPr>
+              <a:t>Madrid metro</a:t>
+            </a:r>
+            <a:endParaRPr lang="en-US" sz="1200" dirty="0"/>
+          </a:p>
+          <a:p>
+            <a:pPr algn="ctr" indent="0" marL="0">
+              <a:buNone/>
+            </a:pPr>
+            <a:r>
+              <a:rPr lang="en-US" sz="900" dirty="0">
+                <a:solidFill>
+                  <a:srgbClr val="7A3D00"/>
+                </a:solidFill>
+                <a:latin typeface="Calibri" pitchFamily="34" charset="0"/>
+                <a:ea typeface="Calibri" pitchFamily="34" charset="-122"/>
+                <a:cs typeface="Calibri" pitchFamily="34" charset="-120"/>
+              </a:rPr>
+              <a:t>B2C last-mile delivery</a:t>
+            </a:r>
+            <a:endParaRPr lang="en-US" sz="1200" dirty="0"/>
+          </a:p>
+        </p:txBody>
+      </p:sp>
+      <p:sp>
+        <p:nvSpPr>
+          <p:cNvPr id="25" name="Text 22"/>
+          <p:cNvSpPr/>
+          <p:nvPr/>
+        </p:nvSpPr>
+        <p:spPr>
+          <a:xfrm>
+            <a:off x="566928" y="4151376"/>
+            <a:ext cx="6400800" cy="256032"/>
+          </a:xfrm>
+          <a:prstGeom prst="rect">
+            <a:avLst/>
+          </a:prstGeom>
+          <a:noFill/>
+          <a:ln/>
+        </p:spPr>
+        <p:txBody>
+          <a:bodyPr wrap="square" lIns="0" tIns="0" rIns="0" bIns="0" rtlCol="0" anchor="ctr"/>
+          <a:lstStyle/>
+          <a:p>
+            <a:pPr algn="ctr" indent="0" marL="0">
+              <a:buNone/>
+            </a:pPr>
+            <a:r>
+              <a:rPr lang="en-US" sz="1000" i="1" dirty="0">
+                <a:solidFill>
+                  <a:srgbClr val="6B7C86"/>
+                </a:solidFill>
+                <a:latin typeface="Calibri" pitchFamily="34" charset="0"/>
+                <a:ea typeface="Calibri" pitchFamily="34" charset="-122"/>
+                <a:cs typeface="Calibri" pitchFamily="34" charset="-120"/>
+              </a:rPr>
+              <a:t>Own fleet, plus freelance drivers at peak</a:t>
+            </a:r>
+            <a:endParaRPr lang="en-US" sz="1000" dirty="0"/>
+          </a:p>
+        </p:txBody>
+      </p:sp>
+      <p:sp>
+        <p:nvSpPr>
+          <p:cNvPr id="26" name="Shape 23"/>
+          <p:cNvSpPr/>
+          <p:nvPr/>
+        </p:nvSpPr>
+        <p:spPr>
+          <a:xfrm>
+            <a:off x="7269480" y="2395728"/>
+            <a:ext cx="4352544" cy="2011680"/>
           </a:xfrm>
           <a:prstGeom prst="rect">
             <a:avLst/>
@@ -10954,14 +11429,14 @@
       </p:sp>
       <p:sp>
         <p:nvSpPr>
-          <p:cNvPr id="13" name="Text 10"/>
-          <p:cNvSpPr/>
-          <p:nvPr/>
-        </p:nvSpPr>
-        <p:spPr>
-          <a:xfrm>
-            <a:off x="768096" y="2578608"/>
-            <a:ext cx="3099816" cy="274320"/>
+          <p:cNvPr id="27" name="Text 24"/>
+          <p:cNvSpPr/>
+          <p:nvPr/>
+        </p:nvSpPr>
+        <p:spPr>
+          <a:xfrm>
+            <a:off x="7470648" y="2542032"/>
+            <a:ext cx="3941064" cy="310896"/>
           </a:xfrm>
           <a:prstGeom prst="rect">
             <a:avLst/>
@@ -10977,30 +11452,44 @@
               <a:buNone/>
             </a:pPr>
             <a:r>
-              <a:rPr lang="en-US" sz="950" b="1" spc="150" kern="0" dirty="0">
-                <a:solidFill>
-                  <a:srgbClr val="2E5C72"/>
-                </a:solidFill>
-                <a:latin typeface="Calibri" pitchFamily="34" charset="0"/>
-                <a:ea typeface="Calibri" pitchFamily="34" charset="-122"/>
-                <a:cs typeface="Calibri" pitchFamily="34" charset="-120"/>
-              </a:rPr>
-              <a:t>THE OPERATION</a:t>
-            </a:r>
-            <a:endParaRPr lang="en-US" sz="950" dirty="0"/>
-          </a:p>
-        </p:txBody>
-      </p:sp>
-      <p:sp>
-        <p:nvSpPr>
-          <p:cNvPr id="14" name="Text 11"/>
-          <p:cNvSpPr/>
-          <p:nvPr/>
-        </p:nvSpPr>
-        <p:spPr>
-          <a:xfrm>
-            <a:off x="768096" y="2852928"/>
-            <a:ext cx="3099816" cy="640080"/>
+              <a:rPr lang="en-US" sz="1100" dirty="0">
+                <a:solidFill>
+                  <a:srgbClr val="D97706"/>
+                </a:solidFill>
+                <a:latin typeface="Calibri" pitchFamily="34" charset="0"/>
+                <a:ea typeface="Calibri" pitchFamily="34" charset="-122"/>
+                <a:cs typeface="Calibri" pitchFamily="34" charset="-120"/>
+              </a:rPr>
+              <a:t>■ </a:t>
+            </a:r>
+            <a:pPr indent="0" marL="0">
+              <a:buNone/>
+            </a:pPr>
+            <a:r>
+              <a:rPr lang="en-US" sz="1300" b="1" dirty="0">
+                <a:solidFill>
+                  <a:srgbClr val="17384A"/>
+                </a:solidFill>
+                <a:latin typeface="Calibri" pitchFamily="34" charset="0"/>
+                <a:ea typeface="Calibri" pitchFamily="34" charset="-122"/>
+                <a:cs typeface="Calibri" pitchFamily="34" charset="-120"/>
+              </a:rPr>
+              <a:t>Who they serve, and the squeeze</a:t>
+            </a:r>
+            <a:endParaRPr lang="en-US" sz="1100" dirty="0"/>
+          </a:p>
+        </p:txBody>
+      </p:sp>
+      <p:sp>
+        <p:nvSpPr>
+          <p:cNvPr id="28" name="Text 25"/>
+          <p:cNvSpPr/>
+          <p:nvPr/>
+        </p:nvSpPr>
+        <p:spPr>
+          <a:xfrm>
+            <a:off x="7470648" y="2907792"/>
+            <a:ext cx="3941064" cy="1371600"/>
           </a:xfrm>
           <a:prstGeom prst="rect">
             <a:avLst/>
@@ -11012,50 +11501,15 @@
           <a:bodyPr wrap="square" lIns="0" tIns="0" rIns="0" bIns="0" rtlCol="0" anchor="t"/>
           <a:lstStyle/>
           <a:p>
-            <a:pPr indent="0" marL="0">
-              <a:buNone/>
-            </a:pPr>
-            <a:r>
-              <a:rPr lang="en-US" sz="1600" b="1" dirty="0">
-                <a:solidFill>
-                  <a:srgbClr val="17384A"/>
-                </a:solidFill>
-                <a:latin typeface="Georgia" pitchFamily="34" charset="0"/>
-                <a:ea typeface="Georgia" pitchFamily="34" charset="-122"/>
-                <a:cs typeface="Georgia" pitchFamily="34" charset="-120"/>
-              </a:rPr>
-              <a:t>One hub, two flows</a:t>
-            </a:r>
-            <a:endParaRPr lang="en-US" sz="1600" dirty="0"/>
-          </a:p>
-        </p:txBody>
-      </p:sp>
-      <p:sp>
-        <p:nvSpPr>
-          <p:cNvPr id="15" name="Text 12"/>
-          <p:cNvSpPr/>
-          <p:nvPr/>
-        </p:nvSpPr>
-        <p:spPr>
-          <a:xfrm>
-            <a:off x="768096" y="3474720"/>
-            <a:ext cx="3099816" cy="1417320"/>
-          </a:xfrm>
-          <a:prstGeom prst="rect">
-            <a:avLst/>
-          </a:prstGeom>
-          <a:noFill/>
-          <a:ln/>
-        </p:spPr>
-        <p:txBody>
-          <a:bodyPr wrap="square" lIns="0" tIns="0" rIns="0" bIns="0" rtlCol="0" anchor="t"/>
-          <a:lstStyle/>
-          <a:p>
-            <a:pPr indent="0" marL="0">
-              <a:buNone/>
-            </a:pPr>
-            <a:r>
-              <a:rPr lang="en-US" sz="1100" dirty="0">
+            <a:pPr marL="152400" indent="-152400">
+              <a:spcAft>
+                <a:spcPts val="500"/>
+              </a:spcAft>
+              <a:buSzPct val="100000"/>
+              <a:buChar char="•"/>
+            </a:pPr>
+            <a:r>
+              <a:rPr lang="en-US" sz="1050" dirty="0">
                 <a:solidFill>
                   <a:srgbClr val="16232B"/>
                 </a:solidFill>
@@ -11063,148 +11517,20 @@
                 <a:ea typeface="Calibri" pitchFamily="34" charset="-122"/>
                 <a:cs typeface="Calibri" pitchFamily="34" charset="-120"/>
               </a:rPr>
-              <a:t>Coslada, Madrid. Pallet freight in from Valencia and Catalonia; B2C last-mile across the Madrid metropolitan area. Own fleet, plus freelance drivers when volumes spike.</a:t>
-            </a:r>
-            <a:endParaRPr lang="en-US" sz="1100" dirty="0"/>
-          </a:p>
-        </p:txBody>
-      </p:sp>
-      <p:sp>
-        <p:nvSpPr>
-          <p:cNvPr id="16" name="Shape 13"/>
-          <p:cNvSpPr/>
-          <p:nvPr/>
-        </p:nvSpPr>
-        <p:spPr>
-          <a:xfrm>
-            <a:off x="4343400" y="2395728"/>
-            <a:ext cx="3502152" cy="2606040"/>
-          </a:xfrm>
-          <a:prstGeom prst="rect">
-            <a:avLst/>
-          </a:prstGeom>
-          <a:solidFill>
-            <a:srgbClr val="FFFFFF"/>
-          </a:solidFill>
-          <a:ln w="12700">
-            <a:solidFill>
-              <a:srgbClr val="D6E2E8"/>
-            </a:solidFill>
-            <a:prstDash val="solid"/>
-          </a:ln>
-          <a:effectLst>
-            <a:outerShdw sx="100000" sy="100000" kx="0" ky="0" algn="bl" rotWithShape="0" blurRad="88900" dist="38100" dir="8100000">
-              <a:srgbClr val="1C2440">
-                <a:alpha val="13000"/>
-              </a:srgbClr>
-            </a:outerShdw>
-          </a:effectLst>
-        </p:spPr>
-      </p:sp>
-      <p:sp>
-        <p:nvSpPr>
-          <p:cNvPr id="17" name="Text 14"/>
-          <p:cNvSpPr/>
-          <p:nvPr/>
-        </p:nvSpPr>
-        <p:spPr>
-          <a:xfrm>
-            <a:off x="4544568" y="2578608"/>
-            <a:ext cx="3099816" cy="274320"/>
-          </a:xfrm>
-          <a:prstGeom prst="rect">
-            <a:avLst/>
-          </a:prstGeom>
-          <a:noFill/>
-          <a:ln/>
-        </p:spPr>
-        <p:txBody>
-          <a:bodyPr wrap="square" lIns="0" tIns="0" rIns="0" bIns="0" rtlCol="0" anchor="ctr"/>
-          <a:lstStyle/>
-          <a:p>
-            <a:pPr indent="0" marL="0">
-              <a:buNone/>
-            </a:pPr>
-            <a:r>
-              <a:rPr lang="en-US" sz="950" b="1" spc="150" kern="0" dirty="0">
-                <a:solidFill>
-                  <a:srgbClr val="2E5C72"/>
-                </a:solidFill>
-                <a:latin typeface="Calibri" pitchFamily="34" charset="0"/>
-                <a:ea typeface="Calibri" pitchFamily="34" charset="-122"/>
-                <a:cs typeface="Calibri" pitchFamily="34" charset="-120"/>
-              </a:rPr>
-              <a:t>THE CUSTOMERS</a:t>
-            </a:r>
-            <a:endParaRPr lang="en-US" sz="950" dirty="0"/>
-          </a:p>
-        </p:txBody>
-      </p:sp>
-      <p:sp>
-        <p:nvSpPr>
-          <p:cNvPr id="18" name="Text 15"/>
-          <p:cNvSpPr/>
-          <p:nvPr/>
-        </p:nvSpPr>
-        <p:spPr>
-          <a:xfrm>
-            <a:off x="4544568" y="2852928"/>
-            <a:ext cx="3099816" cy="640080"/>
-          </a:xfrm>
-          <a:prstGeom prst="rect">
-            <a:avLst/>
-          </a:prstGeom>
-          <a:noFill/>
-          <a:ln/>
-        </p:spPr>
-        <p:txBody>
-          <a:bodyPr wrap="square" lIns="0" tIns="0" rIns="0" bIns="0" rtlCol="0" anchor="t"/>
-          <a:lstStyle/>
-          <a:p>
-            <a:pPr indent="0" marL="0">
-              <a:buNone/>
-            </a:pPr>
-            <a:r>
-              <a:rPr lang="en-US" sz="1600" b="1" dirty="0">
-                <a:solidFill>
-                  <a:srgbClr val="17384A"/>
-                </a:solidFill>
-                <a:latin typeface="Georgia" pitchFamily="34" charset="0"/>
-                <a:ea typeface="Georgia" pitchFamily="34" charset="-122"/>
-                <a:cs typeface="Georgia" pitchFamily="34" charset="-120"/>
-              </a:rPr>
-              <a:t>E-commerce sets the bar</a:t>
-            </a:r>
-            <a:endParaRPr lang="en-US" sz="1600" dirty="0"/>
-          </a:p>
-        </p:txBody>
-      </p:sp>
-      <p:sp>
-        <p:nvSpPr>
-          <p:cNvPr id="19" name="Text 16"/>
-          <p:cNvSpPr/>
-          <p:nvPr/>
-        </p:nvSpPr>
-        <p:spPr>
-          <a:xfrm>
-            <a:off x="4544568" y="3474720"/>
-            <a:ext cx="3099816" cy="1417320"/>
-          </a:xfrm>
-          <a:prstGeom prst="rect">
-            <a:avLst/>
-          </a:prstGeom>
-          <a:noFill/>
-          <a:ln/>
-        </p:spPr>
-        <p:txBody>
-          <a:bodyPr wrap="square" lIns="0" tIns="0" rIns="0" bIns="0" rtlCol="0" anchor="t"/>
-          <a:lstStyle/>
-          <a:p>
-            <a:pPr indent="0" marL="0">
-              <a:buNone/>
-            </a:pPr>
-            <a:r>
-              <a:rPr lang="en-US" sz="1100" dirty="0">
+              <a:t>E-commerce, B2B shippers and regular pallet contracts.</a:t>
+            </a:r>
+            <a:endParaRPr lang="en-US" sz="1050" dirty="0"/>
+          </a:p>
+          <a:p>
+            <a:pPr marL="152400" indent="-152400">
+              <a:spcAft>
+                <a:spcPts val="500"/>
+              </a:spcAft>
+              <a:buSzPct val="100000"/>
+              <a:buChar char="•"/>
+            </a:pPr>
+            <a:r>
+              <a:rPr lang="en-US" sz="1050" dirty="0">
                 <a:solidFill>
                   <a:srgbClr val="16232B"/>
                 </a:solidFill>
@@ -11212,165 +11538,63 @@
                 <a:ea typeface="Calibri" pitchFamily="34" charset="-122"/>
                 <a:cs typeface="Calibri" pitchFamily="34" charset="-120"/>
               </a:rPr>
-              <a:t>E-commerce companies, B2B shippers, and businesses on regular parcel or pallet contracts. The e-commerce end expects fast delivery and increasingly precise arrival information.</a:t>
-            </a:r>
-            <a:endParaRPr lang="en-US" sz="1100" dirty="0"/>
-          </a:p>
-        </p:txBody>
-      </p:sp>
-      <p:sp>
-        <p:nvSpPr>
-          <p:cNvPr id="20" name="Shape 17"/>
-          <p:cNvSpPr/>
-          <p:nvPr/>
-        </p:nvSpPr>
-        <p:spPr>
-          <a:xfrm>
-            <a:off x="8119872" y="2395728"/>
-            <a:ext cx="3502152" cy="2606040"/>
-          </a:xfrm>
-          <a:prstGeom prst="rect">
-            <a:avLst/>
-          </a:prstGeom>
-          <a:solidFill>
-            <a:srgbClr val="17384A"/>
-          </a:solidFill>
-          <a:ln/>
-          <a:effectLst>
-            <a:outerShdw sx="100000" sy="100000" kx="0" ky="0" algn="bl" rotWithShape="0" blurRad="88900" dist="38100" dir="8100000">
-              <a:srgbClr val="1C2440">
-                <a:alpha val="13000"/>
-              </a:srgbClr>
-            </a:outerShdw>
-          </a:effectLst>
-        </p:spPr>
-      </p:sp>
-      <p:sp>
-        <p:nvSpPr>
-          <p:cNvPr id="21" name="Text 18"/>
-          <p:cNvSpPr/>
-          <p:nvPr/>
-        </p:nvSpPr>
-        <p:spPr>
-          <a:xfrm>
-            <a:off x="8321040" y="2578608"/>
-            <a:ext cx="3099816" cy="274320"/>
-          </a:xfrm>
-          <a:prstGeom prst="rect">
-            <a:avLst/>
-          </a:prstGeom>
-          <a:noFill/>
-          <a:ln/>
-        </p:spPr>
-        <p:txBody>
-          <a:bodyPr wrap="square" lIns="0" tIns="0" rIns="0" bIns="0" rtlCol="0" anchor="ctr"/>
-          <a:lstStyle/>
-          <a:p>
-            <a:pPr indent="0" marL="0">
-              <a:buNone/>
-            </a:pPr>
-            <a:r>
-              <a:rPr lang="en-US" sz="950" b="1" spc="150" kern="0" dirty="0">
-                <a:solidFill>
-                  <a:srgbClr val="D97706"/>
-                </a:solidFill>
-                <a:latin typeface="Calibri" pitchFamily="34" charset="0"/>
-                <a:ea typeface="Calibri" pitchFamily="34" charset="-122"/>
-                <a:cs typeface="Calibri" pitchFamily="34" charset="-120"/>
-              </a:rPr>
-              <a:t>THE PRESSURE</a:t>
-            </a:r>
-            <a:endParaRPr lang="en-US" sz="950" dirty="0"/>
-          </a:p>
-        </p:txBody>
-      </p:sp>
-      <p:sp>
-        <p:nvSpPr>
-          <p:cNvPr id="22" name="Text 19"/>
-          <p:cNvSpPr/>
-          <p:nvPr/>
-        </p:nvSpPr>
-        <p:spPr>
-          <a:xfrm>
-            <a:off x="8321040" y="2852928"/>
-            <a:ext cx="3099816" cy="640080"/>
-          </a:xfrm>
-          <a:prstGeom prst="rect">
-            <a:avLst/>
-          </a:prstGeom>
-          <a:noFill/>
-          <a:ln/>
-        </p:spPr>
-        <p:txBody>
-          <a:bodyPr wrap="square" lIns="0" tIns="0" rIns="0" bIns="0" rtlCol="0" anchor="t"/>
-          <a:lstStyle/>
-          <a:p>
-            <a:pPr indent="0" marL="0">
-              <a:buNone/>
-            </a:pPr>
-            <a:r>
-              <a:rPr lang="en-US" sz="1600" b="1" dirty="0">
-                <a:solidFill>
-                  <a:srgbClr val="FFFFFF"/>
-                </a:solidFill>
-                <a:latin typeface="Georgia" pitchFamily="34" charset="0"/>
-                <a:ea typeface="Georgia" pitchFamily="34" charset="-122"/>
-                <a:cs typeface="Georgia" pitchFamily="34" charset="-120"/>
-              </a:rPr>
-              <a:t>More reliable, not more vans</a:t>
-            </a:r>
-            <a:endParaRPr lang="en-US" sz="1600" dirty="0"/>
-          </a:p>
-        </p:txBody>
-      </p:sp>
-      <p:sp>
-        <p:nvSpPr>
-          <p:cNvPr id="23" name="Text 20"/>
-          <p:cNvSpPr/>
-          <p:nvPr/>
-        </p:nvSpPr>
-        <p:spPr>
-          <a:xfrm>
-            <a:off x="8321040" y="3474720"/>
-            <a:ext cx="3099816" cy="1417320"/>
-          </a:xfrm>
-          <a:prstGeom prst="rect">
-            <a:avLst/>
-          </a:prstGeom>
-          <a:noFill/>
-          <a:ln/>
-        </p:spPr>
-        <p:txBody>
-          <a:bodyPr wrap="square" lIns="0" tIns="0" rIns="0" bIns="0" rtlCol="0" anchor="t"/>
-          <a:lstStyle/>
-          <a:p>
-            <a:pPr indent="0" marL="0">
-              <a:buNone/>
-            </a:pPr>
-            <a:r>
-              <a:rPr lang="en-US" sz="1100" dirty="0">
-                <a:solidFill>
-                  <a:srgbClr val="FFFFFF"/>
-                </a:solidFill>
-                <a:latin typeface="Calibri" pitchFamily="34" charset="0"/>
-                <a:ea typeface="Calibri" pitchFamily="34" charset="-122"/>
-                <a:cs typeface="Calibri" pitchFamily="34" charset="-120"/>
-              </a:rPr>
-              <a:t>Volumes spike at Black Friday and Christmas. Margins are tight. Management wants reliability out of the resources already in place — not a bigger fleet and not more people.</a:t>
-            </a:r>
-            <a:endParaRPr lang="en-US" sz="1100" dirty="0"/>
-          </a:p>
-        </p:txBody>
-      </p:sp>
-      <p:sp>
-        <p:nvSpPr>
-          <p:cNvPr id="24" name="Shape 21"/>
-          <p:cNvSpPr/>
-          <p:nvPr/>
-        </p:nvSpPr>
-        <p:spPr>
-          <a:xfrm>
-            <a:off x="566928" y="5385816"/>
+              <a:t>E-commerce sets the bar: fast delivery, and precise arrival information.</a:t>
+            </a:r>
+            <a:endParaRPr lang="en-US" sz="1050" dirty="0"/>
+          </a:p>
+          <a:p>
+            <a:pPr marL="152400" indent="-152400">
+              <a:spcAft>
+                <a:spcPts val="500"/>
+              </a:spcAft>
+              <a:buSzPct val="100000"/>
+              <a:buChar char="•"/>
+            </a:pPr>
+            <a:r>
+              <a:rPr lang="en-US" sz="1050" dirty="0">
+                <a:solidFill>
+                  <a:srgbClr val="16232B"/>
+                </a:solidFill>
+                <a:latin typeface="Calibri" pitchFamily="34" charset="0"/>
+                <a:ea typeface="Calibri" pitchFamily="34" charset="-122"/>
+                <a:cs typeface="Calibri" pitchFamily="34" charset="-120"/>
+              </a:rPr>
+              <a:t>Volumes spike hard at Black Friday and Christmas.</a:t>
+            </a:r>
+            <a:endParaRPr lang="en-US" sz="1050" dirty="0"/>
+          </a:p>
+          <a:p>
+            <a:pPr marL="152400" indent="-152400">
+              <a:spcAft>
+                <a:spcPts val="500"/>
+              </a:spcAft>
+              <a:buSzPct val="100000"/>
+              <a:buChar char="•"/>
+            </a:pPr>
+            <a:r>
+              <a:rPr lang="en-US" sz="1050" dirty="0">
+                <a:solidFill>
+                  <a:srgbClr val="16232B"/>
+                </a:solidFill>
+                <a:latin typeface="Calibri" pitchFamily="34" charset="0"/>
+                <a:ea typeface="Calibri" pitchFamily="34" charset="-122"/>
+                <a:cs typeface="Calibri" pitchFamily="34" charset="-120"/>
+              </a:rPr>
+              <a:t>Margins are tight — more reliability from the same vans and people.</a:t>
+            </a:r>
+            <a:endParaRPr lang="en-US" sz="1050" dirty="0"/>
+          </a:p>
+        </p:txBody>
+      </p:sp>
+      <p:sp>
+        <p:nvSpPr>
+          <p:cNvPr id="29" name="Shape 26"/>
+          <p:cNvSpPr/>
+          <p:nvPr/>
+        </p:nvSpPr>
+        <p:spPr>
+          <a:xfrm>
+            <a:off x="566928" y="5065776"/>
             <a:ext cx="11055096" cy="786384"/>
           </a:xfrm>
           <a:prstGeom prst="rect">
@@ -11384,13 +11608,13 @@
       </p:sp>
       <p:sp>
         <p:nvSpPr>
-          <p:cNvPr id="25" name="Shape 22"/>
-          <p:cNvSpPr/>
-          <p:nvPr/>
-        </p:nvSpPr>
-        <p:spPr>
-          <a:xfrm>
-            <a:off x="566928" y="5385816"/>
+          <p:cNvPr id="30" name="Shape 27"/>
+          <p:cNvSpPr/>
+          <p:nvPr/>
+        </p:nvSpPr>
+        <p:spPr>
+          <a:xfrm>
+            <a:off x="566928" y="5065776"/>
             <a:ext cx="82296" cy="786384"/>
           </a:xfrm>
           <a:prstGeom prst="rect">
@@ -11404,13 +11628,13 @@
       </p:sp>
       <p:sp>
         <p:nvSpPr>
-          <p:cNvPr id="26" name="Text 23"/>
-          <p:cNvSpPr/>
-          <p:nvPr/>
-        </p:nvSpPr>
-        <p:spPr>
-          <a:xfrm>
-            <a:off x="822960" y="5385816"/>
+          <p:cNvPr id="31" name="Text 28"/>
+          <p:cNvSpPr/>
+          <p:nvPr/>
+        </p:nvSpPr>
+        <p:spPr>
+          <a:xfrm>
+            <a:off x="822960" y="5065776"/>
             <a:ext cx="10597896" cy="786384"/>
           </a:xfrm>
           <a:prstGeom prst="rect">

--- a/ahukannah_consultant_solutions.pptx
+++ b/ahukannah_consultant_solutions.pptx
@@ -16214,7 +16214,7 @@
         <p:spPr>
           <a:xfrm>
             <a:off x="566928" y="5001768"/>
-            <a:ext cx="11055096" cy="713232"/>
+            <a:ext cx="11055096" cy="786384"/>
           </a:xfrm>
           <a:prstGeom prst="rect">
             <a:avLst/>
@@ -16234,7 +16234,7 @@
         <p:spPr>
           <a:xfrm>
             <a:off x="566928" y="5001768"/>
-            <a:ext cx="82296" cy="713232"/>
+            <a:ext cx="82296" cy="786384"/>
           </a:xfrm>
           <a:prstGeom prst="rect">
             <a:avLst/>
@@ -16254,7 +16254,7 @@
         <p:spPr>
           <a:xfrm>
             <a:off x="822960" y="5001768"/>
-            <a:ext cx="10597896" cy="713232"/>
+            <a:ext cx="10597896" cy="786384"/>
           </a:xfrm>
           <a:prstGeom prst="rect">
             <a:avLst/>
@@ -16270,7 +16270,7 @@
               <a:buNone/>
             </a:pPr>
             <a:r>
-              <a:rPr lang="en-US" sz="1250" b="1" dirty="0">
+              <a:rPr lang="en-US" sz="1100" b="1" spc="100" kern="0" dirty="0">
                 <a:solidFill>
                   <a:srgbClr val="D97706"/>
                 </a:solidFill>
@@ -16278,13 +16278,13 @@
                 <a:ea typeface="Calibri" pitchFamily="34" charset="-122"/>
                 <a:cs typeface="Calibri" pitchFamily="34" charset="-120"/>
               </a:rPr>
-              <a:t>So the goal is your goal:   </a:t>
+              <a:t>IN YOUR WORDS   </a:t>
             </a:r>
             <a:pPr indent="0" marL="0">
               <a:buNone/>
             </a:pPr>
             <a:r>
-              <a:rPr lang="en-US" sz="1250" dirty="0">
+              <a:rPr lang="en-US" sz="1250" i="1" dirty="0">
                 <a:solidFill>
                   <a:srgbClr val="16232B"/>
                 </a:solidFill>
@@ -16292,7 +16292,7 @@
                 <a:ea typeface="Calibri" pitchFamily="34" charset="-122"/>
                 <a:cs typeface="Calibri" pitchFamily="34" charset="-120"/>
               </a:rPr>
-              <a:t>more reliable deliveries without adding vehicles or people every time volume grows.</a:t>
+              <a:t>“The main priority is to make deliveries more reliable without simply adding more vehicles or more people every time volumes grow.”</a:t>
             </a:r>
             <a:endParaRPr lang="en-US" sz="1250" dirty="0"/>
           </a:p>

--- a/ahukannah_consultant_solutions.pptx
+++ b/ahukannah_consultant_solutions.pptx
@@ -3087,7 +3087,7 @@
                 <a:ea typeface="Calibri" pitchFamily="34" charset="-122"/>
                 <a:cs typeface="Calibri" pitchFamily="34" charset="-120"/>
               </a:rPr>
-              <a:t>SILVERTRUST   ·   IBERIANEX LOGISTICS S.A.   ·   DISCOVERY FINDINGS</a:t>
+              <a:t>SILVERTRUST   ·   IBERIANEX LOGISTICS S.A.   ·   PROPOSED APPROACH</a:t>
             </a:r>
             <a:endParaRPr lang="en-US" sz="1050" dirty="0"/>
           </a:p>
@@ -4172,7 +4172,7 @@
                 <a:ea typeface="Calibri" pitchFamily="34" charset="-122"/>
                 <a:cs typeface="Calibri" pitchFamily="34" charset="-120"/>
               </a:rPr>
-              <a:t>SILVERTRUST   ·   IBERIANEX LOGISTICS S.A.   ·   DISCOVERY FINDINGS</a:t>
+              <a:t>SILVERTRUST   ·   IBERIANEX LOGISTICS S.A.   ·   PROPOSED APPROACH</a:t>
             </a:r>
             <a:endParaRPr lang="en-US" sz="1050" dirty="0"/>
           </a:p>
@@ -5107,7 +5107,7 @@
                 <a:ea typeface="Calibri" pitchFamily="34" charset="-122"/>
                 <a:cs typeface="Calibri" pitchFamily="34" charset="-120"/>
               </a:rPr>
-              <a:t>SILVERTRUST   ·   IBERIANEX LOGISTICS S.A.   ·   DISCOVERY FINDINGS</a:t>
+              <a:t>SILVERTRUST   ·   IBERIANEX LOGISTICS S.A.   ·   PROPOSED APPROACH</a:t>
             </a:r>
             <a:endParaRPr lang="en-US" sz="1050" dirty="0"/>
           </a:p>
@@ -5963,7 +5963,7 @@
                 <a:ea typeface="Calibri" pitchFamily="34" charset="-122"/>
                 <a:cs typeface="Calibri" pitchFamily="34" charset="-120"/>
               </a:rPr>
-              <a:t>SILVERTRUST   ·   IBERIANEX LOGISTICS S.A.   ·   DISCOVERY FINDINGS</a:t>
+              <a:t>SILVERTRUST   ·   IBERIANEX LOGISTICS S.A.   ·   PROPOSED APPROACH</a:t>
             </a:r>
             <a:endParaRPr lang="en-US" sz="1050" dirty="0"/>
           </a:p>
@@ -7629,7 +7629,7 @@
                 <a:ea typeface="Calibri" pitchFamily="34" charset="-122"/>
                 <a:cs typeface="Calibri" pitchFamily="34" charset="-120"/>
               </a:rPr>
-              <a:t>SILVERTRUST   ·   IBERIANEX LOGISTICS S.A.   ·   DISCOVERY FINDINGS</a:t>
+              <a:t>SILVERTRUST   ·   IBERIANEX LOGISTICS S.A.   ·   PROPOSED APPROACH</a:t>
             </a:r>
             <a:endParaRPr lang="en-US" sz="1050" dirty="0"/>
           </a:p>
@@ -8857,7 +8857,7 @@
                 <a:ea typeface="Calibri" pitchFamily="34" charset="-122"/>
                 <a:cs typeface="Calibri" pitchFamily="34" charset="-120"/>
               </a:rPr>
-              <a:t>SILVERTRUST   ·   IBERIANEX LOGISTICS S.A.   ·   DISCOVERY FINDINGS</a:t>
+              <a:t>SILVERTRUST   ·   IBERIANEX LOGISTICS S.A.   ·   PROPOSED APPROACH</a:t>
             </a:r>
             <a:endParaRPr lang="en-US" sz="1050" dirty="0"/>
           </a:p>
@@ -10072,7 +10072,7 @@
                 <a:ea typeface="Calibri" pitchFamily="34" charset="-122"/>
                 <a:cs typeface="Calibri" pitchFamily="34" charset="-120"/>
               </a:rPr>
-              <a:t>SILVERTRUST   ·   IBERIANEX LOGISTICS S.A.   ·   DISCOVERY FINDINGS</a:t>
+              <a:t>SILVERTRUST   ·   IBERIANEX LOGISTICS S.A.   ·   PROPOSED APPROACH</a:t>
             </a:r>
             <a:endParaRPr lang="en-US" sz="1050" dirty="0"/>
           </a:p>
@@ -16363,7 +16363,7 @@
                 <a:ea typeface="Calibri" pitchFamily="34" charset="-122"/>
                 <a:cs typeface="Calibri" pitchFamily="34" charset="-120"/>
               </a:rPr>
-              <a:t>SILVERTRUST   ·   IBERIANEX LOGISTICS S.A.   ·   DISCOVERY FINDINGS</a:t>
+              <a:t>SILVERTRUST   ·   IBERIANEX LOGISTICS S.A.   ·   PROPOSED APPROACH</a:t>
             </a:r>
             <a:endParaRPr lang="en-US" sz="1050" dirty="0"/>
           </a:p>
@@ -17449,7 +17449,7 @@
                 <a:ea typeface="Calibri" pitchFamily="34" charset="-122"/>
                 <a:cs typeface="Calibri" pitchFamily="34" charset="-120"/>
               </a:rPr>
-              <a:t>SILVERTRUST   ·   IBERIANEX LOGISTICS S.A.   ·   DISCOVERY FINDINGS</a:t>
+              <a:t>SILVERTRUST   ·   IBERIANEX LOGISTICS S.A.   ·   PROPOSED APPROACH</a:t>
             </a:r>
             <a:endParaRPr lang="en-US" sz="1050" dirty="0"/>
           </a:p>

--- a/ahukannah_consultant_solutions.pptx
+++ b/ahukannah_consultant_solutions.pptx
@@ -4,6 +4,9 @@
   <p:sldMasterIdLst>
     <p:sldMasterId id="2147483648" r:id="rId1"/>
   </p:sldMasterIdLst>
+  <p:notesMasterIdLst>
+    <p:notesMasterId r:id="rId18"/>
+  </p:notesMasterIdLst>
   <p:sldIdLst>
     <p:sldId id="256" r:id="rId2"/>
     <p:sldId id="257" r:id="rId3"/>
@@ -22,9 +25,6 @@
     <p:sldId id="270" r:id="rId16"/>
     <p:sldId id="271" r:id="rId17"/>
   </p:sldIdLst>
-  <p:notesMasterIdLst>
-    <p:notesMasterId r:id="rId18"/>
-  </p:notesMasterIdLst>
   <p:sldSz cx="12192000" cy="6858000"/>
   <p:notesSz cx="6858000" cy="12192000"/>
   <p:defaultTextStyle>
@@ -119,6 +119,11 @@
       </a:defRPr>
     </a:lvl9pPr>
   </p:defaultTextStyle>
+  <p:extLst>
+    <p:ext uri="{EFAFB233-063F-42B5-8137-9DF3F51BA10A}">
+      <p15:sldGuideLst xmlns:p15="http://schemas.microsoft.com/office/powerpoint/2012/main"/>
+    </p:ext>
+  </p:extLst>
 </p:presentation>
 </file>
 
@@ -144,234 +149,10 @@
           <a:chExt cx="0" cy="0"/>
         </a:xfrm>
       </p:grpSpPr>
-      <p:sp>
-        <p:nvSpPr>
-          <p:cNvPr id="2" name="Header Placeholder 1"/>
-          <p:cNvSpPr>
-            <a:spLocks noGrp="1"/>
-          </p:cNvSpPr>
-          <p:nvPr>
-            <p:ph type="hdr" sz="quarter"/>
-          </p:nvPr>
-        </p:nvSpPr>
-        <p:spPr>
-          <a:xfrm>
-            <a:off x="0" y="0"/>
-            <a:ext cx="2971800" cy="458788"/>
-          </a:xfrm>
-          <a:prstGeom prst="rect">
-            <a:avLst/>
-          </a:prstGeom>
-        </p:spPr>
-        <p:txBody>
-          <a:bodyPr vert="horz" lIns="91440" tIns="45720" rIns="91440" bIns="45720" rtlCol="0"/>
-          <a:lstStyle>
-            <a:lvl1pPr algn="l">
-              <a:defRPr sz="1200"/>
-            </a:lvl1pPr>
-          </a:lstStyle>
-          <a:p>
-            <a:endParaRPr lang="en-US"/>
-          </a:p>
-        </p:txBody>
-      </p:sp>
-      <p:sp>
-        <p:nvSpPr>
-          <p:cNvPr id="3" name="Date Placeholder 2"/>
-          <p:cNvSpPr>
-            <a:spLocks noGrp="1"/>
-          </p:cNvSpPr>
-          <p:nvPr>
-            <p:ph type="dt" idx="1"/>
-          </p:nvPr>
-        </p:nvSpPr>
-        <p:spPr>
-          <a:xfrm>
-            <a:off x="3884613" y="0"/>
-            <a:ext cx="2971800" cy="458788"/>
-          </a:xfrm>
-          <a:prstGeom prst="rect">
-            <a:avLst/>
-          </a:prstGeom>
-        </p:spPr>
-        <p:txBody>
-          <a:bodyPr vert="horz" lIns="91440" tIns="45720" rIns="91440" bIns="45720" rtlCol="0"/>
-          <a:lstStyle>
-            <a:lvl1pPr algn="r">
-              <a:defRPr sz="1200"/>
-            </a:lvl1pPr>
-          </a:lstStyle>
-          <a:p>
-            <a:fld id="{5282F153-3F37-0F45-9E97-73ACFA13230C}" type="datetimeFigureOut">
-              <a:rPr lang="en-US"/>
-              <a:t>7/23/19</a:t>
-            </a:fld>
-            <a:endParaRPr lang="en-US"/>
-          </a:p>
-        </p:txBody>
-      </p:sp>
-      <p:sp>
-        <p:nvSpPr>
-          <p:cNvPr id="4" name="Slide Image Placeholder 3"/>
-          <p:cNvSpPr>
-            <a:spLocks noGrp="1" noRot="1" noChangeAspect="1"/>
-          </p:cNvSpPr>
-          <p:nvPr>
-            <p:ph type="sldImg" idx="2"/>
-          </p:nvPr>
-        </p:nvSpPr>
-        <p:spPr>
-          <a:xfrm>
-            <a:off x="685800" y="1143000"/>
-            <a:ext cx="5486400" cy="3086100"/>
-          </a:xfrm>
-          <a:prstGeom prst="rect">
-            <a:avLst/>
-          </a:prstGeom>
-          <a:noFill/>
-          <a:ln w="12700">
-            <a:solidFill>
-              <a:prstClr val="black"/>
-            </a:solidFill>
-          </a:ln>
-        </p:spPr>
-        <p:txBody>
-          <a:bodyPr vert="horz" lIns="91440" tIns="45720" rIns="91440" bIns="45720" rtlCol="0" anchor="ctr"/>
-          <a:lstStyle/>
-          <a:p>
-            <a:endParaRPr lang="en-US"/>
-          </a:p>
-        </p:txBody>
-      </p:sp>
-      <p:sp>
-        <p:nvSpPr>
-          <p:cNvPr id="5" name="Notes Placeholder 4"/>
-          <p:cNvSpPr>
-            <a:spLocks noGrp="1"/>
-          </p:cNvSpPr>
-          <p:nvPr>
-            <p:ph type="body" sz="quarter" idx="3"/>
-          </p:nvPr>
-        </p:nvSpPr>
-        <p:spPr>
-          <a:xfrm>
-            <a:off x="685800" y="4400550"/>
-            <a:ext cx="5486400" cy="3600450"/>
-          </a:xfrm>
-          <a:prstGeom prst="rect">
-            <a:avLst/>
-          </a:prstGeom>
-        </p:spPr>
-        <p:txBody>
-          <a:bodyPr vert="horz" lIns="91440" tIns="45720" rIns="91440" bIns="45720" rtlCol="0"/>
-          <a:lstStyle/>
-          <a:p>
-            <a:pPr lvl="0"/>
-            <a:r>
-              <a:rPr lang="en-US"/>
-              <a:t>Click to edit Master text styles</a:t>
-            </a:r>
-          </a:p>
-          <a:p>
-            <a:pPr lvl="1"/>
-            <a:r>
-              <a:rPr lang="en-US"/>
-              <a:t>Second level</a:t>
-            </a:r>
-          </a:p>
-          <a:p>
-            <a:pPr lvl="2"/>
-            <a:r>
-              <a:rPr lang="en-US"/>
-              <a:t>Third level</a:t>
-            </a:r>
-          </a:p>
-          <a:p>
-            <a:pPr lvl="3"/>
-            <a:r>
-              <a:rPr lang="en-US"/>
-              <a:t>Fourth level</a:t>
-            </a:r>
-          </a:p>
-          <a:p>
-            <a:pPr lvl="4"/>
-            <a:r>
-              <a:rPr lang="en-US"/>
-              <a:t>Fifth level</a:t>
-            </a:r>
-          </a:p>
-        </p:txBody>
-      </p:sp>
-      <p:sp>
-        <p:nvSpPr>
-          <p:cNvPr id="6" name="Footer Placeholder 5"/>
-          <p:cNvSpPr>
-            <a:spLocks noGrp="1"/>
-          </p:cNvSpPr>
-          <p:nvPr>
-            <p:ph type="ftr" sz="quarter" idx="4"/>
-          </p:nvPr>
-        </p:nvSpPr>
-        <p:spPr>
-          <a:xfrm>
-            <a:off x="0" y="8685213"/>
-            <a:ext cx="2971800" cy="458787"/>
-          </a:xfrm>
-          <a:prstGeom prst="rect">
-            <a:avLst/>
-          </a:prstGeom>
-        </p:spPr>
-        <p:txBody>
-          <a:bodyPr vert="horz" lIns="91440" tIns="45720" rIns="91440" bIns="45720" rtlCol="0" anchor="b"/>
-          <a:lstStyle>
-            <a:lvl1pPr algn="l">
-              <a:defRPr sz="1200"/>
-            </a:lvl1pPr>
-          </a:lstStyle>
-          <a:p>
-            <a:endParaRPr lang="en-US"/>
-          </a:p>
-        </p:txBody>
-      </p:sp>
-      <p:sp>
-        <p:nvSpPr>
-          <p:cNvPr id="7" name="Slide Number Placeholder 6"/>
-          <p:cNvSpPr>
-            <a:spLocks noGrp="1"/>
-          </p:cNvSpPr>
-          <p:nvPr>
-            <p:ph type="sldNum" sz="quarter" idx="5"/>
-          </p:nvPr>
-        </p:nvSpPr>
-        <p:spPr>
-          <a:xfrm>
-            <a:off x="3884613" y="8685213"/>
-            <a:ext cx="2971800" cy="458787"/>
-          </a:xfrm>
-          <a:prstGeom prst="rect">
-            <a:avLst/>
-          </a:prstGeom>
-        </p:spPr>
-        <p:txBody>
-          <a:bodyPr vert="horz" lIns="91440" tIns="45720" rIns="91440" bIns="45720" rtlCol="0" anchor="b"/>
-          <a:lstStyle>
-            <a:lvl1pPr algn="r">
-              <a:defRPr sz="1200"/>
-            </a:lvl1pPr>
-          </a:lstStyle>
-          <a:p>
-            <a:fld id="{CE5E9CC1-C706-0F49-92D6-E571CC5EEA8F}" type="slidenum">
-              <a:rPr lang="en-US"/>
-              <a:t>‹#›</a:t>
-            </a:fld>
-            <a:endParaRPr lang="en-US"/>
-          </a:p>
-        </p:txBody>
-      </p:sp>
     </p:spTree>
     <p:extLst>
       <p:ext uri="{BB962C8B-B14F-4D97-AF65-F5344CB8AC3E}">
-        <p14:creationId xmlns:p14="http://schemas.microsoft.com/office/powerpoint/2010/main" val="1024086991"/>
+        <p14:creationId xmlns:p14="http://schemas.microsoft.com/office/powerpoint/2010/main" val="4071180904"/>
       </p:ext>
     </p:extLst>
   </p:cSld>
@@ -516,25 +297,127 @@
           <a:lstStyle/>
           <a:p>
             <a:r>
+              <a:rPr dirty="0"/>
               <a:t>[Open standing, deck on screen, do not read the title.]</a:t>
             </a:r>
           </a:p>
-          <a:p/>
-          <a:p>
-            <a:r>
-              <a:t>Thank you for the time last week. This is what I heard, what I think the problem actually is, and what I would do about it.</a:t>
-            </a:r>
-          </a:p>
-          <a:p/>
-          <a:p>
-            <a:r>
-              <a:t>Three things to say up front. First, nothing in here needs you to replace the ERP. Second, nothing in here needs you to stop operations. Third, I am not proposing to track your drivers.</a:t>
-            </a:r>
-          </a:p>
-          <a:p/>
-          <a:p>
-            <a:r>
-              <a:t>The whole deck takes about twenty minutes. Stop me wherever you disagree — if I have got your morning wrong, the rest of it is wrong too.</a:t>
+          <a:p>
+            <a:endParaRPr dirty="0"/>
+          </a:p>
+          <a:p>
+            <a:r>
+              <a:rPr lang="en-US" dirty="0"/>
+              <a:t>Gretel, t</a:t>
+            </a:r>
+            <a:r>
+              <a:rPr dirty="0"/>
+              <a:t>hank you for </a:t>
+            </a:r>
+            <a:r>
+              <a:rPr lang="en-US" dirty="0"/>
+              <a:t>your time in the past 2 days</a:t>
+            </a:r>
+            <a:r>
+              <a:rPr dirty="0"/>
+              <a:t>. </a:t>
+            </a:r>
+            <a:r>
+              <a:rPr lang="en-US" dirty="0"/>
+              <a:t>I’ll quickly run you through t</a:t>
+            </a:r>
+            <a:r>
+              <a:rPr dirty="0"/>
+              <a:t>his</a:t>
+            </a:r>
+            <a:r>
+              <a:rPr lang="en-US" dirty="0"/>
+              <a:t> presentation which covers</a:t>
+            </a:r>
+          </a:p>
+          <a:p>
+            <a:pPr marL="171450" indent="-171450">
+              <a:buFont typeface="Arial" panose="020B0604020202020204" pitchFamily="34" charset="0"/>
+              <a:buChar char="•"/>
+            </a:pPr>
+            <a:r>
+              <a:rPr dirty="0"/>
+              <a:t>what I heard</a:t>
+            </a:r>
+            <a:r>
+              <a:rPr lang="en-US" dirty="0"/>
+              <a:t> from you</a:t>
+            </a:r>
+          </a:p>
+          <a:p>
+            <a:pPr marL="171450" indent="-171450">
+              <a:buFont typeface="Arial" panose="020B0604020202020204" pitchFamily="34" charset="0"/>
+              <a:buChar char="•"/>
+            </a:pPr>
+            <a:r>
+              <a:rPr dirty="0"/>
+              <a:t>what I think the problem actually is, and</a:t>
+            </a:r>
+            <a:endParaRPr lang="en-US" dirty="0"/>
+          </a:p>
+          <a:p>
+            <a:pPr marL="171450" indent="-171450">
+              <a:buFont typeface="Arial" panose="020B0604020202020204" pitchFamily="34" charset="0"/>
+              <a:buChar char="•"/>
+            </a:pPr>
+            <a:r>
+              <a:rPr dirty="0"/>
+              <a:t>what I would do about it.</a:t>
+            </a:r>
+          </a:p>
+          <a:p>
+            <a:endParaRPr dirty="0"/>
+          </a:p>
+          <a:p>
+            <a:r>
+              <a:rPr dirty="0"/>
+              <a:t>Three things to say up front.</a:t>
+            </a:r>
+            <a:endParaRPr lang="en-US" dirty="0"/>
+          </a:p>
+          <a:p>
+            <a:pPr marL="171450" indent="-171450">
+              <a:buFont typeface="Arial" panose="020B0604020202020204" pitchFamily="34" charset="0"/>
+              <a:buChar char="•"/>
+            </a:pPr>
+            <a:r>
+              <a:rPr dirty="0"/>
+              <a:t>First, nothing in here needs you to replace the ERP.</a:t>
+            </a:r>
+            <a:endParaRPr lang="en-US" dirty="0"/>
+          </a:p>
+          <a:p>
+            <a:pPr marL="171450" indent="-171450">
+              <a:buFont typeface="Arial" panose="020B0604020202020204" pitchFamily="34" charset="0"/>
+              <a:buChar char="•"/>
+            </a:pPr>
+            <a:r>
+              <a:rPr dirty="0"/>
+              <a:t>Second, nothing in here needs you to stop operations.</a:t>
+            </a:r>
+            <a:endParaRPr lang="en-US" dirty="0"/>
+          </a:p>
+          <a:p>
+            <a:pPr marL="171450" indent="-171450">
+              <a:buFont typeface="Arial" panose="020B0604020202020204" pitchFamily="34" charset="0"/>
+              <a:buChar char="•"/>
+            </a:pPr>
+            <a:r>
+              <a:rPr dirty="0"/>
+              <a:t>Third, I am not proposing to track your drivers.</a:t>
+            </a:r>
+          </a:p>
+          <a:p>
+            <a:endParaRPr dirty="0"/>
+          </a:p>
+          <a:p>
+            <a:r>
+              <a:rPr dirty="0"/>
+              <a:t>The whole deck takes about twenty minutes.</a:t>
             </a:r>
           </a:p>
         </p:txBody>
@@ -620,36 +503,117 @@
           <a:lstStyle/>
           <a:p>
             <a:r>
-              <a:t>This is the same morning I showed you earlier, rearranged.</a:t>
-            </a:r>
-          </a:p>
-          <a:p/>
-          <a:p>
-            <a:r>
-              <a:t>The order file closes overnight. Routes are proposed automatically. The planner reviews only the exceptions rather than building from a blank sheet. Vehicle type and Low Emission Zone rules are applied. And the vans leave on the slot.</a:t>
-            </a:r>
-          </a:p>
-          <a:p/>
-          <a:p>
-            <a:r>
+              <a:rPr dirty="0"/>
+              <a:t>This is the same morning I showed you earlier, </a:t>
+            </a:r>
+            <a:r>
+              <a:rPr lang="en-US" dirty="0"/>
+              <a:t>now </a:t>
+            </a:r>
+            <a:r>
+              <a:rPr dirty="0"/>
+              <a:t>rearranged.</a:t>
+            </a:r>
+          </a:p>
+          <a:p>
+            <a:endParaRPr dirty="0"/>
+          </a:p>
+          <a:p>
+            <a:pPr marL="171450" indent="-171450">
+              <a:buFont typeface="Arial" panose="020B0604020202020204" pitchFamily="34" charset="0"/>
+              <a:buChar char="•"/>
+            </a:pPr>
+            <a:r>
+              <a:rPr dirty="0"/>
+              <a:t>The order file closes overnight. Routes are proposed automatically.</a:t>
+            </a:r>
+            <a:endParaRPr lang="en-US" dirty="0"/>
+          </a:p>
+          <a:p>
+            <a:pPr marL="171450" indent="-171450">
+              <a:buFont typeface="Arial" panose="020B0604020202020204" pitchFamily="34" charset="0"/>
+              <a:buChar char="•"/>
+            </a:pPr>
+            <a:r>
+              <a:rPr dirty="0"/>
+              <a:t>The planner reviews only the exceptions rather than building from a blank sheet.</a:t>
+            </a:r>
+            <a:endParaRPr lang="en-US" dirty="0"/>
+          </a:p>
+          <a:p>
+            <a:pPr marL="171450" indent="-171450">
+              <a:buFont typeface="Arial" panose="020B0604020202020204" pitchFamily="34" charset="0"/>
+              <a:buChar char="•"/>
+            </a:pPr>
+            <a:r>
+              <a:rPr dirty="0"/>
+              <a:t>Vehicle type and Low Emission Zone rules are applied.</a:t>
+            </a:r>
+            <a:endParaRPr lang="en-US" dirty="0"/>
+          </a:p>
+          <a:p>
+            <a:pPr marL="171450" indent="-171450">
+              <a:buFont typeface="Arial" panose="020B0604020202020204" pitchFamily="34" charset="0"/>
+              <a:buChar char="•"/>
+            </a:pPr>
+            <a:r>
+              <a:rPr dirty="0"/>
+              <a:t>And the vans leave on the slot.</a:t>
+            </a:r>
+          </a:p>
+          <a:p>
+            <a:endParaRPr dirty="0"/>
+          </a:p>
+          <a:p>
+            <a:r>
+              <a:rPr dirty="0"/>
               <a:t>Three things underneath it.</a:t>
             </a:r>
           </a:p>
-          <a:p/>
-          <a:p>
-            <a:r>
+          <a:p>
+            <a:endParaRPr dirty="0"/>
+          </a:p>
+          <a:p>
+            <a:pPr marL="171450" indent="-171450">
+              <a:buFont typeface="Arial" panose="020B0604020202020204" pitchFamily="34" charset="0"/>
+              <a:buChar char="•"/>
+            </a:pPr>
+            <a:r>
+              <a:rPr dirty="0"/>
               <a:t>EV-aware means battery range modelled from stop count and stop-and-go conditions, not the datasheet figure — which is the gap you described.</a:t>
             </a:r>
           </a:p>
-          <a:p/>
-          <a:p>
-            <a:r>
-              <a:t>Knowledge kept means the access constraints and awkward buildings and reliable timings get mined out of historic routes and out of every correction a planner makes. So tomorrow's departure does not depend on one person's memory.</a:t>
-            </a:r>
-          </a:p>
-          <a:p/>
-          <a:p>
-            <a:r>
+          <a:p>
+            <a:endParaRPr dirty="0"/>
+          </a:p>
+          <a:p>
+            <a:pPr marL="171450" indent="-171450">
+              <a:buFont typeface="Arial" panose="020B0604020202020204" pitchFamily="34" charset="0"/>
+              <a:buChar char="•"/>
+            </a:pPr>
+            <a:r>
+              <a:rPr dirty="0"/>
+              <a:t>Knowledge kept means the access constraints and awkward buildings and reliable timings get mined out of historic routes and out of every correction a planner makes. </a:t>
+            </a:r>
+            <a:r>
+              <a:rPr lang="en-US" dirty="0"/>
+              <a:t>So,</a:t>
+            </a:r>
+            <a:r>
+              <a:rPr dirty="0"/>
+              <a:t> tomorrow's departure does not depend on one person's memory.</a:t>
+            </a:r>
+          </a:p>
+          <a:p>
+            <a:endParaRPr dirty="0"/>
+          </a:p>
+          <a:p>
+            <a:pPr marL="171450" indent="-171450">
+              <a:buFont typeface="Arial" panose="020B0604020202020204" pitchFamily="34" charset="0"/>
+              <a:buChar char="•"/>
+            </a:pPr>
+            <a:r>
+              <a:rPr dirty="0"/>
               <a:t>And the dark card is the important one. Proposed, never imposed. The planner accepts, edits or rejects. Every override is captured and improves the next proposal. Nothing dispatches without a person having seen it.</a:t>
             </a:r>
           </a:p>
@@ -736,31 +700,109 @@
           <a:lstStyle/>
           <a:p>
             <a:r>
+              <a:rPr dirty="0"/>
               <a:t>You were direct about this, so I will be direct back. You said continuous GPS tracking would be read as surveillance. I agree, and I am not proposing it.</a:t>
             </a:r>
           </a:p>
-          <a:p/>
-          <a:p>
-            <a:r>
-              <a:t>What I am proposing is five events: departed hub, arrived at stop, delivered, not delivered with a reason code, route complete. That is it.</a:t>
-            </a:r>
-          </a:p>
-          <a:p/>
-          <a:p>
-            <a:r>
-              <a:t>On the right is why that stays inside GDPR. Location is captured at the stop, not all day. The same five events come from employed and freelance drivers, which is one app screen and one contract clause. No driver scoring, no league table, no automated performance record. And role-based access so each corporate client's data stays inside its own confidentiality boundary.</a:t>
-            </a:r>
-          </a:p>
-          <a:p/>
-          <a:p>
-            <a:r>
+          <a:p>
+            <a:endParaRPr dirty="0"/>
+          </a:p>
+          <a:p>
+            <a:pPr marL="171450" indent="-171450">
+              <a:buFont typeface="Arial" panose="020B0604020202020204" pitchFamily="34" charset="0"/>
+              <a:buChar char="•"/>
+            </a:pPr>
+            <a:r>
+              <a:rPr dirty="0"/>
+              <a:t>What I am proposing is five events</a:t>
+            </a:r>
+            <a:r>
+              <a:rPr lang="en-US" dirty="0"/>
+              <a:t> - </a:t>
+            </a:r>
+            <a:r>
+              <a:rPr dirty="0"/>
+              <a:t>departed hub, arrived at stop, delivered, not delivered with a reason code, route complete. That is it.</a:t>
+            </a:r>
+            <a:endParaRPr lang="en-US" dirty="0"/>
+          </a:p>
+          <a:p>
+            <a:pPr marL="171450" indent="-171450">
+              <a:buFont typeface="Arial" panose="020B0604020202020204" pitchFamily="34" charset="0"/>
+              <a:buChar char="•"/>
+            </a:pPr>
+            <a:endParaRPr lang="en-US" dirty="0"/>
+          </a:p>
+          <a:p>
+            <a:pPr marL="0" indent="0">
+              <a:buFont typeface="Arial" panose="020B0604020202020204" pitchFamily="34" charset="0"/>
+              <a:buNone/>
+            </a:pPr>
+            <a:r>
+              <a:rPr dirty="0"/>
+              <a:t>On the right is why that stays inside GDPR.</a:t>
+            </a:r>
+            <a:endParaRPr lang="en-US" dirty="0"/>
+          </a:p>
+          <a:p>
+            <a:pPr marL="171450" indent="-171450">
+              <a:buFont typeface="Arial" panose="020B0604020202020204" pitchFamily="34" charset="0"/>
+              <a:buChar char="•"/>
+            </a:pPr>
+            <a:r>
+              <a:rPr dirty="0"/>
+              <a:t>Location is captured at the stop, not all day.</a:t>
+            </a:r>
+            <a:endParaRPr lang="en-US" dirty="0"/>
+          </a:p>
+          <a:p>
+            <a:pPr marL="171450" indent="-171450">
+              <a:buFont typeface="Arial" panose="020B0604020202020204" pitchFamily="34" charset="0"/>
+              <a:buChar char="•"/>
+            </a:pPr>
+            <a:r>
+              <a:rPr dirty="0"/>
+              <a:t>The same five events come from employed and freelance drivers, which is one app screen and one contract clause.</a:t>
+            </a:r>
+            <a:endParaRPr lang="en-US" dirty="0"/>
+          </a:p>
+          <a:p>
+            <a:pPr marL="171450" indent="-171450">
+              <a:buFont typeface="Arial" panose="020B0604020202020204" pitchFamily="34" charset="0"/>
+              <a:buChar char="•"/>
+            </a:pPr>
+            <a:r>
+              <a:rPr dirty="0"/>
+              <a:t>No driver scoring, no league table, no automated performance record.</a:t>
+            </a:r>
+            <a:endParaRPr lang="en-US" dirty="0"/>
+          </a:p>
+          <a:p>
+            <a:pPr marL="171450" indent="-171450">
+              <a:buFont typeface="Arial" panose="020B0604020202020204" pitchFamily="34" charset="0"/>
+              <a:buChar char="•"/>
+            </a:pPr>
+            <a:r>
+              <a:rPr dirty="0"/>
+              <a:t>And role-based access so each corporate client's data stays inside its own confidentiality boundary.</a:t>
+            </a:r>
+          </a:p>
+          <a:p>
+            <a:endParaRPr dirty="0"/>
+          </a:p>
+          <a:p>
+            <a:r>
+              <a:rPr dirty="0"/>
               <a:t>[Read the quote.]</a:t>
             </a:r>
           </a:p>
-          <a:p/>
-          <a:p>
-            <a:r>
-              <a:t>Five events is enough for customer service to answer the question. It is not enough to build a surveillance record, and that is the point.</a:t>
+          <a:p>
+            <a:endParaRPr dirty="0"/>
+          </a:p>
+          <a:p>
+            <a:r>
+              <a:rPr dirty="0"/>
+              <a:t>Five events is enough for customer service to answer the question. It is not enough to build a surveillance record.</a:t>
             </a:r>
           </a:p>
         </p:txBody>
@@ -846,25 +888,186 @@
           <a:lstStyle/>
           <a:p>
             <a:r>
-              <a:t>I want to be as clear about the boundary as about the work.</a:t>
-            </a:r>
-          </a:p>
-          <a:p/>
-          <a:p>
-            <a:r>
-              <a:t>In scope: address quality and windows, the overnight route proposal your planners own, five standardised events and one intraday view, and read-only integration with exports you already produce.</a:t>
-            </a:r>
-          </a:p>
-          <a:p/>
-          <a:p>
-            <a:r>
-              <a:t>Out of scope, on purpose: no ERP replacement or migration — the old system stays exactly where it is. No continuous tracking, driver scoring or automated disciplinary decisions. No system altering a customer commitment without a named person approving it. No warehouse automation and no change to night consolidation. And no pilot activity during Black Friday or the Christmas peak.</a:t>
-            </a:r>
-          </a:p>
-          <a:p/>
-          <a:p>
-            <a:r>
-              <a:t>You said you cannot stop operations to implement something new. Nothing in this proposal asks you to.</a:t>
+              <a:rPr dirty="0"/>
+              <a:t>I want to be as clear about the </a:t>
+            </a:r>
+            <a:r>
+              <a:rPr lang="en-US" dirty="0"/>
+              <a:t>scope</a:t>
+            </a:r>
+            <a:r>
+              <a:rPr dirty="0"/>
+              <a:t>.</a:t>
+            </a:r>
+          </a:p>
+          <a:p>
+            <a:endParaRPr dirty="0"/>
+          </a:p>
+          <a:p>
+            <a:r>
+              <a:rPr dirty="0"/>
+              <a:t>In scope:</a:t>
+            </a:r>
+            <a:endParaRPr lang="en-US" dirty="0"/>
+          </a:p>
+          <a:p>
+            <a:pPr marL="171450" indent="-171450">
+              <a:buFont typeface="Arial" panose="020B0604020202020204" pitchFamily="34" charset="0"/>
+              <a:buChar char="•"/>
+            </a:pPr>
+            <a:r>
+              <a:rPr lang="en-US" dirty="0"/>
+              <a:t>A</a:t>
+            </a:r>
+            <a:r>
+              <a:rPr dirty="0"/>
+              <a:t>ddress quality and windows</a:t>
+            </a:r>
+            <a:endParaRPr lang="en-US" dirty="0"/>
+          </a:p>
+          <a:p>
+            <a:pPr marL="171450" indent="-171450">
+              <a:buFont typeface="Arial" panose="020B0604020202020204" pitchFamily="34" charset="0"/>
+              <a:buChar char="•"/>
+            </a:pPr>
+            <a:r>
+              <a:rPr lang="en-US" dirty="0"/>
+              <a:t>T</a:t>
+            </a:r>
+            <a:r>
+              <a:rPr dirty="0"/>
+              <a:t>he overnight route proposal your planners own</a:t>
+            </a:r>
+            <a:endParaRPr lang="en-US" dirty="0"/>
+          </a:p>
+          <a:p>
+            <a:pPr marL="171450" indent="-171450">
+              <a:buFont typeface="Arial" panose="020B0604020202020204" pitchFamily="34" charset="0"/>
+              <a:buChar char="•"/>
+            </a:pPr>
+            <a:r>
+              <a:rPr lang="en-US" dirty="0"/>
+              <a:t>F</a:t>
+            </a:r>
+            <a:r>
+              <a:rPr dirty="0"/>
+              <a:t>ive </a:t>
+            </a:r>
+            <a:r>
+              <a:rPr dirty="0" err="1"/>
+              <a:t>standardised</a:t>
+            </a:r>
+            <a:r>
+              <a:rPr dirty="0"/>
+              <a:t> events and one intraday view, and</a:t>
+            </a:r>
+            <a:endParaRPr lang="en-US" dirty="0"/>
+          </a:p>
+          <a:p>
+            <a:pPr marL="171450" indent="-171450">
+              <a:buFont typeface="Arial" panose="020B0604020202020204" pitchFamily="34" charset="0"/>
+              <a:buChar char="•"/>
+            </a:pPr>
+            <a:r>
+              <a:rPr lang="en-US" dirty="0"/>
+              <a:t>R</a:t>
+            </a:r>
+            <a:r>
+              <a:rPr dirty="0"/>
+              <a:t>ead-only integration with exports you already produce.</a:t>
+            </a:r>
+          </a:p>
+          <a:p>
+            <a:endParaRPr dirty="0"/>
+          </a:p>
+          <a:p>
+            <a:r>
+              <a:rPr dirty="0"/>
+              <a:t>Out of scope, on purpose:</a:t>
+            </a:r>
+            <a:endParaRPr lang="en-US" dirty="0"/>
+          </a:p>
+          <a:p>
+            <a:pPr marL="171450" indent="-171450">
+              <a:buFont typeface="Arial" panose="020B0604020202020204" pitchFamily="34" charset="0"/>
+              <a:buChar char="•"/>
+            </a:pPr>
+            <a:r>
+              <a:rPr lang="en-US" dirty="0"/>
+              <a:t>N</a:t>
+            </a:r>
+            <a:r>
+              <a:rPr dirty="0"/>
+              <a:t>o ERP replacement or migration — the old system stays exactly where it is.</a:t>
+            </a:r>
+            <a:endParaRPr lang="en-US" dirty="0"/>
+          </a:p>
+          <a:p>
+            <a:pPr marL="171450" indent="-171450">
+              <a:buFont typeface="Arial" panose="020B0604020202020204" pitchFamily="34" charset="0"/>
+              <a:buChar char="•"/>
+            </a:pPr>
+            <a:r>
+              <a:rPr dirty="0"/>
+              <a:t>No continuous tracking, driver scoring or automated disciplinary decisions.</a:t>
+            </a:r>
+            <a:endParaRPr lang="en-US" dirty="0"/>
+          </a:p>
+          <a:p>
+            <a:pPr marL="171450" indent="-171450">
+              <a:buFont typeface="Arial" panose="020B0604020202020204" pitchFamily="34" charset="0"/>
+              <a:buChar char="•"/>
+            </a:pPr>
+            <a:r>
+              <a:rPr dirty="0"/>
+              <a:t>No system altering a customer commitment without a named person approving it.</a:t>
+            </a:r>
+            <a:endParaRPr lang="en-US" dirty="0"/>
+          </a:p>
+          <a:p>
+            <a:pPr marL="171450" indent="-171450">
+              <a:buFont typeface="Arial" panose="020B0604020202020204" pitchFamily="34" charset="0"/>
+              <a:buChar char="•"/>
+            </a:pPr>
+            <a:r>
+              <a:rPr dirty="0"/>
+              <a:t>No warehouse automation and no change to night consolidation.</a:t>
+            </a:r>
+            <a:endParaRPr lang="en-US" dirty="0"/>
+          </a:p>
+          <a:p>
+            <a:pPr marL="171450" indent="-171450">
+              <a:buFont typeface="Arial" panose="020B0604020202020204" pitchFamily="34" charset="0"/>
+              <a:buChar char="•"/>
+            </a:pPr>
+            <a:r>
+              <a:rPr dirty="0"/>
+              <a:t>And no pilot activity during Black Friday or the Christmas peak.</a:t>
+            </a:r>
+          </a:p>
+          <a:p>
+            <a:endParaRPr dirty="0"/>
+          </a:p>
+          <a:p>
+            <a:r>
+              <a:rPr dirty="0"/>
+              <a:t>You said you cannot stop operations to implement something new. Nothing in this proposal </a:t>
+            </a:r>
+            <a:r>
+              <a:rPr lang="en-US" dirty="0"/>
+              <a:t>is </a:t>
+            </a:r>
+            <a:r>
+              <a:rPr dirty="0"/>
+              <a:t>ask</a:t>
+            </a:r>
+            <a:r>
+              <a:rPr lang="en-US" dirty="0"/>
+              <a:t>ing</a:t>
+            </a:r>
+            <a:r>
+              <a:rPr dirty="0"/>
+              <a:t> you to.</a:t>
             </a:r>
           </a:p>
         </p:txBody>
@@ -950,30 +1153,152 @@
           <a:lstStyle/>
           <a:p>
             <a:r>
+              <a:rPr dirty="0"/>
               <a:t>These are your measures, not mine. You listed them when I asked how you would know an improvement had genuinely worked.</a:t>
             </a:r>
           </a:p>
-          <a:p/>
-          <a:p>
-            <a:r>
-              <a:t>First-attempt success from eighty-six to eighty-eight per cent up to ninety-three or better. The plan locked forty-five minutes before departure instead of still being adjusted at the slot. Forty per cent less planner time on route building. Kilometres per delivery tracked on a like-for-like order mix. "Where is my parcel" answered at first line. And zero SLA penalty incidents in the pilot zone.</a:t>
-            </a:r>
-          </a:p>
-          <a:p/>
-          <a:p>
-            <a:r>
+          <a:p>
+            <a:endParaRPr dirty="0"/>
+          </a:p>
+          <a:p>
+            <a:pPr marL="171450" indent="-171450">
+              <a:buFont typeface="Arial" panose="020B0604020202020204" pitchFamily="34" charset="0"/>
+              <a:buChar char="•"/>
+            </a:pPr>
+            <a:r>
+              <a:rPr dirty="0"/>
+              <a:t>First-attempt success from eighty-six to eighty-eight per cent up to ninety-three or better.</a:t>
+            </a:r>
+            <a:endParaRPr lang="en-US" dirty="0"/>
+          </a:p>
+          <a:p>
+            <a:pPr marL="171450" indent="-171450">
+              <a:buFont typeface="Arial" panose="020B0604020202020204" pitchFamily="34" charset="0"/>
+              <a:buChar char="•"/>
+            </a:pPr>
+            <a:r>
+              <a:rPr dirty="0"/>
+              <a:t>The plan locked forty-five minutes before departure instead of still being adjusted at the slot.</a:t>
+            </a:r>
+            <a:endParaRPr lang="en-US" dirty="0"/>
+          </a:p>
+          <a:p>
+            <a:pPr marL="171450" indent="-171450">
+              <a:buFont typeface="Arial" panose="020B0604020202020204" pitchFamily="34" charset="0"/>
+              <a:buChar char="•"/>
+            </a:pPr>
+            <a:r>
+              <a:rPr lang="en-US" dirty="0"/>
+              <a:t>40% </a:t>
+            </a:r>
+            <a:r>
+              <a:rPr dirty="0"/>
+              <a:t>less planner time on route building.</a:t>
+            </a:r>
+            <a:endParaRPr lang="en-US" dirty="0"/>
+          </a:p>
+          <a:p>
+            <a:pPr marL="171450" indent="-171450">
+              <a:buFont typeface="Arial" panose="020B0604020202020204" pitchFamily="34" charset="0"/>
+              <a:buChar char="•"/>
+            </a:pPr>
+            <a:r>
+              <a:rPr dirty="0" err="1"/>
+              <a:t>Kilometres</a:t>
+            </a:r>
+            <a:r>
+              <a:rPr dirty="0"/>
+              <a:t> per delivery tracked on a like-for-like order mix.</a:t>
+            </a:r>
+            <a:endParaRPr lang="en-US" dirty="0"/>
+          </a:p>
+          <a:p>
+            <a:pPr marL="171450" indent="-171450">
+              <a:buFont typeface="Arial" panose="020B0604020202020204" pitchFamily="34" charset="0"/>
+              <a:buChar char="•"/>
+            </a:pPr>
+            <a:r>
+              <a:rPr dirty="0"/>
+              <a:t>"Where is my parcel" answered at first line.</a:t>
+            </a:r>
+            <a:endParaRPr lang="en-US" dirty="0"/>
+          </a:p>
+          <a:p>
+            <a:pPr marL="171450" indent="-171450">
+              <a:buFont typeface="Arial" panose="020B0604020202020204" pitchFamily="34" charset="0"/>
+              <a:buChar char="•"/>
+            </a:pPr>
+            <a:r>
+              <a:rPr dirty="0"/>
+              <a:t>And zero SLA penalty incidents in the pilot zone.</a:t>
+            </a:r>
+          </a:p>
+          <a:p>
+            <a:endParaRPr dirty="0"/>
+          </a:p>
+          <a:p>
+            <a:r>
+              <a:rPr dirty="0"/>
               <a:t>The last one on your list was the workload of the traffic team, and that is the third row. You said if they spend less time fixing routes and calling drivers all day, that would be a very good sign. I agree, and I would measure it.</a:t>
             </a:r>
-          </a:p>
-          <a:p/>
-          <a:p>
-            <a:r>
+            <a:endParaRPr lang="en-US" dirty="0"/>
+          </a:p>
+          <a:p>
+            <a:endParaRPr lang="en-US" dirty="0"/>
+          </a:p>
+          <a:p>
+            <a:pPr marL="0" marR="0" lvl="0" indent="0" algn="l" defTabSz="914400" rtl="0" eaLnBrk="1" fontAlgn="auto" latinLnBrk="0" hangingPunct="1">
+              <a:lnSpc>
+                <a:spcPct val="100000"/>
+              </a:lnSpc>
+              <a:spcBef>
+                <a:spcPts val="0"/>
+              </a:spcBef>
+              <a:spcAft>
+                <a:spcPts val="0"/>
+              </a:spcAft>
+              <a:buClrTx/>
+              <a:buSzTx/>
+              <a:buFontTx/>
+              <a:buNone/>
+              <a:tabLst/>
+              <a:defRPr/>
+            </a:pPr>
+            <a:r>
+              <a:rPr lang="en-US" dirty="0"/>
+              <a:t>So how would we actually start?</a:t>
+            </a:r>
+            <a:endParaRPr dirty="0"/>
+          </a:p>
+          <a:p>
+            <a:endParaRPr dirty="0"/>
+          </a:p>
+          <a:p>
+            <a:r>
+              <a:rPr dirty="0"/>
               <a:t>Likely question — "why ninety-three and not ninety-five?"</a:t>
             </a:r>
           </a:p>
           <a:p>
             <a:r>
-              <a:t>Answer: ninety-three is a stretch I believe I can defend from the data. Ninety-five would be a number I picked because it sounded better.</a:t>
+              <a:rPr dirty="0"/>
+              <a:t>Answer: </a:t>
+            </a:r>
+            <a:r>
+              <a:rPr lang="en-US" dirty="0"/>
+              <a:t>93%</a:t>
+            </a:r>
+            <a:r>
+              <a:rPr dirty="0"/>
+              <a:t> is a stretch I believe I can defend from the data. </a:t>
+            </a:r>
+            <a:r>
+              <a:rPr lang="en-US" dirty="0"/>
+              <a:t>95%</a:t>
+            </a:r>
+            <a:r>
+              <a:rPr dirty="0"/>
+              <a:t> would be a number I picked because it sounded better.</a:t>
             </a:r>
           </a:p>
         </p:txBody>
@@ -1059,36 +1384,68 @@
           <a:lstStyle/>
           <a:p>
             <a:r>
+              <a:rPr dirty="0"/>
               <a:t>Eight weeks, one zone, and nothing stops.</a:t>
             </a:r>
           </a:p>
-          <a:p/>
-          <a:p>
-            <a:r>
+          <a:p>
+            <a:endParaRPr dirty="0"/>
+          </a:p>
+          <a:p>
+            <a:pPr marL="171450" indent="-171450">
+              <a:buFont typeface="Arial" panose="020B0604020202020204" pitchFamily="34" charset="0"/>
+              <a:buChar char="•"/>
+            </a:pPr>
+            <a:r>
+              <a:rPr dirty="0"/>
               <a:t>Weeks one and two are a baseline, not a build. Read-only access to twenty-four months of orders, addresses and proof of delivery, and we measure the pilot zone exactly as it runs today.</a:t>
             </a:r>
           </a:p>
-          <a:p/>
-          <a:p>
-            <a:r>
+          <a:p>
+            <a:endParaRPr dirty="0"/>
+          </a:p>
+          <a:p>
+            <a:pPr marL="171450" indent="-171450">
+              <a:buFont typeface="Arial" panose="020B0604020202020204" pitchFamily="34" charset="0"/>
+              <a:buChar char="•"/>
+            </a:pPr>
+            <a:r>
+              <a:rPr dirty="0"/>
               <a:t>Weeks three and four are shadow. The system proposes routes and windows; your planners work exactly as they do now. We compare the two side by side, daily. If the proposals are worse than your planners, you find that out before anything is live.</a:t>
             </a:r>
           </a:p>
-          <a:p/>
-          <a:p>
-            <a:r>
+          <a:p>
+            <a:endParaRPr dirty="0"/>
+          </a:p>
+          <a:p>
+            <a:pPr marL="171450" indent="-171450">
+              <a:buFont typeface="Arial" panose="020B0604020202020204" pitchFamily="34" charset="0"/>
+              <a:buChar char="•"/>
+            </a:pPr>
+            <a:r>
+              <a:rPr dirty="0"/>
               <a:t>Weeks five to seven go live in one zone, with the planner keeping the override throughout.</a:t>
             </a:r>
           </a:p>
-          <a:p/>
-          <a:p>
-            <a:r>
+          <a:p>
+            <a:endParaRPr dirty="0"/>
+          </a:p>
+          <a:p>
+            <a:pPr marL="171450" indent="-171450">
+              <a:buFont typeface="Arial" panose="020B0604020202020204" pitchFamily="34" charset="0"/>
+              <a:buChar char="•"/>
+            </a:pPr>
+            <a:r>
+              <a:rPr dirty="0"/>
               <a:t>Week eight is a decision — the measured result, the cost to extend, and an honest recommendation to stop, adjust or scale.</a:t>
             </a:r>
           </a:p>
-          <a:p/>
-          <a:p>
-            <a:r>
+          <a:p>
+            <a:endParaRPr dirty="0"/>
+          </a:p>
+          <a:p>
+            <a:r>
+              <a:rPr dirty="0"/>
               <a:t>And on the zone: I want your worst residential zone, not your easiest. A result in a hard zone is a result you can trust everywhere else.</a:t>
             </a:r>
           </a:p>
@@ -1175,42 +1532,97 @@
           <a:lstStyle/>
           <a:p>
             <a:r>
+              <a:rPr dirty="0"/>
               <a:t>Five ways this fails, and what stops each one.</a:t>
             </a:r>
           </a:p>
-          <a:p/>
-          <a:p>
-            <a:r>
+          <a:p>
+            <a:endParaRPr dirty="0"/>
+          </a:p>
+          <a:p>
+            <a:pPr marL="171450" indent="-171450">
+              <a:buFont typeface="Arial" panose="020B0604020202020204" pitchFamily="34" charset="0"/>
+              <a:buChar char="•"/>
+            </a:pPr>
+            <a:r>
+              <a:rPr dirty="0"/>
               <a:t>If the address and timestamp history is dirtier than expected — that is what Weeks one and two are for. If the data will not support a window prediction, I will say so and the scope narrows to dispatch. I would rather tell you in week two than in month six.</a:t>
             </a:r>
           </a:p>
-          <a:p/>
-          <a:p>
-            <a:r>
+          <a:p>
+            <a:pPr marL="171450" indent="-171450">
+              <a:buFont typeface="Arial" panose="020B0604020202020204" pitchFamily="34" charset="0"/>
+              <a:buChar char="•"/>
+            </a:pPr>
+            <a:endParaRPr dirty="0"/>
+          </a:p>
+          <a:p>
+            <a:pPr marL="171450" indent="-171450">
+              <a:buFont typeface="Arial" panose="020B0604020202020204" pitchFamily="34" charset="0"/>
+              <a:buChar char="•"/>
+            </a:pPr>
+            <a:r>
+              <a:rPr dirty="0"/>
               <a:t>If drivers read this as monitoring — five events, no continuous tracking, no scoring, and drivers see the same screen the office sees. That message has to come from you, not from me.</a:t>
             </a:r>
           </a:p>
-          <a:p/>
-          <a:p>
-            <a:r>
+          <a:p>
+            <a:pPr marL="171450" indent="-171450">
+              <a:buFont typeface="Arial" panose="020B0604020202020204" pitchFamily="34" charset="0"/>
+              <a:buChar char="•"/>
+            </a:pPr>
+            <a:endParaRPr dirty="0"/>
+          </a:p>
+          <a:p>
+            <a:pPr marL="171450" indent="-171450">
+              <a:buFont typeface="Arial" panose="020B0604020202020204" pitchFamily="34" charset="0"/>
+              <a:buChar char="•"/>
+            </a:pPr>
+            <a:r>
+              <a:rPr dirty="0"/>
               <a:t>If the legacy ERP will not integrate — we read the scheduled exports your team already produces, and there is no write-back during the pilot.</a:t>
             </a:r>
           </a:p>
-          <a:p/>
-          <a:p>
-            <a:r>
+          <a:p>
+            <a:pPr marL="171450" indent="-171450">
+              <a:buFont typeface="Arial" panose="020B0604020202020204" pitchFamily="34" charset="0"/>
+              <a:buChar char="•"/>
+            </a:pPr>
+            <a:endParaRPr dirty="0"/>
+          </a:p>
+          <a:p>
+            <a:pPr marL="171450" indent="-171450">
+              <a:buFont typeface="Arial" panose="020B0604020202020204" pitchFamily="34" charset="0"/>
+              <a:buChar char="•"/>
+            </a:pPr>
+            <a:r>
+              <a:rPr dirty="0"/>
               <a:t>If peak season collides — the eight weeks sit clear of Black Friday and Christmas, and if the start slips it slips to January.</a:t>
             </a:r>
           </a:p>
-          <a:p/>
-          <a:p>
-            <a:r>
+          <a:p>
+            <a:pPr marL="171450" indent="-171450">
+              <a:buFont typeface="Arial" panose="020B0604020202020204" pitchFamily="34" charset="0"/>
+              <a:buChar char="•"/>
+            </a:pPr>
+            <a:endParaRPr dirty="0"/>
+          </a:p>
+          <a:p>
+            <a:pPr marL="171450" indent="-171450">
+              <a:buFont typeface="Arial" panose="020B0604020202020204" pitchFamily="34" charset="0"/>
+              <a:buChar char="•"/>
+            </a:pPr>
+            <a:r>
+              <a:rPr dirty="0"/>
               <a:t>And if it works in one zone but nowhere else — that is why the pilot zone is your hardest, not your easiest.</a:t>
             </a:r>
           </a:p>
-          <a:p/>
-          <a:p>
-            <a:r>
+          <a:p>
+            <a:endParaRPr dirty="0"/>
+          </a:p>
+          <a:p>
+            <a:r>
+              <a:rPr dirty="0"/>
               <a:t>On training: you flagged uneven comfort with new systems. The driver-side change is five buttons on a screen they already carry. Deliberately small.</a:t>
             </a:r>
           </a:p>
@@ -1297,48 +1709,113 @@
           <a:lstStyle/>
           <a:p>
             <a:r>
+              <a:rPr dirty="0"/>
               <a:t>Three decisions, and none of them are technical.</a:t>
             </a:r>
           </a:p>
-          <a:p/>
-          <a:p>
-            <a:r>
+          <a:p>
+            <a:endParaRPr dirty="0"/>
+          </a:p>
+          <a:p>
+            <a:pPr marL="171450" indent="-171450">
+              <a:buFont typeface="Arial" panose="020B0604020202020204" pitchFamily="34" charset="0"/>
+              <a:buChar char="•"/>
+            </a:pPr>
+            <a:r>
+              <a:rPr dirty="0"/>
               <a:t>Name the pilot zone. I would recommend the residential zone with the worst first-attempt rate.</a:t>
             </a:r>
           </a:p>
-          <a:p/>
-          <a:p>
-            <a:r>
+          <a:p>
+            <a:pPr marL="171450" indent="-171450">
+              <a:buFont typeface="Arial" panose="020B0604020202020204" pitchFamily="34" charset="0"/>
+              <a:buChar char="•"/>
+            </a:pPr>
+            <a:endParaRPr dirty="0"/>
+          </a:p>
+          <a:p>
+            <a:pPr marL="171450" indent="-171450">
+              <a:buFont typeface="Arial" panose="020B0604020202020204" pitchFamily="34" charset="0"/>
+              <a:buChar char="•"/>
+            </a:pPr>
+            <a:r>
+              <a:rPr dirty="0"/>
               <a:t>Nominate one traffic planner as the owner — two hours a week for eight weeks. Not a project manager, a planner. Someone who actually builds the routes.</a:t>
             </a:r>
           </a:p>
-          <a:p/>
-          <a:p>
-            <a:r>
+          <a:p>
+            <a:pPr marL="171450" indent="-171450">
+              <a:buFont typeface="Arial" panose="020B0604020202020204" pitchFamily="34" charset="0"/>
+              <a:buChar char="•"/>
+            </a:pPr>
+            <a:endParaRPr dirty="0"/>
+          </a:p>
+          <a:p>
+            <a:pPr marL="171450" indent="-171450">
+              <a:buFont typeface="Arial" panose="020B0604020202020204" pitchFamily="34" charset="0"/>
+              <a:buChar char="•"/>
+            </a:pPr>
+            <a:r>
+              <a:rPr dirty="0"/>
               <a:t>And approve read-only access to twenty-four months of orders, addresses and proof of delivery. No production write access at any point.</a:t>
             </a:r>
-          </a:p>
-          <a:p/>
-          <a:p>
-            <a:r>
+            <a:endParaRPr lang="en-US" dirty="0"/>
+          </a:p>
+          <a:p>
+            <a:endParaRPr lang="en-US" dirty="0"/>
+          </a:p>
+          <a:p>
+            <a:r>
+              <a:rPr lang="en-US" sz="1200" b="0" i="0" kern="1200" dirty="0">
+                <a:solidFill>
+                  <a:schemeClr val="tx1"/>
+                </a:solidFill>
+                <a:effectLst/>
+                <a:latin typeface="+mn-lt"/>
+                <a:ea typeface="+mn-ea"/>
+                <a:cs typeface="+mn-cs"/>
+              </a:rPr>
+              <a:t>You'll notice there's no price on this slide. That's deliberate — today I'm asking for two hours a week and read-only access. The number comes at week eight, against a measured result.</a:t>
+            </a:r>
+            <a:endParaRPr dirty="0"/>
+          </a:p>
+          <a:p>
+            <a:endParaRPr dirty="0"/>
+          </a:p>
+          <a:p>
+            <a:r>
+              <a:rPr dirty="0"/>
               <a:t>[Pause.]</a:t>
             </a:r>
           </a:p>
-          <a:p/>
-          <a:p>
-            <a:r>
+          <a:p>
+            <a:endParaRPr dirty="0"/>
+          </a:p>
+          <a:p>
+            <a:pPr marL="171450" indent="-171450">
+              <a:buFont typeface="Arial" panose="020B0604020202020204" pitchFamily="34" charset="0"/>
+              <a:buChar char="•"/>
+            </a:pPr>
+            <a:r>
+              <a:rPr dirty="0"/>
               <a:t>I would like a decision by the end of next week so the eight weeks finish clear of peak season.</a:t>
             </a:r>
           </a:p>
-          <a:p/>
-          <a:p>
-            <a:r>
+          <a:p>
+            <a:endParaRPr dirty="0"/>
+          </a:p>
+          <a:p>
+            <a:r>
+              <a:rPr dirty="0"/>
               <a:t>And if the answer is no: the baseline measurement from weeks one and two is still yours to keep. You would know your real first-attempt rate by zone, which as far as I can tell you do not have today.</a:t>
             </a:r>
           </a:p>
-          <a:p/>
-          <a:p>
-            <a:r>
+          <a:p>
+            <a:endParaRPr dirty="0"/>
+          </a:p>
+          <a:p>
+            <a:r>
+              <a:rPr dirty="0"/>
               <a:t>[Stop. Let them respond.]</a:t>
             </a:r>
           </a:p>
@@ -1425,47 +1902,87 @@
           <a:lstStyle/>
           <a:p>
             <a:r>
-              <a:t>Before I go into the detail, let me play back what I understood about the business — partly so the room has the picture, and partly so you can stop me if I have any of it wrong.</a:t>
-            </a:r>
-          </a:p>
-          <a:p/>
-          <a:p>
-            <a:r>
-              <a:t>One hub, in Coslada, Madrid. Two flows through it — pallet freight coming in from Valencia and Catalonia, and B2C last-mile going out across the Madrid metropolitan area. Own fleet, topped up with freelance drivers when volumes spike.</a:t>
-            </a:r>
-          </a:p>
-          <a:p/>
-          <a:p>
-            <a:r>
+              <a:rPr dirty="0"/>
+              <a:t>Before I go into the detail, let me play back what I understood about the business — partly so the room has the picture.</a:t>
+            </a:r>
+          </a:p>
+          <a:p>
+            <a:endParaRPr dirty="0"/>
+          </a:p>
+          <a:p>
+            <a:pPr marL="171450" indent="-171450">
+              <a:buFont typeface="Arial" panose="020B0604020202020204" pitchFamily="34" charset="0"/>
+              <a:buChar char="•"/>
+            </a:pPr>
+            <a:r>
+              <a:rPr dirty="0"/>
+              <a:t>One hub, in </a:t>
+            </a:r>
+            <a:r>
+              <a:rPr dirty="0" err="1"/>
+              <a:t>Coslada</a:t>
+            </a:r>
+            <a:r>
+              <a:rPr dirty="0"/>
+              <a:t>, Madrid. Two flows through it — pallet freight coming in from Valencia and Catalonia, and B2C last-mile going out across the Madrid metropolitan area. Own fleet, topped up with freelance drivers when volumes spike.</a:t>
+            </a:r>
+          </a:p>
+          <a:p>
+            <a:endParaRPr dirty="0"/>
+          </a:p>
+          <a:p>
+            <a:pPr marL="171450" indent="-171450">
+              <a:buFont typeface="Arial" panose="020B0604020202020204" pitchFamily="34" charset="0"/>
+              <a:buChar char="•"/>
+            </a:pPr>
+            <a:r>
+              <a:rPr dirty="0"/>
               <a:t>The customers are e-commerce companies, B2B shippers, and businesses on regular parcel or pallet contracts. The e-commerce end is the demanding one: fast delivery, and increasingly, precise information about when the parcel will actually arrive.</a:t>
             </a:r>
           </a:p>
-          <a:p/>
-          <a:p>
-            <a:r>
+          <a:p>
+            <a:endParaRPr dirty="0"/>
+          </a:p>
+          <a:p>
+            <a:pPr marL="171450" indent="-171450">
+              <a:buFont typeface="Arial" panose="020B0604020202020204" pitchFamily="34" charset="0"/>
+              <a:buChar char="•"/>
+            </a:pPr>
+            <a:r>
+              <a:rPr dirty="0"/>
               <a:t>The pressure is straightforward. Volumes spike at Black Friday and Christmas, margins are tight, and management wants reliability out of the resources already in place — not a bigger fleet and not more people.</a:t>
             </a:r>
           </a:p>
-          <a:p/>
-          <a:p>
-            <a:r>
+          <a:p>
+            <a:endParaRPr dirty="0"/>
+          </a:p>
+          <a:p>
+            <a:r>
+              <a:rPr dirty="0"/>
               <a:t>[Point at the constraints strip.]</a:t>
             </a:r>
           </a:p>
-          <a:p/>
-          <a:p>
-            <a:r>
+          <a:p>
+            <a:endParaRPr dirty="0"/>
+          </a:p>
+          <a:p>
+            <a:r>
+              <a:rPr dirty="0"/>
               <a:t>Three constraints shape everything I am going to propose: an ageing ERP, a fleet that is now mixed diesel and electric under Low Emission Zone rules, and an operation that cannot stop while we work. I come back to all three.</a:t>
             </a:r>
           </a:p>
-          <a:p/>
-          <a:p>
-            <a:r>
+          <a:p>
+            <a:endParaRPr dirty="0"/>
+          </a:p>
+          <a:p>
+            <a:r>
+              <a:rPr dirty="0"/>
               <a:t>Likely question — "why does the fleet mix matter this early?"</a:t>
             </a:r>
           </a:p>
           <a:p>
             <a:r>
+              <a:rPr dirty="0"/>
               <a:t>Answer: because it changes what a good route looks like. A route a diesel van completes comfortably may not be completable by an electric one, and today the planning does not distinguish them.</a:t>
             </a:r>
           </a:p>
@@ -1552,41 +2069,118 @@
           <a:lstStyle/>
           <a:p>
             <a:r>
+              <a:rPr dirty="0"/>
               <a:t>This is your morning as you described it, not as a textbook describes it.</a:t>
             </a:r>
           </a:p>
-          <a:p/>
-          <a:p>
-            <a:r>
-              <a:t>Orders arrive in the ERP. The traffic team exports them. The real planning tool is Excel, because the routing system is basic. Addresses get checked by hand. Deliveries get grouped, vans get assigned, the warehouse loads, and then the vans go.</a:t>
-            </a:r>
-          </a:p>
-          <a:p/>
-          <a:p>
-            <a:r>
+          <a:p>
+            <a:endParaRPr dirty="0"/>
+          </a:p>
+          <a:p>
+            <a:pPr marL="228600" indent="-228600">
+              <a:buFont typeface="+mj-lt"/>
+              <a:buAutoNum type="arabicPeriod"/>
+            </a:pPr>
+            <a:r>
+              <a:rPr dirty="0"/>
+              <a:t>Orders arrive in the ERP. The traffic team exports them.</a:t>
+            </a:r>
+            <a:endParaRPr lang="en-US" dirty="0"/>
+          </a:p>
+          <a:p>
+            <a:pPr marL="228600" indent="-228600">
+              <a:buFont typeface="+mj-lt"/>
+              <a:buAutoNum type="arabicPeriod"/>
+            </a:pPr>
+            <a:r>
+              <a:rPr dirty="0"/>
+              <a:t>The real planning tool is Excel, because the routing system is basic.</a:t>
+            </a:r>
+            <a:endParaRPr lang="en-US" dirty="0"/>
+          </a:p>
+          <a:p>
+            <a:pPr marL="228600" indent="-228600">
+              <a:buFont typeface="+mj-lt"/>
+              <a:buAutoNum type="arabicPeriod"/>
+            </a:pPr>
+            <a:r>
+              <a:rPr dirty="0"/>
+              <a:t>Addresses get checked by hand.</a:t>
+            </a:r>
+            <a:endParaRPr lang="en-US" dirty="0"/>
+          </a:p>
+          <a:p>
+            <a:pPr marL="228600" indent="-228600">
+              <a:buFont typeface="+mj-lt"/>
+              <a:buAutoNum type="arabicPeriod"/>
+            </a:pPr>
+            <a:r>
+              <a:rPr dirty="0"/>
+              <a:t>Deliveries get grouped, vans get assigned, the warehouse loads, and then</a:t>
+            </a:r>
+            <a:endParaRPr lang="en-US" dirty="0"/>
+          </a:p>
+          <a:p>
+            <a:pPr marL="228600" indent="-228600">
+              <a:buFont typeface="+mj-lt"/>
+              <a:buAutoNum type="arabicPeriod"/>
+            </a:pPr>
+            <a:r>
+              <a:rPr lang="en-US" dirty="0"/>
+              <a:t>T</a:t>
+            </a:r>
+            <a:r>
+              <a:rPr dirty="0"/>
+              <a:t>he vans go.</a:t>
+            </a:r>
+          </a:p>
+          <a:p>
+            <a:endParaRPr dirty="0"/>
+          </a:p>
+          <a:p>
+            <a:r>
+              <a:rPr dirty="0"/>
               <a:t>The step in amber is the one that matters. You told me there have been days when the plan was still being adjusted while the vans should already have been leaving.</a:t>
             </a:r>
           </a:p>
-          <a:p/>
-          <a:p>
-            <a:r>
+          <a:p>
+            <a:endParaRPr dirty="0"/>
+          </a:p>
+          <a:p>
+            <a:r>
+              <a:rPr dirty="0"/>
               <a:t>[Pause on the quote.]</a:t>
             </a:r>
           </a:p>
-          <a:p/>
-          <a:p>
-            <a:r>
-              <a:t>I want to be clear about why that hour is expensive. It is not that the planners are slow. It is that every task on that chain is manual and every one of them sits on the critical path to departure. A twenty-minute overrun is not recovered later in the day — it converts straight into peak-traffic kilometres.</a:t>
-            </a:r>
-          </a:p>
-          <a:p/>
-          <a:p>
-            <a:r>
+          <a:p>
+            <a:endParaRPr dirty="0"/>
+          </a:p>
+          <a:p>
+            <a:r>
+              <a:rPr dirty="0"/>
+              <a:t>I want to be clear about why that hour is expensive. It is not that the planners are slow. It is that every task on that chain is manual and every one of them sits on the critical path to departure. A twenty-minute overrun is not recovered later in the day — it converts straight into peak-traffic </a:t>
+            </a:r>
+            <a:r>
+              <a:rPr dirty="0" err="1"/>
+              <a:t>kilometres</a:t>
+            </a:r>
+            <a:r>
+              <a:rPr dirty="0"/>
+              <a:t>.</a:t>
+            </a:r>
+          </a:p>
+          <a:p>
+            <a:endParaRPr dirty="0"/>
+          </a:p>
+          <a:p>
+            <a:r>
+              <a:rPr dirty="0"/>
               <a:t>Likely question — "isn't this just a busy morning?"</a:t>
             </a:r>
           </a:p>
           <a:p>
             <a:r>
+              <a:rPr dirty="0"/>
               <a:t>Answer: a busy morning that starts on time is fine. This one starts from a blank sheet every day, which is a different problem.</a:t>
             </a:r>
           </a:p>
@@ -1673,36 +2267,52 @@
           <a:lstStyle/>
           <a:p>
             <a:r>
+              <a:rPr dirty="0"/>
               <a:t>Once the van is out of the gate, three people hold three different fragments of the truth.</a:t>
             </a:r>
           </a:p>
-          <a:p/>
-          <a:p>
-            <a:r>
+          <a:p>
+            <a:endParaRPr dirty="0"/>
+          </a:p>
+          <a:p>
+            <a:r>
+              <a:rPr dirty="0"/>
               <a:t>Customer service takes the call and can say the parcel is out for delivery. That is all they can say. They cannot give a reliable one- or two-hour window, and you told me they often cannot answer "where is it?" from the screen.</a:t>
             </a:r>
           </a:p>
-          <a:p/>
-          <a:p>
-            <a:r>
+          <a:p>
+            <a:endParaRPr dirty="0"/>
+          </a:p>
+          <a:p>
+            <a:r>
+              <a:rPr dirty="0"/>
               <a:t>The traffic team owns the decision — route changes, absent drivers, vehicle faults — but they are deciding without a complete real-time view.</a:t>
             </a:r>
           </a:p>
-          <a:p/>
-          <a:p>
-            <a:r>
+          <a:p>
+            <a:endParaRPr dirty="0"/>
+          </a:p>
+          <a:p>
+            <a:r>
+              <a:rPr dirty="0"/>
               <a:t>And the answer, in the dark box, is on the driver's phone. You said the fastest option is still to call the driver. Own drivers record on the PDA; freelance drivers do not all follow the same process.</a:t>
             </a:r>
           </a:p>
-          <a:p/>
-          <a:p>
-            <a:r>
+          <a:p>
+            <a:endParaRPr dirty="0"/>
+          </a:p>
+          <a:p>
+            <a:r>
+              <a:rPr dirty="0"/>
               <a:t>[Read the quote.]</a:t>
             </a:r>
           </a:p>
-          <a:p/>
-          <a:p>
-            <a:r>
+          <a:p>
+            <a:endParaRPr dirty="0"/>
+          </a:p>
+          <a:p>
+            <a:r>
+              <a:rPr dirty="0"/>
               <a:t>That is three handoffs to answer one simple question.</a:t>
             </a:r>
           </a:p>
@@ -1789,41 +2399,102 @@
           <a:lstStyle/>
           <a:p>
             <a:r>
-              <a:t>I have put your own numbers in the middle column. I am not adding anything to them.</a:t>
-            </a:r>
-          </a:p>
-          <a:p/>
-          <a:p>
-            <a:r>
-              <a:t>Twelve to fourteen per cent failed first attempts in the worst residential zones. Those parcels come back to the hub and get processed again the next day, so every failure is paid for twice.</a:t>
-            </a:r>
-          </a:p>
-          <a:p/>
-          <a:p>
-            <a:r>
+              <a:rPr dirty="0"/>
+              <a:t>I have put your own numbers </a:t>
+            </a:r>
+            <a:r>
+              <a:rPr lang="en-US" dirty="0"/>
+              <a:t>here</a:t>
+            </a:r>
+            <a:r>
+              <a:rPr dirty="0"/>
+              <a:t>.</a:t>
+            </a:r>
+          </a:p>
+          <a:p>
+            <a:endParaRPr dirty="0"/>
+          </a:p>
+          <a:p>
+            <a:pPr marL="171450" indent="-171450">
+              <a:buFont typeface="Arial" panose="020B0604020202020204" pitchFamily="34" charset="0"/>
+              <a:buChar char="•"/>
+            </a:pPr>
+            <a:r>
+              <a:rPr lang="en-US" dirty="0"/>
+              <a:t>12-14%</a:t>
+            </a:r>
+            <a:r>
+              <a:rPr dirty="0"/>
+              <a:t> failed first attempts in the worst residential zones. Those parcels come back to the hub and get processed again the next day, so every failure is paid for twice.</a:t>
+            </a:r>
+          </a:p>
+          <a:p>
+            <a:endParaRPr dirty="0"/>
+          </a:p>
+          <a:p>
+            <a:pPr marL="171450" indent="-171450">
+              <a:buFont typeface="Arial" panose="020B0604020202020204" pitchFamily="34" charset="0"/>
+              <a:buChar char="•"/>
+            </a:pPr>
+            <a:r>
+              <a:rPr dirty="0"/>
               <a:t>SLA penalties from two important B2C customers. That is the one I would lose sleep over — it means reliability, not price, is what is now at risk commercially.</a:t>
             </a:r>
           </a:p>
-          <a:p/>
-          <a:p>
-            <a:r>
+          <a:p>
+            <a:endParaRPr dirty="0"/>
+          </a:p>
+          <a:p>
+            <a:pPr marL="171450" indent="-171450">
+              <a:buFont typeface="Arial" panose="020B0604020202020204" pitchFamily="34" charset="0"/>
+              <a:buChar char="•"/>
+            </a:pPr>
+            <a:r>
+              <a:rPr dirty="0"/>
               <a:t>Late departures run into Madrid peak traffic and the overrun compounds across every stop after it.</a:t>
             </a:r>
           </a:p>
-          <a:p/>
-          <a:p>
-            <a:r>
+          <a:p>
+            <a:endParaRPr dirty="0"/>
+          </a:p>
+          <a:p>
+            <a:pPr marL="171450" indent="-171450">
+              <a:buFont typeface="Arial" panose="020B0604020202020204" pitchFamily="34" charset="0"/>
+              <a:buChar char="•"/>
+            </a:pPr>
+            <a:r>
+              <a:rPr dirty="0"/>
               <a:t>And your traffic team spends its day re-planning and calling drivers, which is capacity that should be going to genuine exceptions.</a:t>
             </a:r>
           </a:p>
-          <a:p/>
-          <a:p>
-            <a:r>
-              <a:t>Likely question — "is 12 to 14 per cent unusual?"</a:t>
-            </a:r>
-          </a:p>
-          <a:p>
-            <a:r>
+          <a:p>
+            <a:endParaRPr dirty="0"/>
+          </a:p>
+          <a:p>
+            <a:r>
+              <a:rPr dirty="0"/>
+              <a:t>Likely question — "is 12</a:t>
+            </a:r>
+            <a:r>
+              <a:rPr lang="en-US" dirty="0"/>
+              <a:t>-</a:t>
+            </a:r>
+            <a:r>
+              <a:rPr dirty="0"/>
+              <a:t>14</a:t>
+            </a:r>
+            <a:r>
+              <a:rPr lang="en-US" dirty="0"/>
+              <a:t>%</a:t>
+            </a:r>
+            <a:r>
+              <a:rPr dirty="0"/>
+              <a:t> unusual?"</a:t>
+            </a:r>
+          </a:p>
+          <a:p>
+            <a:r>
+              <a:rPr dirty="0"/>
               <a:t>Answer: for the worst residential zones, no. But it is high enough that it is now showing up in your customer contracts, which makes it your problem rather than the industry's.</a:t>
             </a:r>
           </a:p>
@@ -1910,31 +2581,68 @@
           <a:lstStyle/>
           <a:p>
             <a:r>
-              <a:t>These two came from you at the end, when I asked what I had not asked about. They turned out to be the most useful part of the conversation.</a:t>
-            </a:r>
-          </a:p>
-          <a:p/>
-          <a:p>
-            <a:r>
+              <a:rPr dirty="0"/>
+              <a:t>These two came from you at the end, when I asked what I had not asked about. They turned out to be </a:t>
+            </a:r>
+            <a:r>
+              <a:rPr lang="en-US" dirty="0"/>
+              <a:t>a very</a:t>
+            </a:r>
+            <a:r>
+              <a:rPr dirty="0"/>
+              <a:t> useful part of the conversation.</a:t>
+            </a:r>
+          </a:p>
+          <a:p>
+            <a:endParaRPr dirty="0"/>
+          </a:p>
+          <a:p>
+            <a:pPr marL="171450" indent="-171450">
+              <a:buFont typeface="Arial" panose="020B0604020202020204" pitchFamily="34" charset="0"/>
+              <a:buChar char="•"/>
+            </a:pPr>
+            <a:r>
+              <a:rPr dirty="0"/>
               <a:t>An experienced traffic manager left recently, and route logic, awkward addresses and local timing left with them. That knowledge was never in the system, so every new planner rebuilds it from scratch under morning time pressure.</a:t>
             </a:r>
           </a:p>
-          <a:p/>
-          <a:p>
-            <a:r>
+          <a:p>
+            <a:endParaRPr dirty="0"/>
+          </a:p>
+          <a:p>
+            <a:pPr marL="171450" indent="-171450">
+              <a:buFont typeface="Arial" panose="020B0604020202020204" pitchFamily="34" charset="0"/>
+              <a:buChar char="•"/>
+            </a:pPr>
+            <a:r>
+              <a:rPr dirty="0"/>
               <a:t>Second, Low Emission Zone rules have made the fleet mixed, and the planning process does not treat diesel and electric differently enough. You said real electric range falls short of the paper figure under stop-and-go traffic and high stop counts.</a:t>
             </a:r>
           </a:p>
-          <a:p/>
-          <a:p>
-            <a:r>
+          <a:p>
+            <a:endParaRPr dirty="0"/>
+          </a:p>
+          <a:p>
+            <a:r>
+              <a:rPr dirty="0"/>
               <a:t>[Pause.]</a:t>
             </a:r>
           </a:p>
-          <a:p/>
-          <a:p>
-            <a:r>
-              <a:t>Neither of these is a people problem. Both are facts the business relies on daily that exist nowhere it can query. So every plan either re-derives them or gets them wrong.</a:t>
+          <a:p>
+            <a:endParaRPr dirty="0"/>
+          </a:p>
+          <a:p>
+            <a:r>
+              <a:rPr dirty="0"/>
+              <a:t>Neither of these is a people problem. Both are facts the business relies on daily that exist nowhere it can query. So</a:t>
+            </a:r>
+            <a:r>
+              <a:rPr lang="en-US" dirty="0"/>
+              <a:t>,</a:t>
+            </a:r>
+            <a:r>
+              <a:rPr dirty="0"/>
+              <a:t> every plan either re-derives them or gets them wrong.</a:t>
             </a:r>
           </a:p>
         </p:txBody>
@@ -2020,36 +2728,117 @@
           <a:lstStyle/>
           <a:p>
             <a:r>
+              <a:rPr dirty="0"/>
               <a:t>If you take one sentence from this deck, take this one.</a:t>
             </a:r>
           </a:p>
-          <a:p/>
-          <a:p>
-            <a:r>
-              <a:t>IberiaNex plans each morning on data it cannot trust, and runs each afternoon on a picture it cannot see.</a:t>
-            </a:r>
-          </a:p>
-          <a:p/>
-          <a:p>
-            <a:r>
+          <a:p>
+            <a:endParaRPr dirty="0"/>
+          </a:p>
+          <a:p>
+            <a:pPr marL="171450" indent="-171450">
+              <a:buFont typeface="Arial" panose="020B0604020202020204" pitchFamily="34" charset="0"/>
+              <a:buChar char="•"/>
+            </a:pPr>
+            <a:r>
+              <a:rPr dirty="0" err="1"/>
+              <a:t>IberiaNex</a:t>
+            </a:r>
+            <a:r>
+              <a:rPr dirty="0"/>
+              <a:t> plans each morning on data it cannot </a:t>
+            </a:r>
+            <a:r>
+              <a:rPr lang="en-US" dirty="0"/>
+              <a:t>trust and</a:t>
+            </a:r>
+            <a:r>
+              <a:rPr dirty="0"/>
+              <a:t> runs each afternoon on a picture it cannot see.</a:t>
+            </a:r>
+          </a:p>
+          <a:p>
+            <a:endParaRPr dirty="0"/>
+          </a:p>
+          <a:p>
+            <a:r>
+              <a:rPr dirty="0"/>
               <a:t>[Let it sit.]</a:t>
             </a:r>
           </a:p>
-          <a:p/>
-          <a:p>
-            <a:r>
-              <a:t>Everything I have just shown you — the twelve to fourteen per cent, the penalties, the calls to drivers — is downstream of those two gaps.</a:t>
-            </a:r>
-          </a:p>
-          <a:p/>
-          <a:p>
-            <a:r>
-              <a:t>And I want to say plainly what this is not. It is not a routing-algorithm problem. Your planners know the roads better than any optimiser will. What they lack is clean addresses, an earlier start and a shared view after the gate.</a:t>
-            </a:r>
-          </a:p>
-          <a:p/>
-          <a:p>
-            <a:r>
+          <a:p>
+            <a:endParaRPr dirty="0"/>
+          </a:p>
+          <a:p>
+            <a:r>
+              <a:rPr dirty="0"/>
+              <a:t>Everything I have just shown you — the </a:t>
+            </a:r>
+            <a:r>
+              <a:rPr lang="en-US" dirty="0"/>
+              <a:t>12-14%</a:t>
+            </a:r>
+            <a:r>
+              <a:rPr dirty="0"/>
+              <a:t>, the penalties, the calls to drivers — is downstream of those two gaps.</a:t>
+            </a:r>
+          </a:p>
+          <a:p>
+            <a:endParaRPr dirty="0"/>
+          </a:p>
+          <a:p>
+            <a:r>
+              <a:rPr dirty="0"/>
+              <a:t>And I want to say plainly what this is not.</a:t>
+            </a:r>
+            <a:endParaRPr lang="en-US" dirty="0"/>
+          </a:p>
+          <a:p>
+            <a:pPr marL="171450" indent="-171450">
+              <a:buFont typeface="Arial" panose="020B0604020202020204" pitchFamily="34" charset="0"/>
+              <a:buChar char="•"/>
+            </a:pPr>
+            <a:r>
+              <a:rPr dirty="0"/>
+              <a:t>It is not a routing-algorithm problem.</a:t>
+            </a:r>
+            <a:endParaRPr lang="en-US" dirty="0"/>
+          </a:p>
+          <a:p>
+            <a:pPr marL="171450" indent="-171450">
+              <a:buFont typeface="Arial" panose="020B0604020202020204" pitchFamily="34" charset="0"/>
+              <a:buChar char="•"/>
+            </a:pPr>
+            <a:r>
+              <a:rPr dirty="0"/>
+              <a:t>Your planners know the roads better than any </a:t>
+            </a:r>
+            <a:r>
+              <a:rPr dirty="0" err="1"/>
+              <a:t>optimiser</a:t>
+            </a:r>
+            <a:r>
+              <a:rPr dirty="0"/>
+              <a:t> will.</a:t>
+            </a:r>
+            <a:endParaRPr lang="en-US" dirty="0"/>
+          </a:p>
+          <a:p>
+            <a:pPr marL="171450" indent="-171450">
+              <a:buFont typeface="Arial" panose="020B0604020202020204" pitchFamily="34" charset="0"/>
+              <a:buChar char="•"/>
+            </a:pPr>
+            <a:r>
+              <a:rPr dirty="0"/>
+              <a:t>What they lack is clean addresses, an earlier start and a shared view after the gate.</a:t>
+            </a:r>
+          </a:p>
+          <a:p>
+            <a:endParaRPr dirty="0"/>
+          </a:p>
+          <a:p>
+            <a:r>
+              <a:rPr dirty="0"/>
               <a:t>Which is the same thing you said you wanted: more reliable deliveries without adding vehicles or people every time volume grows.</a:t>
             </a:r>
           </a:p>
@@ -2136,36 +2925,122 @@
           <a:lstStyle/>
           <a:p>
             <a:r>
-              <a:t>Three changes, and the order matters.</a:t>
-            </a:r>
-          </a:p>
-          <a:p/>
-          <a:p>
-            <a:r>
-              <a:t>One, addresses you can trust and a window you can actually promise.</a:t>
-            </a:r>
-          </a:p>
-          <a:p/>
-          <a:p>
-            <a:r>
-              <a:t>Two, a morning plan that is already built when the planners arrive.</a:t>
-            </a:r>
-          </a:p>
-          <a:p/>
-          <a:p>
-            <a:r>
-              <a:t>Three, one picture of the day that customer service can read.</a:t>
-            </a:r>
-          </a:p>
-          <a:p/>
-          <a:p>
-            <a:r>
-              <a:t>The sequence is not arbitrary. Clean addresses are what make the other two worth having — a route proposal built on bad addresses is a faster way to fail, and a live map of a route that was wrong at seven in the morning does not help anyone.</a:t>
-            </a:r>
-          </a:p>
-          <a:p/>
-          <a:p>
-            <a:r>
+              <a:rPr dirty="0"/>
+              <a:t>Three changes</a:t>
+            </a:r>
+            <a:r>
+              <a:rPr lang="en-US" dirty="0"/>
+              <a:t> proposed</a:t>
+            </a:r>
+            <a:r>
+              <a:rPr dirty="0"/>
+              <a:t>, and the order matters.</a:t>
+            </a:r>
+          </a:p>
+          <a:p>
+            <a:endParaRPr dirty="0"/>
+          </a:p>
+          <a:p>
+            <a:pPr marL="171450" indent="-171450">
+              <a:buFont typeface="Arial" panose="020B0604020202020204" pitchFamily="34" charset="0"/>
+              <a:buChar char="•"/>
+            </a:pPr>
+            <a:r>
+              <a:rPr dirty="0"/>
+              <a:t>One</a:t>
+            </a:r>
+            <a:r>
+              <a:rPr lang="en-US" dirty="0"/>
+              <a:t>:</a:t>
+            </a:r>
+            <a:r>
+              <a:rPr dirty="0"/>
+              <a:t> addresses you can trust and a window you can actually promise.</a:t>
+            </a:r>
+          </a:p>
+          <a:p>
+            <a:endParaRPr dirty="0"/>
+          </a:p>
+          <a:p>
+            <a:pPr marL="171450" indent="-171450">
+              <a:buFont typeface="Arial" panose="020B0604020202020204" pitchFamily="34" charset="0"/>
+              <a:buChar char="•"/>
+            </a:pPr>
+            <a:r>
+              <a:rPr dirty="0"/>
+              <a:t>Two</a:t>
+            </a:r>
+            <a:r>
+              <a:rPr lang="en-US" dirty="0"/>
+              <a:t>:</a:t>
+            </a:r>
+            <a:r>
+              <a:rPr dirty="0"/>
+              <a:t> a morning plan that is already built when the planners arrive.</a:t>
+            </a:r>
+          </a:p>
+          <a:p>
+            <a:endParaRPr dirty="0"/>
+          </a:p>
+          <a:p>
+            <a:pPr marL="171450" indent="-171450">
+              <a:buFont typeface="Arial" panose="020B0604020202020204" pitchFamily="34" charset="0"/>
+              <a:buChar char="•"/>
+            </a:pPr>
+            <a:r>
+              <a:rPr dirty="0"/>
+              <a:t>Three</a:t>
+            </a:r>
+            <a:r>
+              <a:rPr lang="en-US" dirty="0"/>
+              <a:t>:</a:t>
+            </a:r>
+            <a:r>
+              <a:rPr dirty="0"/>
+              <a:t> one picture of the day that customer service can read.</a:t>
+            </a:r>
+          </a:p>
+          <a:p>
+            <a:endParaRPr dirty="0"/>
+          </a:p>
+          <a:p>
+            <a:r>
+              <a:rPr dirty="0"/>
+              <a:t>The sequence is not arbitrary.</a:t>
+            </a:r>
+            <a:endParaRPr lang="en-US" dirty="0"/>
+          </a:p>
+          <a:p>
+            <a:pPr marL="171450" indent="-171450">
+              <a:buFont typeface="Arial" panose="020B0604020202020204" pitchFamily="34" charset="0"/>
+              <a:buChar char="•"/>
+            </a:pPr>
+            <a:r>
+              <a:rPr dirty="0"/>
+              <a:t>Clean addresses are what make the other two worth having — a route proposal built on bad addresses is a faster way to fail, and</a:t>
+            </a:r>
+            <a:endParaRPr lang="en-US" dirty="0"/>
+          </a:p>
+          <a:p>
+            <a:pPr marL="171450" indent="-171450">
+              <a:buFont typeface="Arial" panose="020B0604020202020204" pitchFamily="34" charset="0"/>
+              <a:buChar char="•"/>
+            </a:pPr>
+            <a:r>
+              <a:rPr lang="en-US" dirty="0"/>
+              <a:t>A</a:t>
+            </a:r>
+            <a:r>
+              <a:rPr dirty="0"/>
+              <a:t> live map of a route that was wrong at seven in the morning does not help anyone.</a:t>
+            </a:r>
+          </a:p>
+          <a:p>
+            <a:endParaRPr dirty="0"/>
+          </a:p>
+          <a:p>
+            <a:r>
+              <a:rPr dirty="0"/>
               <a:t>And nothing here requires replacing the ERP. That is deliberate.</a:t>
             </a:r>
           </a:p>
@@ -2252,35 +3127,151 @@
           <a:lstStyle/>
           <a:p>
             <a:r>
-              <a:t>This is the one that attacks the twelve to fourteen per cent directly.</a:t>
-            </a:r>
-          </a:p>
-          <a:p/>
-          <a:p>
-            <a:r>
-              <a:t>What we build: address normalisation and geocoding trained on twenty-four months of your own orders and proof-of-delivery records — your history, not a generic address database. A first-attempt risk score per stop, using what happened at that address, in that building, at that hour. A predicted one- to two-hour window published the evening before and confirmed on the morning. And a review queue for the addresses the model is not sure about, where a person confirms and the fix is kept.</a:t>
-            </a:r>
-          </a:p>
-          <a:p/>
-          <a:p>
-            <a:r>
-              <a:t>What changes on the day is on the right. Customer service answers from the screen. High-risk stops get a message before the van is loaded, not after a failed doorstep. And a bad address gets corrected once instead of failing again next month.</a:t>
-            </a:r>
-          </a:p>
-          <a:p/>
-          <a:p>
-            <a:r>
+              <a:rPr dirty="0"/>
+              <a:t>This is the one that attacks the </a:t>
+            </a:r>
+            <a:r>
+              <a:rPr lang="en-US" dirty="0"/>
+              <a:t>12-14% </a:t>
+            </a:r>
+            <a:r>
+              <a:rPr dirty="0"/>
+              <a:t>directly.</a:t>
+            </a:r>
+            <a:endParaRPr lang="en-US" dirty="0"/>
+          </a:p>
+          <a:p>
+            <a:endParaRPr lang="en-US" dirty="0"/>
+          </a:p>
+          <a:p>
+            <a:r>
+              <a:rPr dirty="0"/>
+              <a:t>What we build: </a:t>
+            </a:r>
+            <a:endParaRPr lang="en-US" dirty="0"/>
+          </a:p>
+          <a:p>
+            <a:pPr marL="171450" indent="-171450">
+              <a:buFont typeface="Arial" panose="020B0604020202020204" pitchFamily="34" charset="0"/>
+              <a:buChar char="•"/>
+            </a:pPr>
+            <a:r>
+              <a:rPr dirty="0"/>
+              <a:t>address </a:t>
+            </a:r>
+            <a:r>
+              <a:rPr dirty="0" err="1"/>
+              <a:t>normalisation</a:t>
+            </a:r>
+            <a:r>
+              <a:rPr dirty="0"/>
+              <a:t> and geocoding trained on </a:t>
+            </a:r>
+            <a:r>
+              <a:rPr lang="en-US" dirty="0"/>
+              <a:t>24</a:t>
+            </a:r>
+            <a:r>
+              <a:rPr dirty="0"/>
+              <a:t> months of your own orders and proof-of-delivery records — your history, not a generic address database.</a:t>
+            </a:r>
+            <a:endParaRPr lang="en-US" dirty="0"/>
+          </a:p>
+          <a:p>
+            <a:pPr marL="171450" indent="-171450">
+              <a:buFont typeface="Arial" panose="020B0604020202020204" pitchFamily="34" charset="0"/>
+              <a:buChar char="•"/>
+            </a:pPr>
+            <a:r>
+              <a:rPr dirty="0"/>
+              <a:t>A first-attempt risk score per stop, using what happened at that address, in that building, at that hour.</a:t>
+            </a:r>
+            <a:endParaRPr lang="en-US" dirty="0"/>
+          </a:p>
+          <a:p>
+            <a:pPr marL="171450" indent="-171450">
+              <a:buFont typeface="Arial" panose="020B0604020202020204" pitchFamily="34" charset="0"/>
+              <a:buChar char="•"/>
+            </a:pPr>
+            <a:r>
+              <a:rPr dirty="0"/>
+              <a:t>A predicted one- to two-hour window published the evening before and confirmed on the morning.</a:t>
+            </a:r>
+            <a:endParaRPr lang="en-US" dirty="0"/>
+          </a:p>
+          <a:p>
+            <a:pPr marL="171450" indent="-171450">
+              <a:buFont typeface="Arial" panose="020B0604020202020204" pitchFamily="34" charset="0"/>
+              <a:buChar char="•"/>
+            </a:pPr>
+            <a:r>
+              <a:rPr dirty="0"/>
+              <a:t>And a review queue for the addresses the model is not sure about, where a person confirms and the fix is kept.</a:t>
+            </a:r>
+          </a:p>
+          <a:p>
+            <a:endParaRPr dirty="0"/>
+          </a:p>
+          <a:p>
+            <a:r>
+              <a:rPr dirty="0"/>
+              <a:t>What changes on the day is on the right.</a:t>
+            </a:r>
+            <a:endParaRPr lang="en-US" dirty="0"/>
+          </a:p>
+          <a:p>
+            <a:pPr marL="171450" indent="-171450">
+              <a:buFont typeface="Arial" panose="020B0604020202020204" pitchFamily="34" charset="0"/>
+              <a:buChar char="•"/>
+            </a:pPr>
+            <a:r>
+              <a:rPr dirty="0"/>
+              <a:t>Customer service answers from the screen.</a:t>
+            </a:r>
+            <a:endParaRPr lang="en-US" dirty="0"/>
+          </a:p>
+          <a:p>
+            <a:pPr marL="171450" indent="-171450">
+              <a:buFont typeface="Arial" panose="020B0604020202020204" pitchFamily="34" charset="0"/>
+              <a:buChar char="•"/>
+            </a:pPr>
+            <a:r>
+              <a:rPr dirty="0"/>
+              <a:t>High-risk stops get a message before the van is loaded, not after a failed doorstep.</a:t>
+            </a:r>
+            <a:endParaRPr lang="en-US" dirty="0"/>
+          </a:p>
+          <a:p>
+            <a:pPr marL="171450" indent="-171450">
+              <a:buFont typeface="Arial" panose="020B0604020202020204" pitchFamily="34" charset="0"/>
+              <a:buChar char="•"/>
+            </a:pPr>
+            <a:r>
+              <a:rPr dirty="0"/>
+              <a:t>And a bad address gets corrected once instead of failing again next month.</a:t>
+            </a:r>
+          </a:p>
+          <a:p>
+            <a:endParaRPr dirty="0"/>
+          </a:p>
+          <a:p>
+            <a:r>
+              <a:rPr dirty="0"/>
               <a:t>[Read the quote.]</a:t>
             </a:r>
           </a:p>
-          <a:p/>
-          <a:p>
-            <a:r>
+          <a:p>
+            <a:endParaRPr dirty="0"/>
+          </a:p>
+          <a:p>
+            <a:r>
+              <a:rPr dirty="0"/>
               <a:t>Likely question — "how accurate would the window be?"</a:t>
             </a:r>
           </a:p>
           <a:p>
             <a:r>
+              <a:rPr dirty="0"/>
               <a:t>Answer: I would not promise a number before Weeks 1 to 2. That is exactly what the baseline is for. If your timestamp history is too thin to support a window, I will tell you and we drop this part.</a:t>
             </a:r>
           </a:p>
@@ -2355,6 +3346,11 @@
 <file path=ppt/slideMasters/slideMaster1.xml><?xml version="1.0" encoding="utf-8"?>
 <p:sldMaster xmlns:a="http://schemas.openxmlformats.org/drawingml/2006/main" xmlns:r="http://schemas.openxmlformats.org/officeDocument/2006/relationships" xmlns:p="http://schemas.openxmlformats.org/presentationml/2006/main">
   <p:cSld>
+    <p:bg>
+      <p:bgRef idx="1001">
+        <a:schemeClr val="bg1"/>
+      </p:bgRef>
+    </p:bg>
     <p:spTree>
       <p:nvGrpSpPr>
         <p:cNvPr id="1" name=""/>
@@ -2637,6 +3633,7 @@
         <a:solidFill>
           <a:srgbClr val="0F1F2B"/>
         </a:solidFill>
+        <a:effectLst/>
       </p:bgPr>
     </p:bg>
     <p:spTree>
@@ -2674,6 +3671,13 @@
             <a:prstDash val="solid"/>
           </a:ln>
         </p:spPr>
+        <p:txBody>
+          <a:bodyPr/>
+          <a:lstStyle/>
+          <a:p>
+            <a:endParaRPr lang="en-US"/>
+          </a:p>
+        </p:txBody>
       </p:sp>
       <p:sp>
         <p:nvSpPr>
@@ -2696,6 +3700,13 @@
           </a:solidFill>
           <a:ln/>
         </p:spPr>
+        <p:txBody>
+          <a:bodyPr/>
+          <a:lstStyle/>
+          <a:p>
+            <a:endParaRPr lang="en-US"/>
+          </a:p>
+        </p:txBody>
       </p:sp>
       <p:sp>
         <p:nvSpPr>
@@ -2718,11 +3729,11 @@
           <a:bodyPr wrap="square" lIns="0" tIns="0" rIns="0" bIns="0" rtlCol="0" anchor="ctr"/>
           <a:lstStyle/>
           <a:p>
-            <a:pPr indent="0" marL="0">
+            <a:pPr marL="0" indent="0">
               <a:buNone/>
             </a:pPr>
             <a:r>
-              <a:rPr lang="en-US" sz="1300" b="1" spc="400" kern="0" dirty="0">
+              <a:rPr lang="en-US" sz="1300" b="1" kern="0" spc="400" dirty="0">
                 <a:solidFill>
                   <a:srgbClr val="D97706"/>
                 </a:solidFill>
@@ -2757,7 +3768,7 @@
           <a:bodyPr wrap="square" lIns="0" tIns="0" rIns="0" bIns="0" rtlCol="0" anchor="t"/>
           <a:lstStyle/>
           <a:p>
-            <a:pPr indent="0" marL="0">
+            <a:pPr marL="0" indent="0">
               <a:buNone/>
             </a:pPr>
             <a:r>
@@ -2774,7 +3785,7 @@
             <a:endParaRPr lang="en-US" sz="4800" dirty="0"/>
           </a:p>
           <a:p>
-            <a:pPr indent="0" marL="0">
+            <a:pPr marL="0" indent="0">
               <a:buNone/>
             </a:pPr>
             <a:r>
@@ -2813,7 +3824,7 @@
           <a:bodyPr wrap="square" lIns="0" tIns="0" rIns="0" bIns="0" rtlCol="0" anchor="ctr"/>
           <a:lstStyle/>
           <a:p>
-            <a:pPr indent="0" marL="0">
+            <a:pPr marL="0" indent="0">
               <a:buNone/>
             </a:pPr>
             <a:r>
@@ -2853,6 +3864,13 @@
             <a:prstDash val="solid"/>
           </a:ln>
         </p:spPr>
+        <p:txBody>
+          <a:bodyPr/>
+          <a:lstStyle/>
+          <a:p>
+            <a:endParaRPr lang="en-US"/>
+          </a:p>
+        </p:txBody>
       </p:sp>
       <p:sp>
         <p:nvSpPr>
@@ -2875,7 +3893,7 @@
           <a:bodyPr wrap="square" lIns="0" tIns="0" rIns="0" bIns="0" rtlCol="0" anchor="ctr"/>
           <a:lstStyle/>
           <a:p>
-            <a:pPr indent="0" marL="0">
+            <a:pPr marL="0" indent="0">
               <a:buNone/>
             </a:pPr>
             <a:r>
@@ -2892,7 +3910,7 @@
             <a:endParaRPr lang="en-US" sz="1200" dirty="0"/>
           </a:p>
           <a:p>
-            <a:pPr indent="0" marL="0">
+            <a:pPr marL="0" indent="0">
               <a:buNone/>
             </a:pPr>
             <a:r>
@@ -2909,7 +3927,7 @@
             <a:endParaRPr lang="en-US" sz="1200" dirty="0"/>
           </a:p>
           <a:p>
-            <a:pPr indent="0" marL="0">
+            <a:pPr marL="0" indent="0">
               <a:buNone/>
             </a:pPr>
             <a:r>
@@ -2948,7 +3966,7 @@
           <a:bodyPr wrap="square" lIns="0" tIns="0" rIns="0" bIns="0" rtlCol="0" anchor="ctr"/>
           <a:lstStyle/>
           <a:p>
-            <a:pPr indent="0" marL="0">
+            <a:pPr marL="0" indent="0">
               <a:buNone/>
             </a:pPr>
             <a:r>
@@ -2960,63 +3978,7 @@
                 <a:ea typeface="Calibri" pitchFamily="34" charset="-122"/>
                 <a:cs typeface="Calibri" pitchFamily="34" charset="-120"/>
               </a:rPr>
-              <a:t>What we heard    </a:t>
-            </a:r>
-            <a:pPr indent="0" marL="0">
-              <a:buNone/>
-            </a:pPr>
-            <a:r>
-              <a:rPr lang="en-US" sz="900" dirty="0">
-                <a:solidFill>
-                  <a:srgbClr val="6B7C86"/>
-                </a:solidFill>
-                <a:latin typeface="Calibri" pitchFamily="34" charset="0"/>
-                <a:ea typeface="Calibri" pitchFamily="34" charset="-122"/>
-                <a:cs typeface="Calibri" pitchFamily="34" charset="-120"/>
-              </a:rPr>
-              <a:t>The problem    </a:t>
-            </a:r>
-            <a:pPr indent="0" marL="0">
-              <a:buNone/>
-            </a:pPr>
-            <a:r>
-              <a:rPr lang="en-US" sz="900" dirty="0">
-                <a:solidFill>
-                  <a:srgbClr val="6B7C86"/>
-                </a:solidFill>
-                <a:latin typeface="Calibri" pitchFamily="34" charset="0"/>
-                <a:ea typeface="Calibri" pitchFamily="34" charset="-122"/>
-                <a:cs typeface="Calibri" pitchFamily="34" charset="-120"/>
-              </a:rPr>
-              <a:t>Three changes    </a:t>
-            </a:r>
-            <a:pPr indent="0" marL="0">
-              <a:buNone/>
-            </a:pPr>
-            <a:r>
-              <a:rPr lang="en-US" sz="900" dirty="0">
-                <a:solidFill>
-                  <a:srgbClr val="6B7C86"/>
-                </a:solidFill>
-                <a:latin typeface="Calibri" pitchFamily="34" charset="0"/>
-                <a:ea typeface="Calibri" pitchFamily="34" charset="-122"/>
-                <a:cs typeface="Calibri" pitchFamily="34" charset="-120"/>
-              </a:rPr>
-              <a:t>Eight-week pilot    </a:t>
-            </a:r>
-            <a:pPr indent="0" marL="0">
-              <a:buNone/>
-            </a:pPr>
-            <a:r>
-              <a:rPr lang="en-US" sz="900" dirty="0">
-                <a:solidFill>
-                  <a:srgbClr val="6B7C86"/>
-                </a:solidFill>
-                <a:latin typeface="Calibri" pitchFamily="34" charset="0"/>
-                <a:ea typeface="Calibri" pitchFamily="34" charset="-122"/>
-                <a:cs typeface="Calibri" pitchFamily="34" charset="-120"/>
-              </a:rPr>
-              <a:t>v1.0    </a:t>
+              <a:t>What we heard    The problem    Three changes    Eight-week pilot    v1.0    </a:t>
             </a:r>
             <a:endParaRPr lang="en-US" sz="900" dirty="0"/>
           </a:p>
@@ -3038,6 +4000,7 @@
         <a:solidFill>
           <a:srgbClr val="FFFFFF"/>
         </a:solidFill>
+        <a:effectLst/>
       </p:bgPr>
     </p:bg>
     <p:spTree>
@@ -3075,11 +4038,11 @@
           <a:bodyPr wrap="square" lIns="0" tIns="0" rIns="0" bIns="0" rtlCol="0" anchor="ctr"/>
           <a:lstStyle/>
           <a:p>
-            <a:pPr indent="0" marL="0">
+            <a:pPr marL="0" indent="0">
               <a:buNone/>
             </a:pPr>
             <a:r>
-              <a:rPr lang="en-US" sz="1050" b="1" spc="200" kern="0" dirty="0">
+              <a:rPr lang="en-US" sz="1050" b="1" kern="0" spc="200" dirty="0">
                 <a:solidFill>
                   <a:srgbClr val="6B7C86"/>
                 </a:solidFill>
@@ -3112,17 +4075,24 @@
           </a:solidFill>
           <a:ln/>
         </p:spPr>
+        <p:txBody>
+          <a:bodyPr/>
+          <a:lstStyle/>
+          <a:p>
+            <a:endParaRPr lang="en-US"/>
+          </a:p>
+        </p:txBody>
       </p:sp>
       <p:pic>
         <p:nvPicPr>
-          <p:cNvPr id="4" name="Image 0" descr="preencoded.png">    </p:cNvPr>
+          <p:cNvPr id="4" name="Image 0" descr="preencoded.png"/>
           <p:cNvPicPr>
             <a:picLocks noChangeAspect="1"/>
           </p:cNvPicPr>
           <p:nvPr/>
         </p:nvPicPr>
         <p:blipFill>
-          <a:blip r:embed="rId1"/>
+          <a:blip r:embed="rId3"/>
           <a:stretch>
             <a:fillRect/>
           </a:stretch>
@@ -3158,7 +4128,7 @@
           <a:bodyPr wrap="square" lIns="0" tIns="0" rIns="0" bIns="0" rtlCol="0" anchor="ctr"/>
           <a:lstStyle/>
           <a:p>
-            <a:pPr indent="0" marL="0">
+            <a:pPr marL="0" indent="0">
               <a:buNone/>
             </a:pPr>
             <a:r>
@@ -3195,6 +4165,13 @@
           </a:solidFill>
           <a:ln/>
         </p:spPr>
+        <p:txBody>
+          <a:bodyPr/>
+          <a:lstStyle/>
+          <a:p>
+            <a:endParaRPr lang="en-US"/>
+          </a:p>
+        </p:txBody>
       </p:sp>
       <p:sp>
         <p:nvSpPr>
@@ -3215,6 +4192,13 @@
           </a:solidFill>
           <a:ln/>
         </p:spPr>
+        <p:txBody>
+          <a:bodyPr/>
+          <a:lstStyle/>
+          <a:p>
+            <a:endParaRPr lang="en-US"/>
+          </a:p>
+        </p:txBody>
       </p:sp>
       <p:sp>
         <p:nvSpPr>
@@ -3237,11 +4221,11 @@
           <a:bodyPr wrap="square" lIns="0" tIns="0" rIns="0" bIns="0" rtlCol="0" anchor="ctr"/>
           <a:lstStyle/>
           <a:p>
-            <a:pPr indent="0" marL="0">
+            <a:pPr marL="0" indent="0">
               <a:buNone/>
             </a:pPr>
             <a:r>
-              <a:rPr lang="en-US" sz="1050" b="1" spc="100" kern="0" dirty="0">
+              <a:rPr lang="en-US" sz="1050" b="1" kern="0" spc="100" dirty="0">
                 <a:solidFill>
                   <a:srgbClr val="D97706"/>
                 </a:solidFill>
@@ -3251,9 +4235,6 @@
               </a:rPr>
               <a:t>TAKEAWAY   </a:t>
             </a:r>
-            <a:pPr indent="0" marL="0">
-              <a:buNone/>
-            </a:pPr>
             <a:r>
               <a:rPr lang="en-US" sz="1300" dirty="0">
                 <a:solidFill>
@@ -3291,6 +4272,13 @@
             <a:prstDash val="solid"/>
           </a:ln>
         </p:spPr>
+        <p:txBody>
+          <a:bodyPr/>
+          <a:lstStyle/>
+          <a:p>
+            <a:endParaRPr lang="en-US"/>
+          </a:p>
+        </p:txBody>
       </p:sp>
       <p:sp>
         <p:nvSpPr>
@@ -3313,7 +4301,7 @@
           <a:bodyPr wrap="square" lIns="0" tIns="0" rIns="0" bIns="0" rtlCol="0" anchor="ctr"/>
           <a:lstStyle/>
           <a:p>
-            <a:pPr indent="0" marL="0">
+            <a:pPr marL="0" indent="0">
               <a:buNone/>
             </a:pPr>
             <a:r>
@@ -3352,7 +4340,7 @@
           <a:bodyPr wrap="square" lIns="0" tIns="0" rIns="0" bIns="0" rtlCol="0" anchor="ctr"/>
           <a:lstStyle/>
           <a:p>
-            <a:pPr algn="r" indent="0" marL="0">
+            <a:pPr marL="0" indent="0" algn="r">
               <a:buNone/>
             </a:pPr>
             <a:r>
@@ -3389,6 +4377,13 @@
           </a:solidFill>
           <a:ln/>
         </p:spPr>
+        <p:txBody>
+          <a:bodyPr/>
+          <a:lstStyle/>
+          <a:p>
+            <a:endParaRPr lang="en-US"/>
+          </a:p>
+        </p:txBody>
       </p:sp>
       <p:sp>
         <p:nvSpPr>
@@ -3411,7 +4406,7 @@
           <a:bodyPr wrap="square" lIns="0" tIns="0" rIns="0" bIns="0" rtlCol="0" anchor="ctr"/>
           <a:lstStyle/>
           <a:p>
-            <a:pPr algn="ctr" indent="0" marL="0">
+            <a:pPr marL="0" indent="0" algn="ctr">
               <a:buNone/>
             </a:pPr>
             <a:r>
@@ -3448,6 +4443,13 @@
           </a:solidFill>
           <a:ln/>
         </p:spPr>
+        <p:txBody>
+          <a:bodyPr/>
+          <a:lstStyle/>
+          <a:p>
+            <a:endParaRPr lang="en-US"/>
+          </a:p>
+        </p:txBody>
       </p:sp>
       <p:sp>
         <p:nvSpPr>
@@ -3470,7 +4472,7 @@
           <a:bodyPr wrap="square" lIns="0" tIns="0" rIns="0" bIns="0" rtlCol="0" anchor="ctr"/>
           <a:lstStyle/>
           <a:p>
-            <a:pPr algn="ctr" indent="0" marL="0">
+            <a:pPr marL="0" indent="0" algn="ctr">
               <a:buNone/>
             </a:pPr>
             <a:r>
@@ -3507,6 +4509,13 @@
           </a:solidFill>
           <a:ln/>
         </p:spPr>
+        <p:txBody>
+          <a:bodyPr/>
+          <a:lstStyle/>
+          <a:p>
+            <a:endParaRPr lang="en-US"/>
+          </a:p>
+        </p:txBody>
       </p:sp>
       <p:sp>
         <p:nvSpPr>
@@ -3529,7 +4538,7 @@
           <a:bodyPr wrap="square" lIns="0" tIns="0" rIns="0" bIns="0" rtlCol="0" anchor="ctr"/>
           <a:lstStyle/>
           <a:p>
-            <a:pPr algn="ctr" indent="0" marL="0">
+            <a:pPr marL="0" indent="0" algn="ctr">
               <a:buNone/>
             </a:pPr>
             <a:r>
@@ -3566,6 +4575,13 @@
           </a:solidFill>
           <a:ln/>
         </p:spPr>
+        <p:txBody>
+          <a:bodyPr/>
+          <a:lstStyle/>
+          <a:p>
+            <a:endParaRPr lang="en-US"/>
+          </a:p>
+        </p:txBody>
       </p:sp>
       <p:sp>
         <p:nvSpPr>
@@ -3588,7 +4604,7 @@
           <a:bodyPr wrap="square" lIns="0" tIns="0" rIns="0" bIns="0" rtlCol="0" anchor="ctr"/>
           <a:lstStyle/>
           <a:p>
-            <a:pPr algn="ctr" indent="0" marL="0">
+            <a:pPr marL="0" indent="0" algn="ctr">
               <a:buNone/>
             </a:pPr>
             <a:r>
@@ -3625,6 +4641,13 @@
           </a:solidFill>
           <a:ln/>
         </p:spPr>
+        <p:txBody>
+          <a:bodyPr/>
+          <a:lstStyle/>
+          <a:p>
+            <a:endParaRPr lang="en-US"/>
+          </a:p>
+        </p:txBody>
       </p:sp>
       <p:sp>
         <p:nvSpPr>
@@ -3647,7 +4670,7 @@
           <a:bodyPr wrap="square" lIns="0" tIns="0" rIns="0" bIns="0" rtlCol="0" anchor="ctr"/>
           <a:lstStyle/>
           <a:p>
-            <a:pPr algn="ctr" indent="0" marL="0">
+            <a:pPr marL="0" indent="0" algn="ctr">
               <a:buNone/>
             </a:pPr>
             <a:r>
@@ -3689,13 +4712,20 @@
             <a:prstDash val="solid"/>
           </a:ln>
           <a:effectLst>
-            <a:outerShdw sx="100000" sy="100000" kx="0" ky="0" algn="bl" rotWithShape="0" blurRad="88900" dist="38100" dir="8100000">
+            <a:outerShdw blurRad="88900" dist="38100" dir="8100000" algn="bl" rotWithShape="0">
               <a:srgbClr val="1C2440">
                 <a:alpha val="13000"/>
               </a:srgbClr>
             </a:outerShdw>
           </a:effectLst>
         </p:spPr>
+        <p:txBody>
+          <a:bodyPr/>
+          <a:lstStyle/>
+          <a:p>
+            <a:endParaRPr lang="en-US"/>
+          </a:p>
+        </p:txBody>
       </p:sp>
       <p:sp>
         <p:nvSpPr>
@@ -3718,11 +4748,11 @@
           <a:bodyPr wrap="square" lIns="0" tIns="0" rIns="0" bIns="0" rtlCol="0" anchor="ctr"/>
           <a:lstStyle/>
           <a:p>
-            <a:pPr indent="0" marL="0">
+            <a:pPr marL="0" indent="0">
               <a:buNone/>
             </a:pPr>
             <a:r>
-              <a:rPr lang="en-US" sz="950" b="1" spc="150" kern="0" dirty="0">
+              <a:rPr lang="en-US" sz="950" b="1" kern="0" spc="150" dirty="0">
                 <a:solidFill>
                   <a:srgbClr val="2E5C72"/>
                 </a:solidFill>
@@ -3757,7 +4787,7 @@
           <a:bodyPr wrap="square" lIns="0" tIns="0" rIns="0" bIns="0" rtlCol="0" anchor="t"/>
           <a:lstStyle/>
           <a:p>
-            <a:pPr indent="0" marL="0">
+            <a:pPr marL="0" indent="0">
               <a:buNone/>
             </a:pPr>
             <a:r>
@@ -3796,7 +4826,7 @@
           <a:bodyPr wrap="square" lIns="0" tIns="0" rIns="0" bIns="0" rtlCol="0" anchor="t"/>
           <a:lstStyle/>
           <a:p>
-            <a:pPr indent="0" marL="0">
+            <a:pPr marL="0" indent="0">
               <a:buNone/>
             </a:pPr>
             <a:r>
@@ -3838,13 +4868,20 @@
             <a:prstDash val="solid"/>
           </a:ln>
           <a:effectLst>
-            <a:outerShdw sx="100000" sy="100000" kx="0" ky="0" algn="bl" rotWithShape="0" blurRad="88900" dist="38100" dir="8100000">
+            <a:outerShdw blurRad="88900" dist="38100" dir="8100000" algn="bl" rotWithShape="0">
               <a:srgbClr val="1C2440">
                 <a:alpha val="13000"/>
               </a:srgbClr>
             </a:outerShdw>
           </a:effectLst>
         </p:spPr>
+        <p:txBody>
+          <a:bodyPr/>
+          <a:lstStyle/>
+          <a:p>
+            <a:endParaRPr lang="en-US"/>
+          </a:p>
+        </p:txBody>
       </p:sp>
       <p:sp>
         <p:nvSpPr>
@@ -3867,11 +4904,11 @@
           <a:bodyPr wrap="square" lIns="0" tIns="0" rIns="0" bIns="0" rtlCol="0" anchor="ctr"/>
           <a:lstStyle/>
           <a:p>
-            <a:pPr indent="0" marL="0">
+            <a:pPr marL="0" indent="0">
               <a:buNone/>
             </a:pPr>
             <a:r>
-              <a:rPr lang="en-US" sz="950" b="1" spc="150" kern="0" dirty="0">
+              <a:rPr lang="en-US" sz="950" b="1" kern="0" spc="150" dirty="0">
                 <a:solidFill>
                   <a:srgbClr val="2E5C72"/>
                 </a:solidFill>
@@ -3906,7 +4943,7 @@
           <a:bodyPr wrap="square" lIns="0" tIns="0" rIns="0" bIns="0" rtlCol="0" anchor="t"/>
           <a:lstStyle/>
           <a:p>
-            <a:pPr indent="0" marL="0">
+            <a:pPr marL="0" indent="0">
               <a:buNone/>
             </a:pPr>
             <a:r>
@@ -3945,7 +4982,7 @@
           <a:bodyPr wrap="square" lIns="0" tIns="0" rIns="0" bIns="0" rtlCol="0" anchor="t"/>
           <a:lstStyle/>
           <a:p>
-            <a:pPr indent="0" marL="0">
+            <a:pPr marL="0" indent="0">
               <a:buNone/>
             </a:pPr>
             <a:r>
@@ -3982,13 +5019,20 @@
           </a:solidFill>
           <a:ln/>
           <a:effectLst>
-            <a:outerShdw sx="100000" sy="100000" kx="0" ky="0" algn="bl" rotWithShape="0" blurRad="88900" dist="38100" dir="8100000">
+            <a:outerShdw blurRad="88900" dist="38100" dir="8100000" algn="bl" rotWithShape="0">
               <a:srgbClr val="1C2440">
                 <a:alpha val="13000"/>
               </a:srgbClr>
             </a:outerShdw>
           </a:effectLst>
         </p:spPr>
+        <p:txBody>
+          <a:bodyPr/>
+          <a:lstStyle/>
+          <a:p>
+            <a:endParaRPr lang="en-US"/>
+          </a:p>
+        </p:txBody>
       </p:sp>
       <p:sp>
         <p:nvSpPr>
@@ -4011,11 +5055,11 @@
           <a:bodyPr wrap="square" lIns="0" tIns="0" rIns="0" bIns="0" rtlCol="0" anchor="ctr"/>
           <a:lstStyle/>
           <a:p>
-            <a:pPr indent="0" marL="0">
+            <a:pPr marL="0" indent="0">
               <a:buNone/>
             </a:pPr>
             <a:r>
-              <a:rPr lang="en-US" sz="950" b="1" spc="150" kern="0" dirty="0">
+              <a:rPr lang="en-US" sz="950" b="1" kern="0" spc="150" dirty="0">
                 <a:solidFill>
                   <a:srgbClr val="D97706"/>
                 </a:solidFill>
@@ -4050,7 +5094,7 @@
           <a:bodyPr wrap="square" lIns="0" tIns="0" rIns="0" bIns="0" rtlCol="0" anchor="t"/>
           <a:lstStyle/>
           <a:p>
-            <a:pPr indent="0" marL="0">
+            <a:pPr marL="0" indent="0">
               <a:buNone/>
             </a:pPr>
             <a:r>
@@ -4089,7 +5133,7 @@
           <a:bodyPr wrap="square" lIns="0" tIns="0" rIns="0" bIns="0" rtlCol="0" anchor="t"/>
           <a:lstStyle/>
           <a:p>
-            <a:pPr indent="0" marL="0">
+            <a:pPr marL="0" indent="0">
               <a:buNone/>
             </a:pPr>
             <a:r>
@@ -4123,6 +5167,7 @@
         <a:solidFill>
           <a:srgbClr val="FFFFFF"/>
         </a:solidFill>
+        <a:effectLst/>
       </p:bgPr>
     </p:bg>
     <p:spTree>
@@ -4160,11 +5205,11 @@
           <a:bodyPr wrap="square" lIns="0" tIns="0" rIns="0" bIns="0" rtlCol="0" anchor="ctr"/>
           <a:lstStyle/>
           <a:p>
-            <a:pPr indent="0" marL="0">
+            <a:pPr marL="0" indent="0">
               <a:buNone/>
             </a:pPr>
             <a:r>
-              <a:rPr lang="en-US" sz="1050" b="1" spc="200" kern="0" dirty="0">
+              <a:rPr lang="en-US" sz="1050" b="1" kern="0" spc="200" dirty="0">
                 <a:solidFill>
                   <a:srgbClr val="6B7C86"/>
                 </a:solidFill>
@@ -4197,17 +5242,24 @@
           </a:solidFill>
           <a:ln/>
         </p:spPr>
+        <p:txBody>
+          <a:bodyPr/>
+          <a:lstStyle/>
+          <a:p>
+            <a:endParaRPr lang="en-US"/>
+          </a:p>
+        </p:txBody>
       </p:sp>
       <p:pic>
         <p:nvPicPr>
-          <p:cNvPr id="4" name="Image 0" descr="preencoded.png">    </p:cNvPr>
+          <p:cNvPr id="4" name="Image 0" descr="preencoded.png"/>
           <p:cNvPicPr>
             <a:picLocks noChangeAspect="1"/>
           </p:cNvPicPr>
           <p:nvPr/>
         </p:nvPicPr>
         <p:blipFill>
-          <a:blip r:embed="rId1"/>
+          <a:blip r:embed="rId3"/>
           <a:stretch>
             <a:fillRect/>
           </a:stretch>
@@ -4243,7 +5295,7 @@
           <a:bodyPr wrap="square" lIns="0" tIns="0" rIns="0" bIns="0" rtlCol="0" anchor="ctr"/>
           <a:lstStyle/>
           <a:p>
-            <a:pPr indent="0" marL="0">
+            <a:pPr marL="0" indent="0">
               <a:buNone/>
             </a:pPr>
             <a:r>
@@ -4280,6 +5332,13 @@
           </a:solidFill>
           <a:ln/>
         </p:spPr>
+        <p:txBody>
+          <a:bodyPr/>
+          <a:lstStyle/>
+          <a:p>
+            <a:endParaRPr lang="en-US"/>
+          </a:p>
+        </p:txBody>
       </p:sp>
       <p:sp>
         <p:nvSpPr>
@@ -4300,6 +5359,13 @@
           </a:solidFill>
           <a:ln/>
         </p:spPr>
+        <p:txBody>
+          <a:bodyPr/>
+          <a:lstStyle/>
+          <a:p>
+            <a:endParaRPr lang="en-US"/>
+          </a:p>
+        </p:txBody>
       </p:sp>
       <p:sp>
         <p:nvSpPr>
@@ -4322,11 +5388,11 @@
           <a:bodyPr wrap="square" lIns="0" tIns="0" rIns="0" bIns="0" rtlCol="0" anchor="ctr"/>
           <a:lstStyle/>
           <a:p>
-            <a:pPr indent="0" marL="0">
+            <a:pPr marL="0" indent="0">
               <a:buNone/>
             </a:pPr>
             <a:r>
-              <a:rPr lang="en-US" sz="1050" b="1" spc="100" kern="0" dirty="0">
+              <a:rPr lang="en-US" sz="1050" b="1" kern="0" spc="100" dirty="0">
                 <a:solidFill>
                   <a:srgbClr val="D97706"/>
                 </a:solidFill>
@@ -4336,9 +5402,6 @@
               </a:rPr>
               <a:t>TAKEAWAY   </a:t>
             </a:r>
-            <a:pPr indent="0" marL="0">
-              <a:buNone/>
-            </a:pPr>
             <a:r>
               <a:rPr lang="en-US" sz="1300" dirty="0">
                 <a:solidFill>
@@ -4376,6 +5439,13 @@
             <a:prstDash val="solid"/>
           </a:ln>
         </p:spPr>
+        <p:txBody>
+          <a:bodyPr/>
+          <a:lstStyle/>
+          <a:p>
+            <a:endParaRPr lang="en-US"/>
+          </a:p>
+        </p:txBody>
       </p:sp>
       <p:sp>
         <p:nvSpPr>
@@ -4398,7 +5468,7 @@
           <a:bodyPr wrap="square" lIns="0" tIns="0" rIns="0" bIns="0" rtlCol="0" anchor="ctr"/>
           <a:lstStyle/>
           <a:p>
-            <a:pPr indent="0" marL="0">
+            <a:pPr marL="0" indent="0">
               <a:buNone/>
             </a:pPr>
             <a:r>
@@ -4437,7 +5507,7 @@
           <a:bodyPr wrap="square" lIns="0" tIns="0" rIns="0" bIns="0" rtlCol="0" anchor="ctr"/>
           <a:lstStyle/>
           <a:p>
-            <a:pPr algn="r" indent="0" marL="0">
+            <a:pPr marL="0" indent="0" algn="r">
               <a:buNone/>
             </a:pPr>
             <a:r>
@@ -4474,6 +5544,13 @@
           </a:solidFill>
           <a:ln/>
         </p:spPr>
+        <p:txBody>
+          <a:bodyPr/>
+          <a:lstStyle/>
+          <a:p>
+            <a:endParaRPr lang="en-US"/>
+          </a:p>
+        </p:txBody>
       </p:sp>
       <p:sp>
         <p:nvSpPr>
@@ -4496,7 +5573,7 @@
           <a:bodyPr wrap="square" lIns="0" tIns="0" rIns="0" bIns="0" rtlCol="0" anchor="ctr"/>
           <a:lstStyle/>
           <a:p>
-            <a:pPr indent="0" marL="0">
+            <a:pPr marL="0" indent="0">
               <a:buNone/>
             </a:pPr>
             <a:r>
@@ -4535,6 +5612,13 @@
           </a:solidFill>
           <a:ln/>
         </p:spPr>
+        <p:txBody>
+          <a:bodyPr/>
+          <a:lstStyle/>
+          <a:p>
+            <a:endParaRPr lang="en-US"/>
+          </a:p>
+        </p:txBody>
       </p:sp>
       <p:sp>
         <p:nvSpPr>
@@ -4557,7 +5641,7 @@
           <a:bodyPr wrap="square" lIns="0" tIns="0" rIns="0" bIns="0" rtlCol="0" anchor="ctr"/>
           <a:lstStyle/>
           <a:p>
-            <a:pPr indent="0" marL="0">
+            <a:pPr marL="0" indent="0">
               <a:buNone/>
             </a:pPr>
             <a:r>
@@ -4596,6 +5680,13 @@
           </a:solidFill>
           <a:ln/>
         </p:spPr>
+        <p:txBody>
+          <a:bodyPr/>
+          <a:lstStyle/>
+          <a:p>
+            <a:endParaRPr lang="en-US"/>
+          </a:p>
+        </p:txBody>
       </p:sp>
       <p:sp>
         <p:nvSpPr>
@@ -4618,7 +5709,7 @@
           <a:bodyPr wrap="square" lIns="0" tIns="0" rIns="0" bIns="0" rtlCol="0" anchor="ctr"/>
           <a:lstStyle/>
           <a:p>
-            <a:pPr indent="0" marL="0">
+            <a:pPr marL="0" indent="0">
               <a:buNone/>
             </a:pPr>
             <a:r>
@@ -4657,6 +5748,13 @@
           </a:solidFill>
           <a:ln/>
         </p:spPr>
+        <p:txBody>
+          <a:bodyPr/>
+          <a:lstStyle/>
+          <a:p>
+            <a:endParaRPr lang="en-US"/>
+          </a:p>
+        </p:txBody>
       </p:sp>
       <p:sp>
         <p:nvSpPr>
@@ -4679,7 +5777,7 @@
           <a:bodyPr wrap="square" lIns="0" tIns="0" rIns="0" bIns="0" rtlCol="0" anchor="ctr"/>
           <a:lstStyle/>
           <a:p>
-            <a:pPr indent="0" marL="0">
+            <a:pPr marL="0" indent="0">
               <a:buNone/>
             </a:pPr>
             <a:r>
@@ -4718,6 +5816,13 @@
           </a:solidFill>
           <a:ln/>
         </p:spPr>
+        <p:txBody>
+          <a:bodyPr/>
+          <a:lstStyle/>
+          <a:p>
+            <a:endParaRPr lang="en-US"/>
+          </a:p>
+        </p:txBody>
       </p:sp>
       <p:sp>
         <p:nvSpPr>
@@ -4740,7 +5845,7 @@
           <a:bodyPr wrap="square" lIns="0" tIns="0" rIns="0" bIns="0" rtlCol="0" anchor="ctr"/>
           <a:lstStyle/>
           <a:p>
-            <a:pPr indent="0" marL="0">
+            <a:pPr marL="0" indent="0">
               <a:buNone/>
             </a:pPr>
             <a:r>
@@ -4782,13 +5887,20 @@
             <a:prstDash val="solid"/>
           </a:ln>
           <a:effectLst>
-            <a:outerShdw sx="100000" sy="100000" kx="0" ky="0" algn="bl" rotWithShape="0" blurRad="88900" dist="38100" dir="8100000">
+            <a:outerShdw blurRad="88900" dist="38100" dir="8100000" algn="bl" rotWithShape="0">
               <a:srgbClr val="1C2440">
                 <a:alpha val="13000"/>
               </a:srgbClr>
             </a:outerShdw>
           </a:effectLst>
         </p:spPr>
+        <p:txBody>
+          <a:bodyPr/>
+          <a:lstStyle/>
+          <a:p>
+            <a:endParaRPr lang="en-US"/>
+          </a:p>
+        </p:txBody>
       </p:sp>
       <p:sp>
         <p:nvSpPr>
@@ -4811,7 +5923,7 @@
           <a:bodyPr wrap="square" lIns="0" tIns="0" rIns="0" bIns="0" rtlCol="0" anchor="ctr"/>
           <a:lstStyle/>
           <a:p>
-            <a:pPr indent="0" marL="0">
+            <a:pPr marL="0" indent="0">
               <a:buNone/>
             </a:pPr>
             <a:r>
@@ -4825,9 +5937,6 @@
               </a:rPr>
               <a:t>■ </a:t>
             </a:r>
-            <a:pPr indent="0" marL="0">
-              <a:buNone/>
-            </a:pPr>
             <a:r>
               <a:rPr lang="en-US" sz="1300" b="1" dirty="0">
                 <a:solidFill>
@@ -4968,6 +6077,13 @@
           </a:solidFill>
           <a:ln/>
         </p:spPr>
+        <p:txBody>
+          <a:bodyPr/>
+          <a:lstStyle/>
+          <a:p>
+            <a:endParaRPr lang="en-US"/>
+          </a:p>
+        </p:txBody>
       </p:sp>
       <p:sp>
         <p:nvSpPr>
@@ -4988,6 +6104,13 @@
           </a:solidFill>
           <a:ln/>
         </p:spPr>
+        <p:txBody>
+          <a:bodyPr/>
+          <a:lstStyle/>
+          <a:p>
+            <a:endParaRPr lang="en-US"/>
+          </a:p>
+        </p:txBody>
       </p:sp>
       <p:sp>
         <p:nvSpPr>
@@ -5010,11 +6133,11 @@
           <a:bodyPr wrap="square" lIns="0" tIns="0" rIns="0" bIns="0" rtlCol="0" anchor="ctr"/>
           <a:lstStyle/>
           <a:p>
-            <a:pPr indent="0" marL="0">
+            <a:pPr marL="0" indent="0">
               <a:buNone/>
             </a:pPr>
             <a:r>
-              <a:rPr lang="en-US" sz="1050" b="1" spc="100" kern="0" dirty="0">
+              <a:rPr lang="en-US" sz="1050" b="1" kern="0" spc="100" dirty="0">
                 <a:solidFill>
                   <a:srgbClr val="D97706"/>
                 </a:solidFill>
@@ -5024,9 +6147,6 @@
               </a:rPr>
               <a:t>IN YOUR WORDS   </a:t>
             </a:r>
-            <a:pPr indent="0" marL="0">
-              <a:buNone/>
-            </a:pPr>
             <a:r>
               <a:rPr lang="en-US" sz="1200" i="1" dirty="0">
                 <a:solidFill>
@@ -5058,6 +6178,7 @@
         <a:solidFill>
           <a:srgbClr val="FFFFFF"/>
         </a:solidFill>
+        <a:effectLst/>
       </p:bgPr>
     </p:bg>
     <p:spTree>
@@ -5095,11 +6216,11 @@
           <a:bodyPr wrap="square" lIns="0" tIns="0" rIns="0" bIns="0" rtlCol="0" anchor="ctr"/>
           <a:lstStyle/>
           <a:p>
-            <a:pPr indent="0" marL="0">
+            <a:pPr marL="0" indent="0">
               <a:buNone/>
             </a:pPr>
             <a:r>
-              <a:rPr lang="en-US" sz="1050" b="1" spc="200" kern="0" dirty="0">
+              <a:rPr lang="en-US" sz="1050" b="1" kern="0" spc="200" dirty="0">
                 <a:solidFill>
                   <a:srgbClr val="6B7C86"/>
                 </a:solidFill>
@@ -5132,17 +6253,24 @@
           </a:solidFill>
           <a:ln/>
         </p:spPr>
+        <p:txBody>
+          <a:bodyPr/>
+          <a:lstStyle/>
+          <a:p>
+            <a:endParaRPr lang="en-US"/>
+          </a:p>
+        </p:txBody>
       </p:sp>
       <p:pic>
         <p:nvPicPr>
-          <p:cNvPr id="4" name="Image 0" descr="preencoded.png">    </p:cNvPr>
+          <p:cNvPr id="4" name="Image 0" descr="preencoded.png"/>
           <p:cNvPicPr>
             <a:picLocks noChangeAspect="1"/>
           </p:cNvPicPr>
           <p:nvPr/>
         </p:nvPicPr>
         <p:blipFill>
-          <a:blip r:embed="rId1"/>
+          <a:blip r:embed="rId3"/>
           <a:stretch>
             <a:fillRect/>
           </a:stretch>
@@ -5178,7 +6306,7 @@
           <a:bodyPr wrap="square" lIns="0" tIns="0" rIns="0" bIns="0" rtlCol="0" anchor="ctr"/>
           <a:lstStyle/>
           <a:p>
-            <a:pPr indent="0" marL="0">
+            <a:pPr marL="0" indent="0">
               <a:buNone/>
             </a:pPr>
             <a:r>
@@ -5215,6 +6343,13 @@
           </a:solidFill>
           <a:ln/>
         </p:spPr>
+        <p:txBody>
+          <a:bodyPr/>
+          <a:lstStyle/>
+          <a:p>
+            <a:endParaRPr lang="en-US"/>
+          </a:p>
+        </p:txBody>
       </p:sp>
       <p:sp>
         <p:nvSpPr>
@@ -5235,6 +6370,13 @@
           </a:solidFill>
           <a:ln/>
         </p:spPr>
+        <p:txBody>
+          <a:bodyPr/>
+          <a:lstStyle/>
+          <a:p>
+            <a:endParaRPr lang="en-US"/>
+          </a:p>
+        </p:txBody>
       </p:sp>
       <p:sp>
         <p:nvSpPr>
@@ -5257,11 +6399,11 @@
           <a:bodyPr wrap="square" lIns="0" tIns="0" rIns="0" bIns="0" rtlCol="0" anchor="ctr"/>
           <a:lstStyle/>
           <a:p>
-            <a:pPr indent="0" marL="0">
+            <a:pPr marL="0" indent="0">
               <a:buNone/>
             </a:pPr>
             <a:r>
-              <a:rPr lang="en-US" sz="1050" b="1" spc="100" kern="0" dirty="0">
+              <a:rPr lang="en-US" sz="1050" b="1" kern="0" spc="100" dirty="0">
                 <a:solidFill>
                   <a:srgbClr val="D97706"/>
                 </a:solidFill>
@@ -5271,9 +6413,6 @@
               </a:rPr>
               <a:t>TAKEAWAY   </a:t>
             </a:r>
-            <a:pPr indent="0" marL="0">
-              <a:buNone/>
-            </a:pPr>
             <a:r>
               <a:rPr lang="en-US" sz="1300" dirty="0">
                 <a:solidFill>
@@ -5311,6 +6450,13 @@
             <a:prstDash val="solid"/>
           </a:ln>
         </p:spPr>
+        <p:txBody>
+          <a:bodyPr/>
+          <a:lstStyle/>
+          <a:p>
+            <a:endParaRPr lang="en-US"/>
+          </a:p>
+        </p:txBody>
       </p:sp>
       <p:sp>
         <p:nvSpPr>
@@ -5333,7 +6479,7 @@
           <a:bodyPr wrap="square" lIns="0" tIns="0" rIns="0" bIns="0" rtlCol="0" anchor="ctr"/>
           <a:lstStyle/>
           <a:p>
-            <a:pPr indent="0" marL="0">
+            <a:pPr marL="0" indent="0">
               <a:buNone/>
             </a:pPr>
             <a:r>
@@ -5372,7 +6518,7 @@
           <a:bodyPr wrap="square" lIns="0" tIns="0" rIns="0" bIns="0" rtlCol="0" anchor="ctr"/>
           <a:lstStyle/>
           <a:p>
-            <a:pPr algn="r" indent="0" marL="0">
+            <a:pPr marL="0" indent="0" algn="r">
               <a:buNone/>
             </a:pPr>
             <a:r>
@@ -5414,13 +6560,20 @@
             <a:prstDash val="solid"/>
           </a:ln>
           <a:effectLst>
-            <a:outerShdw sx="100000" sy="100000" kx="0" ky="0" algn="bl" rotWithShape="0" blurRad="88900" dist="38100" dir="8100000">
+            <a:outerShdw blurRad="88900" dist="38100" dir="8100000" algn="bl" rotWithShape="0">
               <a:srgbClr val="1C2440">
                 <a:alpha val="13000"/>
               </a:srgbClr>
             </a:outerShdw>
           </a:effectLst>
         </p:spPr>
+        <p:txBody>
+          <a:bodyPr/>
+          <a:lstStyle/>
+          <a:p>
+            <a:endParaRPr lang="en-US"/>
+          </a:p>
+        </p:txBody>
       </p:sp>
       <p:sp>
         <p:nvSpPr>
@@ -5441,6 +6594,13 @@
           </a:solidFill>
           <a:ln/>
         </p:spPr>
+        <p:txBody>
+          <a:bodyPr/>
+          <a:lstStyle/>
+          <a:p>
+            <a:endParaRPr lang="en-US"/>
+          </a:p>
+        </p:txBody>
       </p:sp>
       <p:sp>
         <p:nvSpPr>
@@ -5463,11 +6623,11 @@
           <a:bodyPr wrap="square" lIns="0" tIns="0" rIns="0" bIns="0" rtlCol="0" anchor="ctr"/>
           <a:lstStyle/>
           <a:p>
-            <a:pPr indent="0" marL="0">
+            <a:pPr marL="0" indent="0">
               <a:buNone/>
             </a:pPr>
             <a:r>
-              <a:rPr lang="en-US" sz="1300" b="1" spc="200" kern="0" dirty="0">
+              <a:rPr lang="en-US" sz="1300" b="1" kern="0" spc="200" dirty="0">
                 <a:solidFill>
                   <a:srgbClr val="FFFFFF"/>
                 </a:solidFill>
@@ -5611,13 +6771,20 @@
             <a:prstDash val="solid"/>
           </a:ln>
           <a:effectLst>
-            <a:outerShdw sx="100000" sy="100000" kx="0" ky="0" algn="bl" rotWithShape="0" blurRad="88900" dist="38100" dir="8100000">
+            <a:outerShdw blurRad="88900" dist="38100" dir="8100000" algn="bl" rotWithShape="0">
               <a:srgbClr val="1C2440">
                 <a:alpha val="13000"/>
               </a:srgbClr>
             </a:outerShdw>
           </a:effectLst>
         </p:spPr>
+        <p:txBody>
+          <a:bodyPr/>
+          <a:lstStyle/>
+          <a:p>
+            <a:endParaRPr lang="en-US"/>
+          </a:p>
+        </p:txBody>
       </p:sp>
       <p:sp>
         <p:nvSpPr>
@@ -5638,6 +6805,13 @@
           </a:solidFill>
           <a:ln/>
         </p:spPr>
+        <p:txBody>
+          <a:bodyPr/>
+          <a:lstStyle/>
+          <a:p>
+            <a:endParaRPr lang="en-US"/>
+          </a:p>
+        </p:txBody>
       </p:sp>
       <p:sp>
         <p:nvSpPr>
@@ -5660,11 +6834,11 @@
           <a:bodyPr wrap="square" lIns="0" tIns="0" rIns="0" bIns="0" rtlCol="0" anchor="ctr"/>
           <a:lstStyle/>
           <a:p>
-            <a:pPr indent="0" marL="0">
+            <a:pPr marL="0" indent="0">
               <a:buNone/>
             </a:pPr>
             <a:r>
-              <a:rPr lang="en-US" sz="1300" b="1" spc="200" kern="0" dirty="0">
+              <a:rPr lang="en-US" sz="1300" b="1" kern="0" spc="200" dirty="0">
                 <a:solidFill>
                   <a:srgbClr val="0F1F2B"/>
                 </a:solidFill>
@@ -5824,6 +6998,13 @@
           </a:solidFill>
           <a:ln/>
         </p:spPr>
+        <p:txBody>
+          <a:bodyPr/>
+          <a:lstStyle/>
+          <a:p>
+            <a:endParaRPr lang="en-US"/>
+          </a:p>
+        </p:txBody>
       </p:sp>
       <p:sp>
         <p:nvSpPr>
@@ -5844,6 +7025,13 @@
           </a:solidFill>
           <a:ln/>
         </p:spPr>
+        <p:txBody>
+          <a:bodyPr/>
+          <a:lstStyle/>
+          <a:p>
+            <a:endParaRPr lang="en-US"/>
+          </a:p>
+        </p:txBody>
       </p:sp>
       <p:sp>
         <p:nvSpPr>
@@ -5866,11 +7054,11 @@
           <a:bodyPr wrap="square" lIns="0" tIns="0" rIns="0" bIns="0" rtlCol="0" anchor="ctr"/>
           <a:lstStyle/>
           <a:p>
-            <a:pPr indent="0" marL="0">
+            <a:pPr marL="0" indent="0">
               <a:buNone/>
             </a:pPr>
             <a:r>
-              <a:rPr lang="en-US" sz="1050" b="1" spc="100" kern="0" dirty="0">
+              <a:rPr lang="en-US" sz="1050" b="1" kern="0" spc="100" dirty="0">
                 <a:solidFill>
                   <a:srgbClr val="D97706"/>
                 </a:solidFill>
@@ -5880,9 +7068,6 @@
               </a:rPr>
               <a:t>YOUR CONSTRAINT, HONOURED   </a:t>
             </a:r>
-            <a:pPr indent="0" marL="0">
-              <a:buNone/>
-            </a:pPr>
             <a:r>
               <a:rPr lang="en-US" sz="1200" dirty="0">
                 <a:solidFill>
@@ -5914,6 +7099,7 @@
         <a:solidFill>
           <a:srgbClr val="FFFFFF"/>
         </a:solidFill>
+        <a:effectLst/>
       </p:bgPr>
     </p:bg>
     <p:spTree>
@@ -5951,11 +7137,11 @@
           <a:bodyPr wrap="square" lIns="0" tIns="0" rIns="0" bIns="0" rtlCol="0" anchor="ctr"/>
           <a:lstStyle/>
           <a:p>
-            <a:pPr indent="0" marL="0">
+            <a:pPr marL="0" indent="0">
               <a:buNone/>
             </a:pPr>
             <a:r>
-              <a:rPr lang="en-US" sz="1050" b="1" spc="200" kern="0" dirty="0">
+              <a:rPr lang="en-US" sz="1050" b="1" kern="0" spc="200" dirty="0">
                 <a:solidFill>
                   <a:srgbClr val="6B7C86"/>
                 </a:solidFill>
@@ -5988,17 +7174,24 @@
           </a:solidFill>
           <a:ln/>
         </p:spPr>
+        <p:txBody>
+          <a:bodyPr/>
+          <a:lstStyle/>
+          <a:p>
+            <a:endParaRPr lang="en-US"/>
+          </a:p>
+        </p:txBody>
       </p:sp>
       <p:pic>
         <p:nvPicPr>
-          <p:cNvPr id="4" name="Image 0" descr="preencoded.png">    </p:cNvPr>
+          <p:cNvPr id="4" name="Image 0" descr="preencoded.png"/>
           <p:cNvPicPr>
             <a:picLocks noChangeAspect="1"/>
           </p:cNvPicPr>
           <p:nvPr/>
         </p:nvPicPr>
         <p:blipFill>
-          <a:blip r:embed="rId1"/>
+          <a:blip r:embed="rId3"/>
           <a:stretch>
             <a:fillRect/>
           </a:stretch>
@@ -6034,7 +7227,7 @@
           <a:bodyPr wrap="square" lIns="0" tIns="0" rIns="0" bIns="0" rtlCol="0" anchor="ctr"/>
           <a:lstStyle/>
           <a:p>
-            <a:pPr indent="0" marL="0">
+            <a:pPr marL="0" indent="0">
               <a:buNone/>
             </a:pPr>
             <a:r>
@@ -6071,6 +7264,13 @@
           </a:solidFill>
           <a:ln/>
         </p:spPr>
+        <p:txBody>
+          <a:bodyPr/>
+          <a:lstStyle/>
+          <a:p>
+            <a:endParaRPr lang="en-US"/>
+          </a:p>
+        </p:txBody>
       </p:sp>
       <p:sp>
         <p:nvSpPr>
@@ -6091,6 +7291,13 @@
           </a:solidFill>
           <a:ln/>
         </p:spPr>
+        <p:txBody>
+          <a:bodyPr/>
+          <a:lstStyle/>
+          <a:p>
+            <a:endParaRPr lang="en-US"/>
+          </a:p>
+        </p:txBody>
       </p:sp>
       <p:sp>
         <p:nvSpPr>
@@ -6113,11 +7320,11 @@
           <a:bodyPr wrap="square" lIns="0" tIns="0" rIns="0" bIns="0" rtlCol="0" anchor="ctr"/>
           <a:lstStyle/>
           <a:p>
-            <a:pPr indent="0" marL="0">
+            <a:pPr marL="0" indent="0">
               <a:buNone/>
             </a:pPr>
             <a:r>
-              <a:rPr lang="en-US" sz="1050" b="1" spc="100" kern="0" dirty="0">
+              <a:rPr lang="en-US" sz="1050" b="1" kern="0" spc="100" dirty="0">
                 <a:solidFill>
                   <a:srgbClr val="D97706"/>
                 </a:solidFill>
@@ -6127,9 +7334,6 @@
               </a:rPr>
               <a:t>TAKEAWAY   </a:t>
             </a:r>
-            <a:pPr indent="0" marL="0">
-              <a:buNone/>
-            </a:pPr>
             <a:r>
               <a:rPr lang="en-US" sz="1300" dirty="0">
                 <a:solidFill>
@@ -6167,6 +7371,13 @@
             <a:prstDash val="solid"/>
           </a:ln>
         </p:spPr>
+        <p:txBody>
+          <a:bodyPr/>
+          <a:lstStyle/>
+          <a:p>
+            <a:endParaRPr lang="en-US"/>
+          </a:p>
+        </p:txBody>
       </p:sp>
       <p:sp>
         <p:nvSpPr>
@@ -6189,7 +7400,7 @@
           <a:bodyPr wrap="square" lIns="0" tIns="0" rIns="0" bIns="0" rtlCol="0" anchor="ctr"/>
           <a:lstStyle/>
           <a:p>
-            <a:pPr indent="0" marL="0">
+            <a:pPr marL="0" indent="0">
               <a:buNone/>
             </a:pPr>
             <a:r>
@@ -6228,7 +7439,7 @@
           <a:bodyPr wrap="square" lIns="0" tIns="0" rIns="0" bIns="0" rtlCol="0" anchor="ctr"/>
           <a:lstStyle/>
           <a:p>
-            <a:pPr algn="r" indent="0" marL="0">
+            <a:pPr marL="0" indent="0" algn="r">
               <a:buNone/>
             </a:pPr>
             <a:r>
@@ -6262,16 +7473,34 @@
         </p:nvGraphicFramePr>
         <p:xfrm>
           <a:off x="566928" y="2395728"/>
-          <a:ext cx="11055096" cy="914400"/>
+          <a:ext cx="11055096" cy="3108960"/>
         </p:xfrm>
         <a:graphic>
           <a:graphicData uri="http://schemas.openxmlformats.org/drawingml/2006/table">
             <a:tbl>
               <a:tblPr/>
               <a:tblGrid>
-                <a:gridCol w="5253228"/>
-                <a:gridCol w="548640"/>
-                <a:gridCol w="5253228"/>
+                <a:gridCol w="5253228">
+                  <a:extLst>
+                    <a:ext uri="{9D8B030D-6E8A-4147-A177-3AD203B41FA5}">
+                      <a16:colId xmlns:a16="http://schemas.microsoft.com/office/drawing/2014/main" val="20000"/>
+                    </a:ext>
+                  </a:extLst>
+                </a:gridCol>
+                <a:gridCol w="548640">
+                  <a:extLst>
+                    <a:ext uri="{9D8B030D-6E8A-4147-A177-3AD203B41FA5}">
+                      <a16:colId xmlns:a16="http://schemas.microsoft.com/office/drawing/2014/main" val="20001"/>
+                    </a:ext>
+                  </a:extLst>
+                </a:gridCol>
+                <a:gridCol w="5253228">
+                  <a:extLst>
+                    <a:ext uri="{9D8B030D-6E8A-4147-A177-3AD203B41FA5}">
+                      <a16:colId xmlns:a16="http://schemas.microsoft.com/office/drawing/2014/main" val="20002"/>
+                    </a:ext>
+                  </a:extLst>
+                </a:gridCol>
               </a:tblGrid>
               <a:tr h="365760">
                 <a:tc>
@@ -6279,11 +7508,11 @@
                     <a:bodyPr/>
                     <a:lstStyle/>
                     <a:p>
-                      <a:pPr indent="0" marL="0">
+                      <a:pPr marL="0" indent="0">
                         <a:buNone/>
                       </a:pPr>
                       <a:r>
-                        <a:rPr lang="en-US" sz="1150" b="1" spc="100" kern="0" dirty="0">
+                        <a:rPr lang="en-US" sz="1150" b="1" kern="0" spc="100" dirty="0">
                           <a:solidFill>
                             <a:srgbClr val="FFFFFF"/>
                           </a:solidFill>
@@ -6340,7 +7569,7 @@
                     <a:bodyPr/>
                     <a:lstStyle/>
                     <a:p>
-                      <a:pPr indent="0" marL="0">
+                      <a:pPr marL="0" indent="0">
                         <a:buNone/>
                       </a:pPr>
                       <a:endParaRPr lang="en-US" sz="1200" dirty="0"/>
@@ -6393,11 +7622,11 @@
                     <a:bodyPr/>
                     <a:lstStyle/>
                     <a:p>
-                      <a:pPr indent="0" marL="0">
+                      <a:pPr marL="0" indent="0">
                         <a:buNone/>
                       </a:pPr>
                       <a:r>
-                        <a:rPr lang="en-US" sz="1150" b="1" spc="100" kern="0" dirty="0">
+                        <a:rPr lang="en-US" sz="1150" b="1" kern="0" spc="100" dirty="0">
                           <a:solidFill>
                             <a:srgbClr val="0F1F2B"/>
                           </a:solidFill>
@@ -6449,6 +7678,11 @@
                     </a:solidFill>
                   </a:tcPr>
                 </a:tc>
+                <a:extLst>
+                  <a:ext uri="{0D108BD9-81ED-4DB2-BD59-A6C34878D82A}">
+                    <a16:rowId xmlns:a16="http://schemas.microsoft.com/office/drawing/2014/main" val="10000"/>
+                  </a:ext>
+                </a:extLst>
               </a:tr>
               <a:tr h="457200">
                 <a:tc>
@@ -6456,7 +7690,7 @@
                     <a:bodyPr/>
                     <a:lstStyle/>
                     <a:p>
-                      <a:pPr indent="0" marL="0">
+                      <a:pPr marL="0" indent="0">
                         <a:buNone/>
                       </a:pPr>
                       <a:r>
@@ -6517,7 +7751,7 @@
                     <a:bodyPr/>
                     <a:lstStyle/>
                     <a:p>
-                      <a:pPr algn="ctr" indent="0" marL="0">
+                      <a:pPr marL="0" indent="0" algn="ctr">
                         <a:buNone/>
                       </a:pPr>
                       <a:r>
@@ -6578,7 +7812,7 @@
                     <a:bodyPr/>
                     <a:lstStyle/>
                     <a:p>
-                      <a:pPr indent="0" marL="0">
+                      <a:pPr marL="0" indent="0">
                         <a:buNone/>
                       </a:pPr>
                       <a:r>
@@ -6634,6 +7868,11 @@
                     </a:solidFill>
                   </a:tcPr>
                 </a:tc>
+                <a:extLst>
+                  <a:ext uri="{0D108BD9-81ED-4DB2-BD59-A6C34878D82A}">
+                    <a16:rowId xmlns:a16="http://schemas.microsoft.com/office/drawing/2014/main" val="10001"/>
+                  </a:ext>
+                </a:extLst>
               </a:tr>
               <a:tr h="457200">
                 <a:tc>
@@ -6641,7 +7880,7 @@
                     <a:bodyPr/>
                     <a:lstStyle/>
                     <a:p>
-                      <a:pPr indent="0" marL="0">
+                      <a:pPr marL="0" indent="0">
                         <a:buNone/>
                       </a:pPr>
                       <a:r>
@@ -6702,7 +7941,7 @@
                     <a:bodyPr/>
                     <a:lstStyle/>
                     <a:p>
-                      <a:pPr algn="ctr" indent="0" marL="0">
+                      <a:pPr marL="0" indent="0" algn="ctr">
                         <a:buNone/>
                       </a:pPr>
                       <a:r>
@@ -6763,7 +8002,7 @@
                     <a:bodyPr/>
                     <a:lstStyle/>
                     <a:p>
-                      <a:pPr indent="0" marL="0">
+                      <a:pPr marL="0" indent="0">
                         <a:buNone/>
                       </a:pPr>
                       <a:r>
@@ -6819,6 +8058,11 @@
                     </a:solidFill>
                   </a:tcPr>
                 </a:tc>
+                <a:extLst>
+                  <a:ext uri="{0D108BD9-81ED-4DB2-BD59-A6C34878D82A}">
+                    <a16:rowId xmlns:a16="http://schemas.microsoft.com/office/drawing/2014/main" val="10002"/>
+                  </a:ext>
+                </a:extLst>
               </a:tr>
               <a:tr h="457200">
                 <a:tc>
@@ -6826,7 +8070,7 @@
                     <a:bodyPr/>
                     <a:lstStyle/>
                     <a:p>
-                      <a:pPr indent="0" marL="0">
+                      <a:pPr marL="0" indent="0">
                         <a:buNone/>
                       </a:pPr>
                       <a:r>
@@ -6887,7 +8131,7 @@
                     <a:bodyPr/>
                     <a:lstStyle/>
                     <a:p>
-                      <a:pPr algn="ctr" indent="0" marL="0">
+                      <a:pPr marL="0" indent="0" algn="ctr">
                         <a:buNone/>
                       </a:pPr>
                       <a:r>
@@ -6948,7 +8192,7 @@
                     <a:bodyPr/>
                     <a:lstStyle/>
                     <a:p>
-                      <a:pPr indent="0" marL="0">
+                      <a:pPr marL="0" indent="0">
                         <a:buNone/>
                       </a:pPr>
                       <a:r>
@@ -7004,6 +8248,11 @@
                     </a:solidFill>
                   </a:tcPr>
                 </a:tc>
+                <a:extLst>
+                  <a:ext uri="{0D108BD9-81ED-4DB2-BD59-A6C34878D82A}">
+                    <a16:rowId xmlns:a16="http://schemas.microsoft.com/office/drawing/2014/main" val="10003"/>
+                  </a:ext>
+                </a:extLst>
               </a:tr>
               <a:tr h="457200">
                 <a:tc>
@@ -7011,7 +8260,7 @@
                     <a:bodyPr/>
                     <a:lstStyle/>
                     <a:p>
-                      <a:pPr indent="0" marL="0">
+                      <a:pPr marL="0" indent="0">
                         <a:buNone/>
                       </a:pPr>
                       <a:r>
@@ -7072,7 +8321,7 @@
                     <a:bodyPr/>
                     <a:lstStyle/>
                     <a:p>
-                      <a:pPr algn="ctr" indent="0" marL="0">
+                      <a:pPr marL="0" indent="0" algn="ctr">
                         <a:buNone/>
                       </a:pPr>
                       <a:r>
@@ -7133,7 +8382,7 @@
                     <a:bodyPr/>
                     <a:lstStyle/>
                     <a:p>
-                      <a:pPr indent="0" marL="0">
+                      <a:pPr marL="0" indent="0">
                         <a:buNone/>
                       </a:pPr>
                       <a:r>
@@ -7189,6 +8438,11 @@
                     </a:solidFill>
                   </a:tcPr>
                 </a:tc>
+                <a:extLst>
+                  <a:ext uri="{0D108BD9-81ED-4DB2-BD59-A6C34878D82A}">
+                    <a16:rowId xmlns:a16="http://schemas.microsoft.com/office/drawing/2014/main" val="10004"/>
+                  </a:ext>
+                </a:extLst>
               </a:tr>
               <a:tr h="457200">
                 <a:tc>
@@ -7196,7 +8450,7 @@
                     <a:bodyPr/>
                     <a:lstStyle/>
                     <a:p>
-                      <a:pPr indent="0" marL="0">
+                      <a:pPr marL="0" indent="0">
                         <a:buNone/>
                       </a:pPr>
                       <a:r>
@@ -7257,7 +8511,7 @@
                     <a:bodyPr/>
                     <a:lstStyle/>
                     <a:p>
-                      <a:pPr algn="ctr" indent="0" marL="0">
+                      <a:pPr marL="0" indent="0" algn="ctr">
                         <a:buNone/>
                       </a:pPr>
                       <a:r>
@@ -7318,7 +8572,7 @@
                     <a:bodyPr/>
                     <a:lstStyle/>
                     <a:p>
-                      <a:pPr indent="0" marL="0">
+                      <a:pPr marL="0" indent="0">
                         <a:buNone/>
                       </a:pPr>
                       <a:r>
@@ -7374,6 +8628,11 @@
                     </a:solidFill>
                   </a:tcPr>
                 </a:tc>
+                <a:extLst>
+                  <a:ext uri="{0D108BD9-81ED-4DB2-BD59-A6C34878D82A}">
+                    <a16:rowId xmlns:a16="http://schemas.microsoft.com/office/drawing/2014/main" val="10005"/>
+                  </a:ext>
+                </a:extLst>
               </a:tr>
               <a:tr h="457200">
                 <a:tc>
@@ -7381,7 +8640,7 @@
                     <a:bodyPr/>
                     <a:lstStyle/>
                     <a:p>
-                      <a:pPr indent="0" marL="0">
+                      <a:pPr marL="0" indent="0">
                         <a:buNone/>
                       </a:pPr>
                       <a:r>
@@ -7442,7 +8701,7 @@
                     <a:bodyPr/>
                     <a:lstStyle/>
                     <a:p>
-                      <a:pPr algn="ctr" indent="0" marL="0">
+                      <a:pPr marL="0" indent="0" algn="ctr">
                         <a:buNone/>
                       </a:pPr>
                       <a:r>
@@ -7503,7 +8762,7 @@
                     <a:bodyPr/>
                     <a:lstStyle/>
                     <a:p>
-                      <a:pPr indent="0" marL="0">
+                      <a:pPr marL="0" indent="0">
                         <a:buNone/>
                       </a:pPr>
                       <a:r>
@@ -7559,6 +8818,11 @@
                     </a:solidFill>
                   </a:tcPr>
                 </a:tc>
+                <a:extLst>
+                  <a:ext uri="{0D108BD9-81ED-4DB2-BD59-A6C34878D82A}">
+                    <a16:rowId xmlns:a16="http://schemas.microsoft.com/office/drawing/2014/main" val="10006"/>
+                  </a:ext>
+                </a:extLst>
               </a:tr>
             </a:tbl>
           </a:graphicData>
@@ -7580,6 +8844,7 @@
         <a:solidFill>
           <a:srgbClr val="FFFFFF"/>
         </a:solidFill>
+        <a:effectLst/>
       </p:bgPr>
     </p:bg>
     <p:spTree>
@@ -7617,11 +8882,11 @@
           <a:bodyPr wrap="square" lIns="0" tIns="0" rIns="0" bIns="0" rtlCol="0" anchor="ctr"/>
           <a:lstStyle/>
           <a:p>
-            <a:pPr indent="0" marL="0">
+            <a:pPr marL="0" indent="0">
               <a:buNone/>
             </a:pPr>
             <a:r>
-              <a:rPr lang="en-US" sz="1050" b="1" spc="200" kern="0" dirty="0">
+              <a:rPr lang="en-US" sz="1050" b="1" kern="0" spc="200" dirty="0">
                 <a:solidFill>
                   <a:srgbClr val="6B7C86"/>
                 </a:solidFill>
@@ -7654,17 +8919,24 @@
           </a:solidFill>
           <a:ln/>
         </p:spPr>
+        <p:txBody>
+          <a:bodyPr/>
+          <a:lstStyle/>
+          <a:p>
+            <a:endParaRPr lang="en-US"/>
+          </a:p>
+        </p:txBody>
       </p:sp>
       <p:pic>
         <p:nvPicPr>
-          <p:cNvPr id="4" name="Image 0" descr="preencoded.png">    </p:cNvPr>
+          <p:cNvPr id="4" name="Image 0" descr="preencoded.png"/>
           <p:cNvPicPr>
             <a:picLocks noChangeAspect="1"/>
           </p:cNvPicPr>
           <p:nvPr/>
         </p:nvPicPr>
         <p:blipFill>
-          <a:blip r:embed="rId1"/>
+          <a:blip r:embed="rId3"/>
           <a:stretch>
             <a:fillRect/>
           </a:stretch>
@@ -7700,7 +8972,7 @@
           <a:bodyPr wrap="square" lIns="0" tIns="0" rIns="0" bIns="0" rtlCol="0" anchor="ctr"/>
           <a:lstStyle/>
           <a:p>
-            <a:pPr indent="0" marL="0">
+            <a:pPr marL="0" indent="0">
               <a:buNone/>
             </a:pPr>
             <a:r>
@@ -7737,6 +9009,13 @@
           </a:solidFill>
           <a:ln/>
         </p:spPr>
+        <p:txBody>
+          <a:bodyPr/>
+          <a:lstStyle/>
+          <a:p>
+            <a:endParaRPr lang="en-US"/>
+          </a:p>
+        </p:txBody>
       </p:sp>
       <p:sp>
         <p:nvSpPr>
@@ -7757,6 +9036,13 @@
           </a:solidFill>
           <a:ln/>
         </p:spPr>
+        <p:txBody>
+          <a:bodyPr/>
+          <a:lstStyle/>
+          <a:p>
+            <a:endParaRPr lang="en-US"/>
+          </a:p>
+        </p:txBody>
       </p:sp>
       <p:sp>
         <p:nvSpPr>
@@ -7779,11 +9065,11 @@
           <a:bodyPr wrap="square" lIns="0" tIns="0" rIns="0" bIns="0" rtlCol="0" anchor="ctr"/>
           <a:lstStyle/>
           <a:p>
-            <a:pPr indent="0" marL="0">
+            <a:pPr marL="0" indent="0">
               <a:buNone/>
             </a:pPr>
             <a:r>
-              <a:rPr lang="en-US" sz="1050" b="1" spc="100" kern="0" dirty="0">
+              <a:rPr lang="en-US" sz="1050" b="1" kern="0" spc="100" dirty="0">
                 <a:solidFill>
                   <a:srgbClr val="D97706"/>
                 </a:solidFill>
@@ -7793,9 +9079,6 @@
               </a:rPr>
               <a:t>TAKEAWAY   </a:t>
             </a:r>
-            <a:pPr indent="0" marL="0">
-              <a:buNone/>
-            </a:pPr>
             <a:r>
               <a:rPr lang="en-US" sz="1300" dirty="0">
                 <a:solidFill>
@@ -7833,6 +9116,13 @@
             <a:prstDash val="solid"/>
           </a:ln>
         </p:spPr>
+        <p:txBody>
+          <a:bodyPr/>
+          <a:lstStyle/>
+          <a:p>
+            <a:endParaRPr lang="en-US"/>
+          </a:p>
+        </p:txBody>
       </p:sp>
       <p:sp>
         <p:nvSpPr>
@@ -7855,7 +9145,7 @@
           <a:bodyPr wrap="square" lIns="0" tIns="0" rIns="0" bIns="0" rtlCol="0" anchor="ctr"/>
           <a:lstStyle/>
           <a:p>
-            <a:pPr indent="0" marL="0">
+            <a:pPr marL="0" indent="0">
               <a:buNone/>
             </a:pPr>
             <a:r>
@@ -7894,7 +9184,7 @@
           <a:bodyPr wrap="square" lIns="0" tIns="0" rIns="0" bIns="0" rtlCol="0" anchor="ctr"/>
           <a:lstStyle/>
           <a:p>
-            <a:pPr algn="r" indent="0" marL="0">
+            <a:pPr marL="0" indent="0" algn="r">
               <a:buNone/>
             </a:pPr>
             <a:r>
@@ -7934,6 +9224,13 @@
             <a:prstDash val="solid"/>
           </a:ln>
         </p:spPr>
+        <p:txBody>
+          <a:bodyPr/>
+          <a:lstStyle/>
+          <a:p>
+            <a:endParaRPr lang="en-US"/>
+          </a:p>
+        </p:txBody>
       </p:sp>
       <p:sp>
         <p:nvSpPr>
@@ -7959,6 +9256,13 @@
             <a:prstDash val="solid"/>
           </a:ln>
         </p:spPr>
+        <p:txBody>
+          <a:bodyPr/>
+          <a:lstStyle/>
+          <a:p>
+            <a:endParaRPr lang="en-US"/>
+          </a:p>
+        </p:txBody>
       </p:sp>
       <p:sp>
         <p:nvSpPr>
@@ -7981,7 +9285,7 @@
           <a:bodyPr wrap="square" lIns="0" tIns="0" rIns="0" bIns="0" rtlCol="0" anchor="ctr"/>
           <a:lstStyle/>
           <a:p>
-            <a:pPr algn="ctr" indent="0" marL="0">
+            <a:pPr marL="0" indent="0" algn="ctr">
               <a:buNone/>
             </a:pPr>
             <a:r>
@@ -8023,13 +9327,20 @@
             <a:prstDash val="solid"/>
           </a:ln>
           <a:effectLst>
-            <a:outerShdw sx="100000" sy="100000" kx="0" ky="0" algn="bl" rotWithShape="0" blurRad="88900" dist="38100" dir="8100000">
+            <a:outerShdw blurRad="88900" dist="38100" dir="8100000" algn="bl" rotWithShape="0">
               <a:srgbClr val="1C2440">
                 <a:alpha val="13000"/>
               </a:srgbClr>
             </a:outerShdw>
           </a:effectLst>
         </p:spPr>
+        <p:txBody>
+          <a:bodyPr/>
+          <a:lstStyle/>
+          <a:p>
+            <a:endParaRPr lang="en-US"/>
+          </a:p>
+        </p:txBody>
       </p:sp>
       <p:sp>
         <p:nvSpPr>
@@ -8052,7 +9363,7 @@
           <a:bodyPr wrap="square" lIns="0" tIns="0" rIns="0" bIns="0" rtlCol="0" anchor="t"/>
           <a:lstStyle/>
           <a:p>
-            <a:pPr algn="ctr" indent="0" marL="0">
+            <a:pPr marL="0" indent="0" algn="ctr">
               <a:buNone/>
             </a:pPr>
             <a:r>
@@ -8069,7 +9380,7 @@
             <a:endParaRPr lang="en-US" sz="1250" dirty="0"/>
           </a:p>
           <a:p>
-            <a:pPr algn="ctr" indent="0" marL="0">
+            <a:pPr marL="0" indent="0" algn="ctr">
               <a:buNone/>
             </a:pPr>
             <a:r>
@@ -8108,7 +9419,7 @@
           <a:bodyPr wrap="square" lIns="0" tIns="0" rIns="0" bIns="0" rtlCol="0" anchor="t"/>
           <a:lstStyle/>
           <a:p>
-            <a:pPr algn="ctr" indent="0" marL="0">
+            <a:pPr marL="0" indent="0" algn="ctr">
               <a:buNone/>
             </a:pPr>
             <a:r>
@@ -8150,6 +9461,13 @@
             <a:prstDash val="solid"/>
           </a:ln>
         </p:spPr>
+        <p:txBody>
+          <a:bodyPr/>
+          <a:lstStyle/>
+          <a:p>
+            <a:endParaRPr lang="en-US"/>
+          </a:p>
+        </p:txBody>
       </p:sp>
       <p:sp>
         <p:nvSpPr>
@@ -8172,7 +9490,7 @@
           <a:bodyPr wrap="square" lIns="0" tIns="0" rIns="0" bIns="0" rtlCol="0" anchor="ctr"/>
           <a:lstStyle/>
           <a:p>
-            <a:pPr algn="ctr" indent="0" marL="0">
+            <a:pPr marL="0" indent="0" algn="ctr">
               <a:buNone/>
             </a:pPr>
             <a:r>
@@ -8214,13 +9532,20 @@
             <a:prstDash val="solid"/>
           </a:ln>
           <a:effectLst>
-            <a:outerShdw sx="100000" sy="100000" kx="0" ky="0" algn="bl" rotWithShape="0" blurRad="88900" dist="38100" dir="8100000">
+            <a:outerShdw blurRad="88900" dist="38100" dir="8100000" algn="bl" rotWithShape="0">
               <a:srgbClr val="1C2440">
                 <a:alpha val="13000"/>
               </a:srgbClr>
             </a:outerShdw>
           </a:effectLst>
         </p:spPr>
+        <p:txBody>
+          <a:bodyPr/>
+          <a:lstStyle/>
+          <a:p>
+            <a:endParaRPr lang="en-US"/>
+          </a:p>
+        </p:txBody>
       </p:sp>
       <p:sp>
         <p:nvSpPr>
@@ -8243,7 +9568,7 @@
           <a:bodyPr wrap="square" lIns="0" tIns="0" rIns="0" bIns="0" rtlCol="0" anchor="t"/>
           <a:lstStyle/>
           <a:p>
-            <a:pPr algn="ctr" indent="0" marL="0">
+            <a:pPr marL="0" indent="0" algn="ctr">
               <a:buNone/>
             </a:pPr>
             <a:r>
@@ -8260,7 +9585,7 @@
             <a:endParaRPr lang="en-US" sz="1250" dirty="0"/>
           </a:p>
           <a:p>
-            <a:pPr algn="ctr" indent="0" marL="0">
+            <a:pPr marL="0" indent="0" algn="ctr">
               <a:buNone/>
             </a:pPr>
             <a:r>
@@ -8299,7 +9624,7 @@
           <a:bodyPr wrap="square" lIns="0" tIns="0" rIns="0" bIns="0" rtlCol="0" anchor="t"/>
           <a:lstStyle/>
           <a:p>
-            <a:pPr algn="ctr" indent="0" marL="0">
+            <a:pPr marL="0" indent="0" algn="ctr">
               <a:buNone/>
             </a:pPr>
             <a:r>
@@ -8341,6 +9666,13 @@
             <a:prstDash val="solid"/>
           </a:ln>
         </p:spPr>
+        <p:txBody>
+          <a:bodyPr/>
+          <a:lstStyle/>
+          <a:p>
+            <a:endParaRPr lang="en-US"/>
+          </a:p>
+        </p:txBody>
       </p:sp>
       <p:sp>
         <p:nvSpPr>
@@ -8363,7 +9695,7 @@
           <a:bodyPr wrap="square" lIns="0" tIns="0" rIns="0" bIns="0" rtlCol="0" anchor="ctr"/>
           <a:lstStyle/>
           <a:p>
-            <a:pPr algn="ctr" indent="0" marL="0">
+            <a:pPr marL="0" indent="0" algn="ctr">
               <a:buNone/>
             </a:pPr>
             <a:r>
@@ -8405,13 +9737,20 @@
             <a:prstDash val="solid"/>
           </a:ln>
           <a:effectLst>
-            <a:outerShdw sx="100000" sy="100000" kx="0" ky="0" algn="bl" rotWithShape="0" blurRad="88900" dist="38100" dir="8100000">
+            <a:outerShdw blurRad="88900" dist="38100" dir="8100000" algn="bl" rotWithShape="0">
               <a:srgbClr val="1C2440">
                 <a:alpha val="13000"/>
               </a:srgbClr>
             </a:outerShdw>
           </a:effectLst>
         </p:spPr>
+        <p:txBody>
+          <a:bodyPr/>
+          <a:lstStyle/>
+          <a:p>
+            <a:endParaRPr lang="en-US"/>
+          </a:p>
+        </p:txBody>
       </p:sp>
       <p:sp>
         <p:nvSpPr>
@@ -8434,7 +9773,7 @@
           <a:bodyPr wrap="square" lIns="0" tIns="0" rIns="0" bIns="0" rtlCol="0" anchor="t"/>
           <a:lstStyle/>
           <a:p>
-            <a:pPr algn="ctr" indent="0" marL="0">
+            <a:pPr marL="0" indent="0" algn="ctr">
               <a:buNone/>
             </a:pPr>
             <a:r>
@@ -8451,7 +9790,7 @@
             <a:endParaRPr lang="en-US" sz="1250" dirty="0"/>
           </a:p>
           <a:p>
-            <a:pPr algn="ctr" indent="0" marL="0">
+            <a:pPr marL="0" indent="0" algn="ctr">
               <a:buNone/>
             </a:pPr>
             <a:r>
@@ -8490,7 +9829,7 @@
           <a:bodyPr wrap="square" lIns="0" tIns="0" rIns="0" bIns="0" rtlCol="0" anchor="t"/>
           <a:lstStyle/>
           <a:p>
-            <a:pPr algn="ctr" indent="0" marL="0">
+            <a:pPr marL="0" indent="0" algn="ctr">
               <a:buNone/>
             </a:pPr>
             <a:r>
@@ -8532,6 +9871,13 @@
             <a:prstDash val="solid"/>
           </a:ln>
         </p:spPr>
+        <p:txBody>
+          <a:bodyPr/>
+          <a:lstStyle/>
+          <a:p>
+            <a:endParaRPr lang="en-US"/>
+          </a:p>
+        </p:txBody>
       </p:sp>
       <p:sp>
         <p:nvSpPr>
@@ -8554,7 +9900,7 @@
           <a:bodyPr wrap="square" lIns="0" tIns="0" rIns="0" bIns="0" rtlCol="0" anchor="ctr"/>
           <a:lstStyle/>
           <a:p>
-            <a:pPr algn="ctr" indent="0" marL="0">
+            <a:pPr marL="0" indent="0" algn="ctr">
               <a:buNone/>
             </a:pPr>
             <a:r>
@@ -8596,13 +9942,20 @@
             <a:prstDash val="solid"/>
           </a:ln>
           <a:effectLst>
-            <a:outerShdw sx="100000" sy="100000" kx="0" ky="0" algn="bl" rotWithShape="0" blurRad="88900" dist="38100" dir="8100000">
+            <a:outerShdw blurRad="88900" dist="38100" dir="8100000" algn="bl" rotWithShape="0">
               <a:srgbClr val="1C2440">
                 <a:alpha val="13000"/>
               </a:srgbClr>
             </a:outerShdw>
           </a:effectLst>
         </p:spPr>
+        <p:txBody>
+          <a:bodyPr/>
+          <a:lstStyle/>
+          <a:p>
+            <a:endParaRPr lang="en-US"/>
+          </a:p>
+        </p:txBody>
       </p:sp>
       <p:sp>
         <p:nvSpPr>
@@ -8625,7 +9978,7 @@
           <a:bodyPr wrap="square" lIns="0" tIns="0" rIns="0" bIns="0" rtlCol="0" anchor="t"/>
           <a:lstStyle/>
           <a:p>
-            <a:pPr algn="ctr" indent="0" marL="0">
+            <a:pPr marL="0" indent="0" algn="ctr">
               <a:buNone/>
             </a:pPr>
             <a:r>
@@ -8642,7 +9995,7 @@
             <a:endParaRPr lang="en-US" sz="1250" dirty="0"/>
           </a:p>
           <a:p>
-            <a:pPr algn="ctr" indent="0" marL="0">
+            <a:pPr marL="0" indent="0" algn="ctr">
               <a:buNone/>
             </a:pPr>
             <a:r>
@@ -8681,7 +10034,7 @@
           <a:bodyPr wrap="square" lIns="0" tIns="0" rIns="0" bIns="0" rtlCol="0" anchor="t"/>
           <a:lstStyle/>
           <a:p>
-            <a:pPr algn="ctr" indent="0" marL="0">
+            <a:pPr marL="0" indent="0" algn="ctr">
               <a:buNone/>
             </a:pPr>
             <a:r>
@@ -8718,6 +10071,13 @@
           </a:solidFill>
           <a:ln/>
         </p:spPr>
+        <p:txBody>
+          <a:bodyPr/>
+          <a:lstStyle/>
+          <a:p>
+            <a:endParaRPr lang="en-US"/>
+          </a:p>
+        </p:txBody>
       </p:sp>
       <p:sp>
         <p:nvSpPr>
@@ -8738,6 +10098,13 @@
           </a:solidFill>
           <a:ln/>
         </p:spPr>
+        <p:txBody>
+          <a:bodyPr/>
+          <a:lstStyle/>
+          <a:p>
+            <a:endParaRPr lang="en-US"/>
+          </a:p>
+        </p:txBody>
       </p:sp>
       <p:sp>
         <p:nvSpPr>
@@ -8760,11 +10127,11 @@
           <a:bodyPr wrap="square" lIns="0" tIns="0" rIns="0" bIns="0" rtlCol="0" anchor="ctr"/>
           <a:lstStyle/>
           <a:p>
-            <a:pPr indent="0" marL="0">
+            <a:pPr marL="0" indent="0">
               <a:buNone/>
             </a:pPr>
             <a:r>
-              <a:rPr lang="en-US" sz="1050" b="1" spc="100" kern="0" dirty="0">
+              <a:rPr lang="en-US" sz="1050" b="1" kern="0" spc="100" dirty="0">
                 <a:solidFill>
                   <a:srgbClr val="D97706"/>
                 </a:solidFill>
@@ -8774,9 +10141,6 @@
               </a:rPr>
               <a:t>ZONE CHOICE   </a:t>
             </a:r>
-            <a:pPr indent="0" marL="0">
-              <a:buNone/>
-            </a:pPr>
             <a:r>
               <a:rPr lang="en-US" sz="1200" dirty="0">
                 <a:solidFill>
@@ -8808,6 +10172,7 @@
         <a:solidFill>
           <a:srgbClr val="FFFFFF"/>
         </a:solidFill>
+        <a:effectLst/>
       </p:bgPr>
     </p:bg>
     <p:spTree>
@@ -8845,11 +10210,11 @@
           <a:bodyPr wrap="square" lIns="0" tIns="0" rIns="0" bIns="0" rtlCol="0" anchor="ctr"/>
           <a:lstStyle/>
           <a:p>
-            <a:pPr indent="0" marL="0">
+            <a:pPr marL="0" indent="0">
               <a:buNone/>
             </a:pPr>
             <a:r>
-              <a:rPr lang="en-US" sz="1050" b="1" spc="200" kern="0" dirty="0">
+              <a:rPr lang="en-US" sz="1050" b="1" kern="0" spc="200" dirty="0">
                 <a:solidFill>
                   <a:srgbClr val="6B7C86"/>
                 </a:solidFill>
@@ -8882,17 +10247,24 @@
           </a:solidFill>
           <a:ln/>
         </p:spPr>
+        <p:txBody>
+          <a:bodyPr/>
+          <a:lstStyle/>
+          <a:p>
+            <a:endParaRPr lang="en-US"/>
+          </a:p>
+        </p:txBody>
       </p:sp>
       <p:pic>
         <p:nvPicPr>
-          <p:cNvPr id="4" name="Image 0" descr="preencoded.png">    </p:cNvPr>
+          <p:cNvPr id="4" name="Image 0" descr="preencoded.png"/>
           <p:cNvPicPr>
             <a:picLocks noChangeAspect="1"/>
           </p:cNvPicPr>
           <p:nvPr/>
         </p:nvPicPr>
         <p:blipFill>
-          <a:blip r:embed="rId1"/>
+          <a:blip r:embed="rId3"/>
           <a:stretch>
             <a:fillRect/>
           </a:stretch>
@@ -8928,7 +10300,7 @@
           <a:bodyPr wrap="square" lIns="0" tIns="0" rIns="0" bIns="0" rtlCol="0" anchor="ctr"/>
           <a:lstStyle/>
           <a:p>
-            <a:pPr indent="0" marL="0">
+            <a:pPr marL="0" indent="0">
               <a:buNone/>
             </a:pPr>
             <a:r>
@@ -8965,6 +10337,13 @@
           </a:solidFill>
           <a:ln/>
         </p:spPr>
+        <p:txBody>
+          <a:bodyPr/>
+          <a:lstStyle/>
+          <a:p>
+            <a:endParaRPr lang="en-US"/>
+          </a:p>
+        </p:txBody>
       </p:sp>
       <p:sp>
         <p:nvSpPr>
@@ -8985,6 +10364,13 @@
           </a:solidFill>
           <a:ln/>
         </p:spPr>
+        <p:txBody>
+          <a:bodyPr/>
+          <a:lstStyle/>
+          <a:p>
+            <a:endParaRPr lang="en-US"/>
+          </a:p>
+        </p:txBody>
       </p:sp>
       <p:sp>
         <p:nvSpPr>
@@ -9007,11 +10393,11 @@
           <a:bodyPr wrap="square" lIns="0" tIns="0" rIns="0" bIns="0" rtlCol="0" anchor="ctr"/>
           <a:lstStyle/>
           <a:p>
-            <a:pPr indent="0" marL="0">
+            <a:pPr marL="0" indent="0">
               <a:buNone/>
             </a:pPr>
             <a:r>
-              <a:rPr lang="en-US" sz="1050" b="1" spc="100" kern="0" dirty="0">
+              <a:rPr lang="en-US" sz="1050" b="1" kern="0" spc="100" dirty="0">
                 <a:solidFill>
                   <a:srgbClr val="D97706"/>
                 </a:solidFill>
@@ -9021,9 +10407,6 @@
               </a:rPr>
               <a:t>TAKEAWAY   </a:t>
             </a:r>
-            <a:pPr indent="0" marL="0">
-              <a:buNone/>
-            </a:pPr>
             <a:r>
               <a:rPr lang="en-US" sz="1300" dirty="0">
                 <a:solidFill>
@@ -9061,6 +10444,13 @@
             <a:prstDash val="solid"/>
           </a:ln>
         </p:spPr>
+        <p:txBody>
+          <a:bodyPr/>
+          <a:lstStyle/>
+          <a:p>
+            <a:endParaRPr lang="en-US"/>
+          </a:p>
+        </p:txBody>
       </p:sp>
       <p:sp>
         <p:nvSpPr>
@@ -9083,7 +10473,7 @@
           <a:bodyPr wrap="square" lIns="0" tIns="0" rIns="0" bIns="0" rtlCol="0" anchor="ctr"/>
           <a:lstStyle/>
           <a:p>
-            <a:pPr indent="0" marL="0">
+            <a:pPr marL="0" indent="0">
               <a:buNone/>
             </a:pPr>
             <a:r>
@@ -9122,7 +10512,7 @@
           <a:bodyPr wrap="square" lIns="0" tIns="0" rIns="0" bIns="0" rtlCol="0" anchor="ctr"/>
           <a:lstStyle/>
           <a:p>
-            <a:pPr algn="r" indent="0" marL="0">
+            <a:pPr marL="0" indent="0" algn="r">
               <a:buNone/>
             </a:pPr>
             <a:r>
@@ -9156,15 +10546,27 @@
         </p:nvGraphicFramePr>
         <p:xfrm>
           <a:off x="566928" y="2395728"/>
-          <a:ext cx="11055096" cy="914400"/>
+          <a:ext cx="11055096" cy="2020824"/>
         </p:xfrm>
         <a:graphic>
           <a:graphicData uri="http://schemas.openxmlformats.org/drawingml/2006/table">
             <a:tbl>
               <a:tblPr/>
               <a:tblGrid>
-                <a:gridCol w="3749040"/>
-                <a:gridCol w="7306056"/>
+                <a:gridCol w="3749040">
+                  <a:extLst>
+                    <a:ext uri="{9D8B030D-6E8A-4147-A177-3AD203B41FA5}">
+                      <a16:colId xmlns:a16="http://schemas.microsoft.com/office/drawing/2014/main" val="20000"/>
+                    </a:ext>
+                  </a:extLst>
+                </a:gridCol>
+                <a:gridCol w="7306056">
+                  <a:extLst>
+                    <a:ext uri="{9D8B030D-6E8A-4147-A177-3AD203B41FA5}">
+                      <a16:colId xmlns:a16="http://schemas.microsoft.com/office/drawing/2014/main" val="20001"/>
+                    </a:ext>
+                  </a:extLst>
+                </a:gridCol>
               </a:tblGrid>
               <a:tr h="329184">
                 <a:tc>
@@ -9172,11 +10574,11 @@
                     <a:bodyPr/>
                     <a:lstStyle/>
                     <a:p>
-                      <a:pPr indent="0" marL="0">
+                      <a:pPr marL="0" indent="0">
                         <a:buNone/>
                       </a:pPr>
                       <a:r>
-                        <a:rPr lang="en-US" sz="1100" b="1" spc="100" kern="0" dirty="0">
+                        <a:rPr lang="en-US" sz="1100" b="1" kern="0" spc="100" dirty="0">
                           <a:solidFill>
                             <a:srgbClr val="FFFFFF"/>
                           </a:solidFill>
@@ -9233,11 +10635,11 @@
                     <a:bodyPr/>
                     <a:lstStyle/>
                     <a:p>
-                      <a:pPr indent="0" marL="0">
+                      <a:pPr marL="0" indent="0">
                         <a:buNone/>
                       </a:pPr>
                       <a:r>
-                        <a:rPr lang="en-US" sz="1100" b="1" spc="100" kern="0" dirty="0">
+                        <a:rPr lang="en-US" sz="1100" b="1" kern="0" spc="100" dirty="0">
                           <a:solidFill>
                             <a:srgbClr val="0F1F2B"/>
                           </a:solidFill>
@@ -9289,6 +10691,11 @@
                     </a:solidFill>
                   </a:tcPr>
                 </a:tc>
+                <a:extLst>
+                  <a:ext uri="{0D108BD9-81ED-4DB2-BD59-A6C34878D82A}">
+                    <a16:rowId xmlns:a16="http://schemas.microsoft.com/office/drawing/2014/main" val="10000"/>
+                  </a:ext>
+                </a:extLst>
               </a:tr>
               <a:tr h="338328">
                 <a:tc>
@@ -9296,7 +10703,7 @@
                     <a:bodyPr/>
                     <a:lstStyle/>
                     <a:p>
-                      <a:pPr indent="0" marL="0">
+                      <a:pPr marL="0" indent="0">
                         <a:buNone/>
                       </a:pPr>
                       <a:r>
@@ -9357,7 +10764,7 @@
                     <a:bodyPr/>
                     <a:lstStyle/>
                     <a:p>
-                      <a:pPr indent="0" marL="0">
+                      <a:pPr marL="0" indent="0">
                         <a:buNone/>
                       </a:pPr>
                       <a:r>
@@ -9413,6 +10820,11 @@
                     </a:solidFill>
                   </a:tcPr>
                 </a:tc>
+                <a:extLst>
+                  <a:ext uri="{0D108BD9-81ED-4DB2-BD59-A6C34878D82A}">
+                    <a16:rowId xmlns:a16="http://schemas.microsoft.com/office/drawing/2014/main" val="10001"/>
+                  </a:ext>
+                </a:extLst>
               </a:tr>
               <a:tr h="338328">
                 <a:tc>
@@ -9420,7 +10832,7 @@
                     <a:bodyPr/>
                     <a:lstStyle/>
                     <a:p>
-                      <a:pPr indent="0" marL="0">
+                      <a:pPr marL="0" indent="0">
                         <a:buNone/>
                       </a:pPr>
                       <a:r>
@@ -9481,7 +10893,7 @@
                     <a:bodyPr/>
                     <a:lstStyle/>
                     <a:p>
-                      <a:pPr indent="0" marL="0">
+                      <a:pPr marL="0" indent="0">
                         <a:buNone/>
                       </a:pPr>
                       <a:r>
@@ -9537,6 +10949,11 @@
                     </a:solidFill>
                   </a:tcPr>
                 </a:tc>
+                <a:extLst>
+                  <a:ext uri="{0D108BD9-81ED-4DB2-BD59-A6C34878D82A}">
+                    <a16:rowId xmlns:a16="http://schemas.microsoft.com/office/drawing/2014/main" val="10002"/>
+                  </a:ext>
+                </a:extLst>
               </a:tr>
               <a:tr h="338328">
                 <a:tc>
@@ -9544,7 +10961,7 @@
                     <a:bodyPr/>
                     <a:lstStyle/>
                     <a:p>
-                      <a:pPr indent="0" marL="0">
+                      <a:pPr marL="0" indent="0">
                         <a:buNone/>
                       </a:pPr>
                       <a:r>
@@ -9605,7 +11022,7 @@
                     <a:bodyPr/>
                     <a:lstStyle/>
                     <a:p>
-                      <a:pPr indent="0" marL="0">
+                      <a:pPr marL="0" indent="0">
                         <a:buNone/>
                       </a:pPr>
                       <a:r>
@@ -9661,6 +11078,11 @@
                     </a:solidFill>
                   </a:tcPr>
                 </a:tc>
+                <a:extLst>
+                  <a:ext uri="{0D108BD9-81ED-4DB2-BD59-A6C34878D82A}">
+                    <a16:rowId xmlns:a16="http://schemas.microsoft.com/office/drawing/2014/main" val="10003"/>
+                  </a:ext>
+                </a:extLst>
               </a:tr>
               <a:tr h="338328">
                 <a:tc>
@@ -9668,7 +11090,7 @@
                     <a:bodyPr/>
                     <a:lstStyle/>
                     <a:p>
-                      <a:pPr indent="0" marL="0">
+                      <a:pPr marL="0" indent="0">
                         <a:buNone/>
                       </a:pPr>
                       <a:r>
@@ -9729,7 +11151,7 @@
                     <a:bodyPr/>
                     <a:lstStyle/>
                     <a:p>
-                      <a:pPr indent="0" marL="0">
+                      <a:pPr marL="0" indent="0">
                         <a:buNone/>
                       </a:pPr>
                       <a:r>
@@ -9785,6 +11207,11 @@
                     </a:solidFill>
                   </a:tcPr>
                 </a:tc>
+                <a:extLst>
+                  <a:ext uri="{0D108BD9-81ED-4DB2-BD59-A6C34878D82A}">
+                    <a16:rowId xmlns:a16="http://schemas.microsoft.com/office/drawing/2014/main" val="10004"/>
+                  </a:ext>
+                </a:extLst>
               </a:tr>
               <a:tr h="338328">
                 <a:tc>
@@ -9792,7 +11219,7 @@
                     <a:bodyPr/>
                     <a:lstStyle/>
                     <a:p>
-                      <a:pPr indent="0" marL="0">
+                      <a:pPr marL="0" indent="0">
                         <a:buNone/>
                       </a:pPr>
                       <a:r>
@@ -9853,7 +11280,7 @@
                     <a:bodyPr/>
                     <a:lstStyle/>
                     <a:p>
-                      <a:pPr indent="0" marL="0">
+                      <a:pPr marL="0" indent="0">
                         <a:buNone/>
                       </a:pPr>
                       <a:r>
@@ -9909,6 +11336,11 @@
                     </a:solidFill>
                   </a:tcPr>
                 </a:tc>
+                <a:extLst>
+                  <a:ext uri="{0D108BD9-81ED-4DB2-BD59-A6C34878D82A}">
+                    <a16:rowId xmlns:a16="http://schemas.microsoft.com/office/drawing/2014/main" val="10005"/>
+                  </a:ext>
+                </a:extLst>
               </a:tr>
             </a:tbl>
           </a:graphicData>
@@ -9933,6 +11365,13 @@
           </a:solidFill>
           <a:ln/>
         </p:spPr>
+        <p:txBody>
+          <a:bodyPr/>
+          <a:lstStyle/>
+          <a:p>
+            <a:endParaRPr lang="en-US"/>
+          </a:p>
+        </p:txBody>
       </p:sp>
       <p:sp>
         <p:nvSpPr>
@@ -9953,6 +11392,13 @@
           </a:solidFill>
           <a:ln/>
         </p:spPr>
+        <p:txBody>
+          <a:bodyPr/>
+          <a:lstStyle/>
+          <a:p>
+            <a:endParaRPr lang="en-US"/>
+          </a:p>
+        </p:txBody>
       </p:sp>
       <p:sp>
         <p:nvSpPr>
@@ -9975,11 +11421,11 @@
           <a:bodyPr wrap="square" lIns="0" tIns="0" rIns="0" bIns="0" rtlCol="0" anchor="ctr"/>
           <a:lstStyle/>
           <a:p>
-            <a:pPr indent="0" marL="0">
+            <a:pPr marL="0" indent="0">
               <a:buNone/>
             </a:pPr>
             <a:r>
-              <a:rPr lang="en-US" sz="1050" b="1" spc="100" kern="0" dirty="0">
+              <a:rPr lang="en-US" sz="1050" b="1" kern="0" spc="100" dirty="0">
                 <a:solidFill>
                   <a:srgbClr val="D97706"/>
                 </a:solidFill>
@@ -9989,9 +11435,6 @@
               </a:rPr>
               <a:t>TRAINING   </a:t>
             </a:r>
-            <a:pPr indent="0" marL="0">
-              <a:buNone/>
-            </a:pPr>
             <a:r>
               <a:rPr lang="en-US" sz="1200" dirty="0">
                 <a:solidFill>
@@ -10023,6 +11466,7 @@
         <a:solidFill>
           <a:srgbClr val="0F1F2B"/>
         </a:solidFill>
+        <a:effectLst/>
       </p:bgPr>
     </p:bg>
     <p:spTree>
@@ -10060,11 +11504,11 @@
           <a:bodyPr wrap="square" lIns="0" tIns="0" rIns="0" bIns="0" rtlCol="0" anchor="ctr"/>
           <a:lstStyle/>
           <a:p>
-            <a:pPr indent="0" marL="0">
+            <a:pPr marL="0" indent="0">
               <a:buNone/>
             </a:pPr>
             <a:r>
-              <a:rPr lang="en-US" sz="1050" b="1" spc="200" kern="0" dirty="0">
+              <a:rPr lang="en-US" sz="1050" b="1" kern="0" spc="200" dirty="0">
                 <a:solidFill>
                   <a:srgbClr val="D97706"/>
                 </a:solidFill>
@@ -10097,17 +11541,24 @@
           </a:solidFill>
           <a:ln/>
         </p:spPr>
+        <p:txBody>
+          <a:bodyPr/>
+          <a:lstStyle/>
+          <a:p>
+            <a:endParaRPr lang="en-US"/>
+          </a:p>
+        </p:txBody>
       </p:sp>
       <p:pic>
         <p:nvPicPr>
-          <p:cNvPr id="4" name="Image 0" descr="preencoded.png">    </p:cNvPr>
+          <p:cNvPr id="4" name="Image 0" descr="preencoded.png"/>
           <p:cNvPicPr>
             <a:picLocks noChangeAspect="1"/>
           </p:cNvPicPr>
           <p:nvPr/>
         </p:nvPicPr>
         <p:blipFill>
-          <a:blip r:embed="rId1"/>
+          <a:blip r:embed="rId3"/>
           <a:stretch>
             <a:fillRect/>
           </a:stretch>
@@ -10143,7 +11594,7 @@
           <a:bodyPr wrap="square" lIns="0" tIns="0" rIns="0" bIns="0" rtlCol="0" anchor="ctr"/>
           <a:lstStyle/>
           <a:p>
-            <a:pPr indent="0" marL="0">
+            <a:pPr marL="0" indent="0">
               <a:buNone/>
             </a:pPr>
             <a:r>
@@ -10182,7 +11633,7 @@
           <a:bodyPr wrap="square" lIns="0" tIns="0" rIns="0" bIns="0" rtlCol="0" anchor="ctr"/>
           <a:lstStyle/>
           <a:p>
-            <a:pPr indent="0" marL="0">
+            <a:pPr marL="0" indent="0">
               <a:buNone/>
             </a:pPr>
             <a:r>
@@ -10219,6 +11670,13 @@
           </a:solidFill>
           <a:ln/>
         </p:spPr>
+        <p:txBody>
+          <a:bodyPr/>
+          <a:lstStyle/>
+          <a:p>
+            <a:endParaRPr lang="en-US"/>
+          </a:p>
+        </p:txBody>
       </p:sp>
       <p:sp>
         <p:nvSpPr>
@@ -10239,6 +11697,13 @@
           </a:solidFill>
           <a:ln/>
         </p:spPr>
+        <p:txBody>
+          <a:bodyPr/>
+          <a:lstStyle/>
+          <a:p>
+            <a:endParaRPr lang="en-US"/>
+          </a:p>
+        </p:txBody>
       </p:sp>
       <p:sp>
         <p:nvSpPr>
@@ -10261,7 +11726,7 @@
           <a:bodyPr wrap="square" lIns="0" tIns="0" rIns="0" bIns="0" rtlCol="0" anchor="ctr"/>
           <a:lstStyle/>
           <a:p>
-            <a:pPr indent="0" marL="0">
+            <a:pPr marL="0" indent="0">
               <a:buNone/>
             </a:pPr>
             <a:r>
@@ -10275,9 +11740,6 @@
               </a:rPr>
               <a:t>1.  Name the pilot zone.   </a:t>
             </a:r>
-            <a:pPr indent="0" marL="0">
-              <a:buNone/>
-            </a:pPr>
             <a:r>
               <a:rPr lang="en-US" sz="1250" dirty="0">
                 <a:solidFill>
@@ -10312,6 +11774,13 @@
           </a:solidFill>
           <a:ln/>
         </p:spPr>
+        <p:txBody>
+          <a:bodyPr/>
+          <a:lstStyle/>
+          <a:p>
+            <a:endParaRPr lang="en-US"/>
+          </a:p>
+        </p:txBody>
       </p:sp>
       <p:sp>
         <p:nvSpPr>
@@ -10332,6 +11801,13 @@
           </a:solidFill>
           <a:ln/>
         </p:spPr>
+        <p:txBody>
+          <a:bodyPr/>
+          <a:lstStyle/>
+          <a:p>
+            <a:endParaRPr lang="en-US"/>
+          </a:p>
+        </p:txBody>
       </p:sp>
       <p:sp>
         <p:nvSpPr>
@@ -10354,7 +11830,7 @@
           <a:bodyPr wrap="square" lIns="0" tIns="0" rIns="0" bIns="0" rtlCol="0" anchor="ctr"/>
           <a:lstStyle/>
           <a:p>
-            <a:pPr indent="0" marL="0">
+            <a:pPr marL="0" indent="0">
               <a:buNone/>
             </a:pPr>
             <a:r>
@@ -10368,9 +11844,6 @@
               </a:rPr>
               <a:t>2.  Nominate one traffic planner as the owner.   </a:t>
             </a:r>
-            <a:pPr indent="0" marL="0">
-              <a:buNone/>
-            </a:pPr>
             <a:r>
               <a:rPr lang="en-US" sz="1250" dirty="0">
                 <a:solidFill>
@@ -10405,6 +11878,13 @@
           </a:solidFill>
           <a:ln/>
         </p:spPr>
+        <p:txBody>
+          <a:bodyPr/>
+          <a:lstStyle/>
+          <a:p>
+            <a:endParaRPr lang="en-US"/>
+          </a:p>
+        </p:txBody>
       </p:sp>
       <p:sp>
         <p:nvSpPr>
@@ -10425,6 +11905,13 @@
           </a:solidFill>
           <a:ln/>
         </p:spPr>
+        <p:txBody>
+          <a:bodyPr/>
+          <a:lstStyle/>
+          <a:p>
+            <a:endParaRPr lang="en-US"/>
+          </a:p>
+        </p:txBody>
       </p:sp>
       <p:sp>
         <p:nvSpPr>
@@ -10447,7 +11934,7 @@
           <a:bodyPr wrap="square" lIns="0" tIns="0" rIns="0" bIns="0" rtlCol="0" anchor="ctr"/>
           <a:lstStyle/>
           <a:p>
-            <a:pPr indent="0" marL="0">
+            <a:pPr marL="0" indent="0">
               <a:buNone/>
             </a:pPr>
             <a:r>
@@ -10461,9 +11948,6 @@
               </a:rPr>
               <a:t>3.  Approve read-only access.   </a:t>
             </a:r>
-            <a:pPr indent="0" marL="0">
-              <a:buNone/>
-            </a:pPr>
             <a:r>
               <a:rPr lang="en-US" sz="1250" dirty="0">
                 <a:solidFill>
@@ -10498,6 +11982,13 @@
           </a:solidFill>
           <a:ln/>
         </p:spPr>
+        <p:txBody>
+          <a:bodyPr/>
+          <a:lstStyle/>
+          <a:p>
+            <a:endParaRPr lang="en-US"/>
+          </a:p>
+        </p:txBody>
       </p:sp>
       <p:sp>
         <p:nvSpPr>
@@ -10518,6 +12009,13 @@
           </a:solidFill>
           <a:ln/>
         </p:spPr>
+        <p:txBody>
+          <a:bodyPr/>
+          <a:lstStyle/>
+          <a:p>
+            <a:endParaRPr lang="en-US"/>
+          </a:p>
+        </p:txBody>
       </p:sp>
       <p:sp>
         <p:nvSpPr>
@@ -10540,11 +12038,11 @@
           <a:bodyPr wrap="square" lIns="0" tIns="0" rIns="0" bIns="0" rtlCol="0" anchor="ctr"/>
           <a:lstStyle/>
           <a:p>
-            <a:pPr indent="0" marL="0">
+            <a:pPr marL="0" indent="0">
               <a:buNone/>
             </a:pPr>
             <a:r>
-              <a:rPr lang="en-US" sz="1100" b="1" spc="100" kern="0" dirty="0">
+              <a:rPr lang="en-US" sz="1100" b="1" kern="0" spc="100" dirty="0">
                 <a:solidFill>
                   <a:srgbClr val="D97706"/>
                 </a:solidFill>
@@ -10554,9 +12052,6 @@
               </a:rPr>
               <a:t>DECISION NEEDED BY   </a:t>
             </a:r>
-            <a:pPr indent="0" marL="0">
-              <a:buNone/>
-            </a:pPr>
             <a:r>
               <a:rPr lang="en-US" sz="1250" dirty="0">
                 <a:solidFill>
@@ -10588,6 +12083,7 @@
         <a:solidFill>
           <a:srgbClr val="FFFFFF"/>
         </a:solidFill>
+        <a:effectLst/>
       </p:bgPr>
     </p:bg>
     <p:spTree>
@@ -10625,11 +12121,11 @@
           <a:bodyPr wrap="square" lIns="0" tIns="0" rIns="0" bIns="0" rtlCol="0" anchor="ctr"/>
           <a:lstStyle/>
           <a:p>
-            <a:pPr indent="0" marL="0">
+            <a:pPr marL="0" indent="0">
               <a:buNone/>
             </a:pPr>
             <a:r>
-              <a:rPr lang="en-US" sz="1050" b="1" spc="200" kern="0" dirty="0">
+              <a:rPr lang="en-US" sz="1050" b="1" kern="0" spc="200" dirty="0">
                 <a:solidFill>
                   <a:srgbClr val="6B7C86"/>
                 </a:solidFill>
@@ -10662,17 +12158,24 @@
           </a:solidFill>
           <a:ln/>
         </p:spPr>
+        <p:txBody>
+          <a:bodyPr/>
+          <a:lstStyle/>
+          <a:p>
+            <a:endParaRPr lang="en-US"/>
+          </a:p>
+        </p:txBody>
       </p:sp>
       <p:pic>
         <p:nvPicPr>
-          <p:cNvPr id="4" name="Image 0" descr="preencoded.png">    </p:cNvPr>
+          <p:cNvPr id="4" name="Image 0" descr="preencoded.png"/>
           <p:cNvPicPr>
             <a:picLocks noChangeAspect="1"/>
           </p:cNvPicPr>
           <p:nvPr/>
         </p:nvPicPr>
         <p:blipFill>
-          <a:blip r:embed="rId1"/>
+          <a:blip r:embed="rId3"/>
           <a:stretch>
             <a:fillRect/>
           </a:stretch>
@@ -10708,7 +12211,7 @@
           <a:bodyPr wrap="square" lIns="0" tIns="0" rIns="0" bIns="0" rtlCol="0" anchor="ctr"/>
           <a:lstStyle/>
           <a:p>
-            <a:pPr indent="0" marL="0">
+            <a:pPr marL="0" indent="0">
               <a:buNone/>
             </a:pPr>
             <a:r>
@@ -10745,6 +12248,13 @@
           </a:solidFill>
           <a:ln/>
         </p:spPr>
+        <p:txBody>
+          <a:bodyPr/>
+          <a:lstStyle/>
+          <a:p>
+            <a:endParaRPr lang="en-US"/>
+          </a:p>
+        </p:txBody>
       </p:sp>
       <p:sp>
         <p:nvSpPr>
@@ -10765,6 +12275,13 @@
           </a:solidFill>
           <a:ln/>
         </p:spPr>
+        <p:txBody>
+          <a:bodyPr/>
+          <a:lstStyle/>
+          <a:p>
+            <a:endParaRPr lang="en-US"/>
+          </a:p>
+        </p:txBody>
       </p:sp>
       <p:sp>
         <p:nvSpPr>
@@ -10787,11 +12304,11 @@
           <a:bodyPr wrap="square" lIns="0" tIns="0" rIns="0" bIns="0" rtlCol="0" anchor="ctr"/>
           <a:lstStyle/>
           <a:p>
-            <a:pPr indent="0" marL="0">
+            <a:pPr marL="0" indent="0">
               <a:buNone/>
             </a:pPr>
             <a:r>
-              <a:rPr lang="en-US" sz="1050" b="1" spc="100" kern="0" dirty="0">
+              <a:rPr lang="en-US" sz="1050" b="1" kern="0" spc="100" dirty="0">
                 <a:solidFill>
                   <a:srgbClr val="D97706"/>
                 </a:solidFill>
@@ -10801,9 +12318,6 @@
               </a:rPr>
               <a:t>TAKEAWAY   </a:t>
             </a:r>
-            <a:pPr indent="0" marL="0">
-              <a:buNone/>
-            </a:pPr>
             <a:r>
               <a:rPr lang="en-US" sz="1300" dirty="0">
                 <a:solidFill>
@@ -10841,6 +12355,13 @@
             <a:prstDash val="solid"/>
           </a:ln>
         </p:spPr>
+        <p:txBody>
+          <a:bodyPr/>
+          <a:lstStyle/>
+          <a:p>
+            <a:endParaRPr lang="en-US"/>
+          </a:p>
+        </p:txBody>
       </p:sp>
       <p:sp>
         <p:nvSpPr>
@@ -10863,7 +12384,7 @@
           <a:bodyPr wrap="square" lIns="0" tIns="0" rIns="0" bIns="0" rtlCol="0" anchor="ctr"/>
           <a:lstStyle/>
           <a:p>
-            <a:pPr indent="0" marL="0">
+            <a:pPr marL="0" indent="0">
               <a:buNone/>
             </a:pPr>
             <a:r>
@@ -10902,7 +12423,7 @@
           <a:bodyPr wrap="square" lIns="0" tIns="0" rIns="0" bIns="0" rtlCol="0" anchor="ctr"/>
           <a:lstStyle/>
           <a:p>
-            <a:pPr algn="r" indent="0" marL="0">
+            <a:pPr marL="0" indent="0" algn="r">
               <a:buNone/>
             </a:pPr>
             <a:r>
@@ -10941,11 +12462,11 @@
           <a:bodyPr wrap="square" lIns="0" tIns="0" rIns="0" bIns="0" rtlCol="0" anchor="ctr"/>
           <a:lstStyle/>
           <a:p>
-            <a:pPr indent="0" marL="0">
+            <a:pPr marL="0" indent="0">
               <a:buNone/>
             </a:pPr>
             <a:r>
-              <a:rPr lang="en-US" sz="850" b="1" spc="120" kern="0" dirty="0">
+              <a:rPr lang="en-US" sz="850" b="1" kern="0" spc="120" dirty="0">
                 <a:solidFill>
                   <a:srgbClr val="6B7C86"/>
                 </a:solidFill>
@@ -10980,11 +12501,11 @@
           <a:bodyPr wrap="square" lIns="0" tIns="0" rIns="0" bIns="0" rtlCol="0" anchor="ctr"/>
           <a:lstStyle/>
           <a:p>
-            <a:pPr indent="0" marL="0">
+            <a:pPr marL="0" indent="0">
               <a:buNone/>
             </a:pPr>
             <a:r>
-              <a:rPr lang="en-US" sz="850" b="1" spc="120" kern="0" dirty="0">
+              <a:rPr lang="en-US" sz="850" b="1" kern="0" spc="120" dirty="0">
                 <a:solidFill>
                   <a:srgbClr val="6B7C86"/>
                 </a:solidFill>
@@ -11024,6 +12545,13 @@
             <a:prstDash val="solid"/>
           </a:ln>
         </p:spPr>
+        <p:txBody>
+          <a:bodyPr/>
+          <a:lstStyle/>
+          <a:p>
+            <a:endParaRPr lang="en-US"/>
+          </a:p>
+        </p:txBody>
       </p:sp>
       <p:sp>
         <p:nvSpPr>
@@ -11046,7 +12574,7 @@
           <a:bodyPr wrap="square" lIns="0" tIns="0" rIns="0" bIns="0" rtlCol="0" anchor="ctr"/>
           <a:lstStyle/>
           <a:p>
-            <a:pPr algn="ctr" indent="0" marL="0">
+            <a:pPr marL="0" indent="0" algn="ctr">
               <a:buNone/>
             </a:pPr>
             <a:r>
@@ -11090,6 +12618,13 @@
             <a:prstDash val="solid"/>
           </a:ln>
         </p:spPr>
+        <p:txBody>
+          <a:bodyPr/>
+          <a:lstStyle/>
+          <a:p>
+            <a:endParaRPr lang="en-US"/>
+          </a:p>
+        </p:txBody>
       </p:sp>
       <p:sp>
         <p:nvSpPr>
@@ -11112,7 +12647,7 @@
           <a:bodyPr wrap="square" lIns="0" tIns="0" rIns="0" bIns="0" rtlCol="0" anchor="ctr"/>
           <a:lstStyle/>
           <a:p>
-            <a:pPr algn="ctr" indent="0" marL="0">
+            <a:pPr marL="0" indent="0" algn="ctr">
               <a:buNone/>
             </a:pPr>
             <a:r>
@@ -11149,6 +12684,13 @@
           </a:solidFill>
           <a:ln/>
         </p:spPr>
+        <p:txBody>
+          <a:bodyPr/>
+          <a:lstStyle/>
+          <a:p>
+            <a:endParaRPr lang="en-US"/>
+          </a:p>
+        </p:txBody>
       </p:sp>
       <p:sp>
         <p:nvSpPr>
@@ -11169,6 +12711,13 @@
           </a:solidFill>
           <a:ln/>
         </p:spPr>
+        <p:txBody>
+          <a:bodyPr/>
+          <a:lstStyle/>
+          <a:p>
+            <a:endParaRPr lang="en-US"/>
+          </a:p>
+        </p:txBody>
       </p:sp>
       <p:sp>
         <p:nvSpPr>
@@ -11196,6 +12745,13 @@
             <a:prstDash val="solid"/>
           </a:ln>
         </p:spPr>
+        <p:txBody>
+          <a:bodyPr/>
+          <a:lstStyle/>
+          <a:p>
+            <a:endParaRPr lang="en-US"/>
+          </a:p>
+        </p:txBody>
       </p:sp>
       <p:sp>
         <p:nvSpPr>
@@ -11218,7 +12774,7 @@
           <a:bodyPr wrap="square" lIns="0" tIns="0" rIns="0" bIns="0" rtlCol="0" anchor="ctr"/>
           <a:lstStyle/>
           <a:p>
-            <a:pPr algn="ctr" indent="0" marL="0">
+            <a:pPr marL="0" indent="0" algn="ctr">
               <a:buNone/>
             </a:pPr>
             <a:r>
@@ -11235,7 +12791,7 @@
             <a:endParaRPr lang="en-US" sz="1200" dirty="0"/>
           </a:p>
           <a:p>
-            <a:pPr algn="ctr" indent="0" marL="0">
+            <a:pPr marL="0" indent="0" algn="ctr">
               <a:buNone/>
             </a:pPr>
             <a:r>
@@ -11272,6 +12828,13 @@
           </a:solidFill>
           <a:ln/>
         </p:spPr>
+        <p:txBody>
+          <a:bodyPr/>
+          <a:lstStyle/>
+          <a:p>
+            <a:endParaRPr lang="en-US"/>
+          </a:p>
+        </p:txBody>
       </p:sp>
       <p:sp>
         <p:nvSpPr>
@@ -11299,6 +12862,13 @@
             <a:prstDash val="solid"/>
           </a:ln>
         </p:spPr>
+        <p:txBody>
+          <a:bodyPr/>
+          <a:lstStyle/>
+          <a:p>
+            <a:endParaRPr lang="en-US"/>
+          </a:p>
+        </p:txBody>
       </p:sp>
       <p:sp>
         <p:nvSpPr>
@@ -11321,7 +12891,7 @@
           <a:bodyPr wrap="square" lIns="0" tIns="0" rIns="0" bIns="0" rtlCol="0" anchor="ctr"/>
           <a:lstStyle/>
           <a:p>
-            <a:pPr algn="ctr" indent="0" marL="0">
+            <a:pPr marL="0" indent="0" algn="ctr">
               <a:buNone/>
             </a:pPr>
             <a:r>
@@ -11338,7 +12908,7 @@
             <a:endParaRPr lang="en-US" sz="1200" dirty="0"/>
           </a:p>
           <a:p>
-            <a:pPr algn="ctr" indent="0" marL="0">
+            <a:pPr marL="0" indent="0" algn="ctr">
               <a:buNone/>
             </a:pPr>
             <a:r>
@@ -11377,7 +12947,7 @@
           <a:bodyPr wrap="square" lIns="0" tIns="0" rIns="0" bIns="0" rtlCol="0" anchor="ctr"/>
           <a:lstStyle/>
           <a:p>
-            <a:pPr algn="ctr" indent="0" marL="0">
+            <a:pPr marL="0" indent="0" algn="ctr">
               <a:buNone/>
             </a:pPr>
             <a:r>
@@ -11419,13 +12989,20 @@
             <a:prstDash val="solid"/>
           </a:ln>
           <a:effectLst>
-            <a:outerShdw sx="100000" sy="100000" kx="0" ky="0" algn="bl" rotWithShape="0" blurRad="88900" dist="38100" dir="8100000">
+            <a:outerShdw blurRad="88900" dist="38100" dir="8100000" algn="bl" rotWithShape="0">
               <a:srgbClr val="1C2440">
                 <a:alpha val="13000"/>
               </a:srgbClr>
             </a:outerShdw>
           </a:effectLst>
         </p:spPr>
+        <p:txBody>
+          <a:bodyPr/>
+          <a:lstStyle/>
+          <a:p>
+            <a:endParaRPr lang="en-US"/>
+          </a:p>
+        </p:txBody>
       </p:sp>
       <p:sp>
         <p:nvSpPr>
@@ -11448,7 +13025,7 @@
           <a:bodyPr wrap="square" lIns="0" tIns="0" rIns="0" bIns="0" rtlCol="0" anchor="ctr"/>
           <a:lstStyle/>
           <a:p>
-            <a:pPr indent="0" marL="0">
+            <a:pPr marL="0" indent="0">
               <a:buNone/>
             </a:pPr>
             <a:r>
@@ -11462,9 +13039,6 @@
               </a:rPr>
               <a:t>■ </a:t>
             </a:r>
-            <a:pPr indent="0" marL="0">
-              <a:buNone/>
-            </a:pPr>
             <a:r>
               <a:rPr lang="en-US" sz="1300" b="1" dirty="0">
                 <a:solidFill>
@@ -11605,6 +13179,13 @@
           </a:solidFill>
           <a:ln/>
         </p:spPr>
+        <p:txBody>
+          <a:bodyPr/>
+          <a:lstStyle/>
+          <a:p>
+            <a:endParaRPr lang="en-US"/>
+          </a:p>
+        </p:txBody>
       </p:sp>
       <p:sp>
         <p:nvSpPr>
@@ -11625,6 +13206,13 @@
           </a:solidFill>
           <a:ln/>
         </p:spPr>
+        <p:txBody>
+          <a:bodyPr/>
+          <a:lstStyle/>
+          <a:p>
+            <a:endParaRPr lang="en-US"/>
+          </a:p>
+        </p:txBody>
       </p:sp>
       <p:sp>
         <p:nvSpPr>
@@ -11647,11 +13235,11 @@
           <a:bodyPr wrap="square" lIns="0" tIns="0" rIns="0" bIns="0" rtlCol="0" anchor="ctr"/>
           <a:lstStyle/>
           <a:p>
-            <a:pPr indent="0" marL="0">
+            <a:pPr marL="0" indent="0">
               <a:buNone/>
             </a:pPr>
             <a:r>
-              <a:rPr lang="en-US" sz="1050" b="1" spc="100" kern="0" dirty="0">
+              <a:rPr lang="en-US" sz="1050" b="1" kern="0" spc="100" dirty="0">
                 <a:solidFill>
                   <a:srgbClr val="D97706"/>
                 </a:solidFill>
@@ -11661,9 +13249,6 @@
               </a:rPr>
               <a:t>THREE CONSTRAINTS   </a:t>
             </a:r>
-            <a:pPr indent="0" marL="0">
-              <a:buNone/>
-            </a:pPr>
             <a:r>
               <a:rPr lang="en-US" sz="1200" dirty="0">
                 <a:solidFill>
@@ -11695,6 +13280,7 @@
         <a:solidFill>
           <a:srgbClr val="FFFFFF"/>
         </a:solidFill>
+        <a:effectLst/>
       </p:bgPr>
     </p:bg>
     <p:spTree>
@@ -11732,11 +13318,11 @@
           <a:bodyPr wrap="square" lIns="0" tIns="0" rIns="0" bIns="0" rtlCol="0" anchor="ctr"/>
           <a:lstStyle/>
           <a:p>
-            <a:pPr indent="0" marL="0">
+            <a:pPr marL="0" indent="0">
               <a:buNone/>
             </a:pPr>
             <a:r>
-              <a:rPr lang="en-US" sz="1050" b="1" spc="200" kern="0" dirty="0">
+              <a:rPr lang="en-US" sz="1050" b="1" kern="0" spc="200" dirty="0">
                 <a:solidFill>
                   <a:srgbClr val="6B7C86"/>
                 </a:solidFill>
@@ -11769,17 +13355,24 @@
           </a:solidFill>
           <a:ln/>
         </p:spPr>
+        <p:txBody>
+          <a:bodyPr/>
+          <a:lstStyle/>
+          <a:p>
+            <a:endParaRPr lang="en-US"/>
+          </a:p>
+        </p:txBody>
       </p:sp>
       <p:pic>
         <p:nvPicPr>
-          <p:cNvPr id="4" name="Image 0" descr="preencoded.png">    </p:cNvPr>
+          <p:cNvPr id="4" name="Image 0" descr="preencoded.png"/>
           <p:cNvPicPr>
             <a:picLocks noChangeAspect="1"/>
           </p:cNvPicPr>
           <p:nvPr/>
         </p:nvPicPr>
         <p:blipFill>
-          <a:blip r:embed="rId1"/>
+          <a:blip r:embed="rId3"/>
           <a:stretch>
             <a:fillRect/>
           </a:stretch>
@@ -11815,7 +13408,7 @@
           <a:bodyPr wrap="square" lIns="0" tIns="0" rIns="0" bIns="0" rtlCol="0" anchor="ctr"/>
           <a:lstStyle/>
           <a:p>
-            <a:pPr indent="0" marL="0">
+            <a:pPr marL="0" indent="0">
               <a:buNone/>
             </a:pPr>
             <a:r>
@@ -11852,6 +13445,13 @@
           </a:solidFill>
           <a:ln/>
         </p:spPr>
+        <p:txBody>
+          <a:bodyPr/>
+          <a:lstStyle/>
+          <a:p>
+            <a:endParaRPr lang="en-US"/>
+          </a:p>
+        </p:txBody>
       </p:sp>
       <p:sp>
         <p:nvSpPr>
@@ -11872,6 +13472,13 @@
           </a:solidFill>
           <a:ln/>
         </p:spPr>
+        <p:txBody>
+          <a:bodyPr/>
+          <a:lstStyle/>
+          <a:p>
+            <a:endParaRPr lang="en-US"/>
+          </a:p>
+        </p:txBody>
       </p:sp>
       <p:sp>
         <p:nvSpPr>
@@ -11894,11 +13501,11 @@
           <a:bodyPr wrap="square" lIns="0" tIns="0" rIns="0" bIns="0" rtlCol="0" anchor="ctr"/>
           <a:lstStyle/>
           <a:p>
-            <a:pPr indent="0" marL="0">
+            <a:pPr marL="0" indent="0">
               <a:buNone/>
             </a:pPr>
             <a:r>
-              <a:rPr lang="en-US" sz="1050" b="1" spc="100" kern="0" dirty="0">
+              <a:rPr lang="en-US" sz="1050" b="1" kern="0" spc="100" dirty="0">
                 <a:solidFill>
                   <a:srgbClr val="D97706"/>
                 </a:solidFill>
@@ -11908,9 +13515,6 @@
               </a:rPr>
               <a:t>TAKEAWAY   </a:t>
             </a:r>
-            <a:pPr indent="0" marL="0">
-              <a:buNone/>
-            </a:pPr>
             <a:r>
               <a:rPr lang="en-US" sz="1300" dirty="0">
                 <a:solidFill>
@@ -11948,6 +13552,13 @@
             <a:prstDash val="solid"/>
           </a:ln>
         </p:spPr>
+        <p:txBody>
+          <a:bodyPr/>
+          <a:lstStyle/>
+          <a:p>
+            <a:endParaRPr lang="en-US"/>
+          </a:p>
+        </p:txBody>
       </p:sp>
       <p:sp>
         <p:nvSpPr>
@@ -11970,7 +13581,7 @@
           <a:bodyPr wrap="square" lIns="0" tIns="0" rIns="0" bIns="0" rtlCol="0" anchor="ctr"/>
           <a:lstStyle/>
           <a:p>
-            <a:pPr indent="0" marL="0">
+            <a:pPr marL="0" indent="0">
               <a:buNone/>
             </a:pPr>
             <a:r>
@@ -12009,7 +13620,7 @@
           <a:bodyPr wrap="square" lIns="0" tIns="0" rIns="0" bIns="0" rtlCol="0" anchor="ctr"/>
           <a:lstStyle/>
           <a:p>
-            <a:pPr algn="r" indent="0" marL="0">
+            <a:pPr marL="0" indent="0" algn="r">
               <a:buNone/>
             </a:pPr>
             <a:r>
@@ -12046,6 +13657,13 @@
           </a:solidFill>
           <a:ln/>
         </p:spPr>
+        <p:txBody>
+          <a:bodyPr/>
+          <a:lstStyle/>
+          <a:p>
+            <a:endParaRPr lang="en-US"/>
+          </a:p>
+        </p:txBody>
       </p:sp>
       <p:sp>
         <p:nvSpPr>
@@ -12068,7 +13686,7 @@
           <a:bodyPr wrap="square" lIns="0" tIns="0" rIns="0" bIns="0" rtlCol="0" anchor="ctr"/>
           <a:lstStyle/>
           <a:p>
-            <a:pPr algn="ctr" indent="0" marL="0">
+            <a:pPr marL="0" indent="0" algn="ctr">
               <a:buNone/>
             </a:pPr>
             <a:r>
@@ -12105,6 +13723,13 @@
           </a:solidFill>
           <a:ln/>
         </p:spPr>
+        <p:txBody>
+          <a:bodyPr/>
+          <a:lstStyle/>
+          <a:p>
+            <a:endParaRPr lang="en-US"/>
+          </a:p>
+        </p:txBody>
       </p:sp>
       <p:sp>
         <p:nvSpPr>
@@ -12127,7 +13752,7 @@
           <a:bodyPr wrap="square" lIns="0" tIns="0" rIns="0" bIns="0" rtlCol="0" anchor="ctr"/>
           <a:lstStyle/>
           <a:p>
-            <a:pPr algn="ctr" indent="0" marL="0">
+            <a:pPr marL="0" indent="0" algn="ctr">
               <a:buNone/>
             </a:pPr>
             <a:r>
@@ -12164,6 +13789,13 @@
           </a:solidFill>
           <a:ln/>
         </p:spPr>
+        <p:txBody>
+          <a:bodyPr/>
+          <a:lstStyle/>
+          <a:p>
+            <a:endParaRPr lang="en-US"/>
+          </a:p>
+        </p:txBody>
       </p:sp>
       <p:sp>
         <p:nvSpPr>
@@ -12186,7 +13818,7 @@
           <a:bodyPr wrap="square" lIns="0" tIns="0" rIns="0" bIns="0" rtlCol="0" anchor="ctr"/>
           <a:lstStyle/>
           <a:p>
-            <a:pPr algn="ctr" indent="0" marL="0">
+            <a:pPr marL="0" indent="0" algn="ctr">
               <a:buNone/>
             </a:pPr>
             <a:r>
@@ -12223,6 +13855,13 @@
           </a:solidFill>
           <a:ln/>
         </p:spPr>
+        <p:txBody>
+          <a:bodyPr/>
+          <a:lstStyle/>
+          <a:p>
+            <a:endParaRPr lang="en-US"/>
+          </a:p>
+        </p:txBody>
       </p:sp>
       <p:sp>
         <p:nvSpPr>
@@ -12245,7 +13884,7 @@
           <a:bodyPr wrap="square" lIns="0" tIns="0" rIns="0" bIns="0" rtlCol="0" anchor="ctr"/>
           <a:lstStyle/>
           <a:p>
-            <a:pPr algn="ctr" indent="0" marL="0">
+            <a:pPr marL="0" indent="0" algn="ctr">
               <a:buNone/>
             </a:pPr>
             <a:r>
@@ -12282,6 +13921,13 @@
           </a:solidFill>
           <a:ln/>
         </p:spPr>
+        <p:txBody>
+          <a:bodyPr/>
+          <a:lstStyle/>
+          <a:p>
+            <a:endParaRPr lang="en-US"/>
+          </a:p>
+        </p:txBody>
       </p:sp>
       <p:sp>
         <p:nvSpPr>
@@ -12304,7 +13950,7 @@
           <a:bodyPr wrap="square" lIns="0" tIns="0" rIns="0" bIns="0" rtlCol="0" anchor="ctr"/>
           <a:lstStyle/>
           <a:p>
-            <a:pPr algn="ctr" indent="0" marL="0">
+            <a:pPr marL="0" indent="0" algn="ctr">
               <a:buNone/>
             </a:pPr>
             <a:r>
@@ -12341,6 +13987,13 @@
           </a:solidFill>
           <a:ln/>
         </p:spPr>
+        <p:txBody>
+          <a:bodyPr/>
+          <a:lstStyle/>
+          <a:p>
+            <a:endParaRPr lang="en-US"/>
+          </a:p>
+        </p:txBody>
       </p:sp>
       <p:sp>
         <p:nvSpPr>
@@ -12363,7 +14016,7 @@
           <a:bodyPr wrap="square" lIns="0" tIns="0" rIns="0" bIns="0" rtlCol="0" anchor="ctr"/>
           <a:lstStyle/>
           <a:p>
-            <a:pPr algn="ctr" indent="0" marL="0">
+            <a:pPr marL="0" indent="0" algn="ctr">
               <a:buNone/>
             </a:pPr>
             <a:r>
@@ -12400,6 +14053,13 @@
           </a:solidFill>
           <a:ln/>
         </p:spPr>
+        <p:txBody>
+          <a:bodyPr/>
+          <a:lstStyle/>
+          <a:p>
+            <a:endParaRPr lang="en-US"/>
+          </a:p>
+        </p:txBody>
       </p:sp>
       <p:sp>
         <p:nvSpPr>
@@ -12420,6 +14080,13 @@
           </a:solidFill>
           <a:ln/>
         </p:spPr>
+        <p:txBody>
+          <a:bodyPr/>
+          <a:lstStyle/>
+          <a:p>
+            <a:endParaRPr lang="en-US"/>
+          </a:p>
+        </p:txBody>
       </p:sp>
       <p:sp>
         <p:nvSpPr>
@@ -12442,11 +14109,11 @@
           <a:bodyPr wrap="square" lIns="0" tIns="0" rIns="0" bIns="0" rtlCol="0" anchor="ctr"/>
           <a:lstStyle/>
           <a:p>
-            <a:pPr indent="0" marL="0">
+            <a:pPr marL="0" indent="0">
               <a:buNone/>
             </a:pPr>
             <a:r>
-              <a:rPr lang="en-US" sz="1050" b="1" spc="100" kern="0" dirty="0">
+              <a:rPr lang="en-US" sz="1050" b="1" kern="0" spc="100" dirty="0">
                 <a:solidFill>
                   <a:srgbClr val="D97706"/>
                 </a:solidFill>
@@ -12456,9 +14123,6 @@
               </a:rPr>
               <a:t>IN YOUR WORDS   </a:t>
             </a:r>
-            <a:pPr indent="0" marL="0">
-              <a:buNone/>
-            </a:pPr>
             <a:r>
               <a:rPr lang="en-US" sz="1200" i="1" dirty="0">
                 <a:solidFill>
@@ -12498,13 +14162,20 @@
             <a:prstDash val="solid"/>
           </a:ln>
           <a:effectLst>
-            <a:outerShdw sx="100000" sy="100000" kx="0" ky="0" algn="bl" rotWithShape="0" blurRad="88900" dist="38100" dir="8100000">
+            <a:outerShdw blurRad="88900" dist="38100" dir="8100000" algn="bl" rotWithShape="0">
               <a:srgbClr val="1C2440">
                 <a:alpha val="13000"/>
               </a:srgbClr>
             </a:outerShdw>
           </a:effectLst>
         </p:spPr>
+        <p:txBody>
+          <a:bodyPr/>
+          <a:lstStyle/>
+          <a:p>
+            <a:endParaRPr lang="en-US"/>
+          </a:p>
+        </p:txBody>
       </p:sp>
       <p:sp>
         <p:nvSpPr>
@@ -12527,7 +14198,7 @@
           <a:bodyPr wrap="square" lIns="0" tIns="0" rIns="0" bIns="0" rtlCol="0" anchor="ctr"/>
           <a:lstStyle/>
           <a:p>
-            <a:pPr indent="0" marL="0">
+            <a:pPr marL="0" indent="0">
               <a:buNone/>
             </a:pPr>
             <a:r>
@@ -12541,9 +14212,6 @@
               </a:rPr>
               <a:t>■ </a:t>
             </a:r>
-            <a:pPr indent="0" marL="0">
-              <a:buNone/>
-            </a:pPr>
             <a:r>
               <a:rPr lang="en-US" sz="1300" b="1" dirty="0">
                 <a:solidFill>
@@ -12660,6 +14328,7 @@
         <a:solidFill>
           <a:srgbClr val="FFFFFF"/>
         </a:solidFill>
+        <a:effectLst/>
       </p:bgPr>
     </p:bg>
     <p:spTree>
@@ -12697,11 +14366,11 @@
           <a:bodyPr wrap="square" lIns="0" tIns="0" rIns="0" bIns="0" rtlCol="0" anchor="ctr"/>
           <a:lstStyle/>
           <a:p>
-            <a:pPr indent="0" marL="0">
+            <a:pPr marL="0" indent="0">
               <a:buNone/>
             </a:pPr>
             <a:r>
-              <a:rPr lang="en-US" sz="1050" b="1" spc="200" kern="0" dirty="0">
+              <a:rPr lang="en-US" sz="1050" b="1" kern="0" spc="200" dirty="0">
                 <a:solidFill>
                   <a:srgbClr val="6B7C86"/>
                 </a:solidFill>
@@ -12734,17 +14403,24 @@
           </a:solidFill>
           <a:ln/>
         </p:spPr>
+        <p:txBody>
+          <a:bodyPr/>
+          <a:lstStyle/>
+          <a:p>
+            <a:endParaRPr lang="en-US"/>
+          </a:p>
+        </p:txBody>
       </p:sp>
       <p:pic>
         <p:nvPicPr>
-          <p:cNvPr id="4" name="Image 0" descr="preencoded.png">    </p:cNvPr>
+          <p:cNvPr id="4" name="Image 0" descr="preencoded.png"/>
           <p:cNvPicPr>
             <a:picLocks noChangeAspect="1"/>
           </p:cNvPicPr>
           <p:nvPr/>
         </p:nvPicPr>
         <p:blipFill>
-          <a:blip r:embed="rId1"/>
+          <a:blip r:embed="rId3"/>
           <a:stretch>
             <a:fillRect/>
           </a:stretch>
@@ -12780,7 +14456,7 @@
           <a:bodyPr wrap="square" lIns="0" tIns="0" rIns="0" bIns="0" rtlCol="0" anchor="ctr"/>
           <a:lstStyle/>
           <a:p>
-            <a:pPr indent="0" marL="0">
+            <a:pPr marL="0" indent="0">
               <a:buNone/>
             </a:pPr>
             <a:r>
@@ -12817,6 +14493,13 @@
           </a:solidFill>
           <a:ln/>
         </p:spPr>
+        <p:txBody>
+          <a:bodyPr/>
+          <a:lstStyle/>
+          <a:p>
+            <a:endParaRPr lang="en-US"/>
+          </a:p>
+        </p:txBody>
       </p:sp>
       <p:sp>
         <p:nvSpPr>
@@ -12837,6 +14520,13 @@
           </a:solidFill>
           <a:ln/>
         </p:spPr>
+        <p:txBody>
+          <a:bodyPr/>
+          <a:lstStyle/>
+          <a:p>
+            <a:endParaRPr lang="en-US"/>
+          </a:p>
+        </p:txBody>
       </p:sp>
       <p:sp>
         <p:nvSpPr>
@@ -12859,11 +14549,11 @@
           <a:bodyPr wrap="square" lIns="0" tIns="0" rIns="0" bIns="0" rtlCol="0" anchor="ctr"/>
           <a:lstStyle/>
           <a:p>
-            <a:pPr indent="0" marL="0">
+            <a:pPr marL="0" indent="0">
               <a:buNone/>
             </a:pPr>
             <a:r>
-              <a:rPr lang="en-US" sz="1050" b="1" spc="100" kern="0" dirty="0">
+              <a:rPr lang="en-US" sz="1050" b="1" kern="0" spc="100" dirty="0">
                 <a:solidFill>
                   <a:srgbClr val="D97706"/>
                 </a:solidFill>
@@ -12873,9 +14563,6 @@
               </a:rPr>
               <a:t>TAKEAWAY   </a:t>
             </a:r>
-            <a:pPr indent="0" marL="0">
-              <a:buNone/>
-            </a:pPr>
             <a:r>
               <a:rPr lang="en-US" sz="1300" dirty="0">
                 <a:solidFill>
@@ -12913,6 +14600,13 @@
             <a:prstDash val="solid"/>
           </a:ln>
         </p:spPr>
+        <p:txBody>
+          <a:bodyPr/>
+          <a:lstStyle/>
+          <a:p>
+            <a:endParaRPr lang="en-US"/>
+          </a:p>
+        </p:txBody>
       </p:sp>
       <p:sp>
         <p:nvSpPr>
@@ -12935,7 +14629,7 @@
           <a:bodyPr wrap="square" lIns="0" tIns="0" rIns="0" bIns="0" rtlCol="0" anchor="ctr"/>
           <a:lstStyle/>
           <a:p>
-            <a:pPr indent="0" marL="0">
+            <a:pPr marL="0" indent="0">
               <a:buNone/>
             </a:pPr>
             <a:r>
@@ -12974,7 +14668,7 @@
           <a:bodyPr wrap="square" lIns="0" tIns="0" rIns="0" bIns="0" rtlCol="0" anchor="ctr"/>
           <a:lstStyle/>
           <a:p>
-            <a:pPr algn="r" indent="0" marL="0">
+            <a:pPr marL="0" indent="0" algn="r">
               <a:buNone/>
             </a:pPr>
             <a:r>
@@ -13016,13 +14710,20 @@
             <a:prstDash val="solid"/>
           </a:ln>
           <a:effectLst>
-            <a:outerShdw sx="100000" sy="100000" kx="0" ky="0" algn="bl" rotWithShape="0" blurRad="88900" dist="38100" dir="8100000">
+            <a:outerShdw blurRad="88900" dist="38100" dir="8100000" algn="bl" rotWithShape="0">
               <a:srgbClr val="1C2440">
                 <a:alpha val="13000"/>
               </a:srgbClr>
             </a:outerShdw>
           </a:effectLst>
         </p:spPr>
+        <p:txBody>
+          <a:bodyPr/>
+          <a:lstStyle/>
+          <a:p>
+            <a:endParaRPr lang="en-US"/>
+          </a:p>
+        </p:txBody>
       </p:sp>
       <p:sp>
         <p:nvSpPr>
@@ -13045,11 +14746,11 @@
           <a:bodyPr wrap="square" lIns="0" tIns="0" rIns="0" bIns="0" rtlCol="0" anchor="ctr"/>
           <a:lstStyle/>
           <a:p>
-            <a:pPr indent="0" marL="0">
+            <a:pPr marL="0" indent="0">
               <a:buNone/>
             </a:pPr>
             <a:r>
-              <a:rPr lang="en-US" sz="950" b="1" spc="150" kern="0" dirty="0">
+              <a:rPr lang="en-US" sz="950" b="1" kern="0" spc="150" dirty="0">
                 <a:solidFill>
                   <a:srgbClr val="2E5C72"/>
                 </a:solidFill>
@@ -13084,7 +14785,7 @@
           <a:bodyPr wrap="square" lIns="0" tIns="0" rIns="0" bIns="0" rtlCol="0" anchor="t"/>
           <a:lstStyle/>
           <a:p>
-            <a:pPr indent="0" marL="0">
+            <a:pPr marL="0" indent="0">
               <a:buNone/>
             </a:pPr>
             <a:r>
@@ -13123,7 +14824,7 @@
           <a:bodyPr wrap="square" lIns="0" tIns="0" rIns="0" bIns="0" rtlCol="0" anchor="t"/>
           <a:lstStyle/>
           <a:p>
-            <a:pPr indent="0" marL="0">
+            <a:pPr marL="0" indent="0">
               <a:buNone/>
             </a:pPr>
             <a:r>
@@ -13165,13 +14866,20 @@
             <a:prstDash val="solid"/>
           </a:ln>
           <a:effectLst>
-            <a:outerShdw sx="100000" sy="100000" kx="0" ky="0" algn="bl" rotWithShape="0" blurRad="88900" dist="38100" dir="8100000">
+            <a:outerShdw blurRad="88900" dist="38100" dir="8100000" algn="bl" rotWithShape="0">
               <a:srgbClr val="1C2440">
                 <a:alpha val="13000"/>
               </a:srgbClr>
             </a:outerShdw>
           </a:effectLst>
         </p:spPr>
+        <p:txBody>
+          <a:bodyPr/>
+          <a:lstStyle/>
+          <a:p>
+            <a:endParaRPr lang="en-US"/>
+          </a:p>
+        </p:txBody>
       </p:sp>
       <p:sp>
         <p:nvSpPr>
@@ -13194,11 +14902,11 @@
           <a:bodyPr wrap="square" lIns="0" tIns="0" rIns="0" bIns="0" rtlCol="0" anchor="ctr"/>
           <a:lstStyle/>
           <a:p>
-            <a:pPr indent="0" marL="0">
+            <a:pPr marL="0" indent="0">
               <a:buNone/>
             </a:pPr>
             <a:r>
-              <a:rPr lang="en-US" sz="950" b="1" spc="150" kern="0" dirty="0">
+              <a:rPr lang="en-US" sz="950" b="1" kern="0" spc="150" dirty="0">
                 <a:solidFill>
                   <a:srgbClr val="2E5C72"/>
                 </a:solidFill>
@@ -13233,7 +14941,7 @@
           <a:bodyPr wrap="square" lIns="0" tIns="0" rIns="0" bIns="0" rtlCol="0" anchor="t"/>
           <a:lstStyle/>
           <a:p>
-            <a:pPr indent="0" marL="0">
+            <a:pPr marL="0" indent="0">
               <a:buNone/>
             </a:pPr>
             <a:r>
@@ -13272,7 +14980,7 @@
           <a:bodyPr wrap="square" lIns="0" tIns="0" rIns="0" bIns="0" rtlCol="0" anchor="t"/>
           <a:lstStyle/>
           <a:p>
-            <a:pPr indent="0" marL="0">
+            <a:pPr marL="0" indent="0">
               <a:buNone/>
             </a:pPr>
             <a:r>
@@ -13309,13 +15017,20 @@
           </a:solidFill>
           <a:ln/>
           <a:effectLst>
-            <a:outerShdw sx="100000" sy="100000" kx="0" ky="0" algn="bl" rotWithShape="0" blurRad="88900" dist="38100" dir="8100000">
+            <a:outerShdw blurRad="88900" dist="38100" dir="8100000" algn="bl" rotWithShape="0">
               <a:srgbClr val="1C2440">
                 <a:alpha val="13000"/>
               </a:srgbClr>
             </a:outerShdw>
           </a:effectLst>
         </p:spPr>
+        <p:txBody>
+          <a:bodyPr/>
+          <a:lstStyle/>
+          <a:p>
+            <a:endParaRPr lang="en-US"/>
+          </a:p>
+        </p:txBody>
       </p:sp>
       <p:sp>
         <p:nvSpPr>
@@ -13338,11 +15053,11 @@
           <a:bodyPr wrap="square" lIns="0" tIns="0" rIns="0" bIns="0" rtlCol="0" anchor="ctr"/>
           <a:lstStyle/>
           <a:p>
-            <a:pPr indent="0" marL="0">
+            <a:pPr marL="0" indent="0">
               <a:buNone/>
             </a:pPr>
             <a:r>
-              <a:rPr lang="en-US" sz="950" b="1" spc="150" kern="0" dirty="0">
+              <a:rPr lang="en-US" sz="950" b="1" kern="0" spc="150" dirty="0">
                 <a:solidFill>
                   <a:srgbClr val="D97706"/>
                 </a:solidFill>
@@ -13377,7 +15092,7 @@
           <a:bodyPr wrap="square" lIns="0" tIns="0" rIns="0" bIns="0" rtlCol="0" anchor="t"/>
           <a:lstStyle/>
           <a:p>
-            <a:pPr indent="0" marL="0">
+            <a:pPr marL="0" indent="0">
               <a:buNone/>
             </a:pPr>
             <a:r>
@@ -13416,7 +15131,7 @@
           <a:bodyPr wrap="square" lIns="0" tIns="0" rIns="0" bIns="0" rtlCol="0" anchor="t"/>
           <a:lstStyle/>
           <a:p>
-            <a:pPr indent="0" marL="0">
+            <a:pPr marL="0" indent="0">
               <a:buNone/>
             </a:pPr>
             <a:r>
@@ -13453,6 +15168,13 @@
           </a:solidFill>
           <a:ln/>
         </p:spPr>
+        <p:txBody>
+          <a:bodyPr/>
+          <a:lstStyle/>
+          <a:p>
+            <a:endParaRPr lang="en-US"/>
+          </a:p>
+        </p:txBody>
       </p:sp>
       <p:sp>
         <p:nvSpPr>
@@ -13473,6 +15195,13 @@
           </a:solidFill>
           <a:ln/>
         </p:spPr>
+        <p:txBody>
+          <a:bodyPr/>
+          <a:lstStyle/>
+          <a:p>
+            <a:endParaRPr lang="en-US"/>
+          </a:p>
+        </p:txBody>
       </p:sp>
       <p:sp>
         <p:nvSpPr>
@@ -13495,11 +15224,11 @@
           <a:bodyPr wrap="square" lIns="0" tIns="0" rIns="0" bIns="0" rtlCol="0" anchor="ctr"/>
           <a:lstStyle/>
           <a:p>
-            <a:pPr indent="0" marL="0">
+            <a:pPr marL="0" indent="0">
               <a:buNone/>
             </a:pPr>
             <a:r>
-              <a:rPr lang="en-US" sz="1050" b="1" spc="100" kern="0" dirty="0">
+              <a:rPr lang="en-US" sz="1050" b="1" kern="0" spc="100" dirty="0">
                 <a:solidFill>
                   <a:srgbClr val="D97706"/>
                 </a:solidFill>
@@ -13509,9 +15238,6 @@
               </a:rPr>
               <a:t>IN YOUR WORDS   </a:t>
             </a:r>
-            <a:pPr indent="0" marL="0">
-              <a:buNone/>
-            </a:pPr>
             <a:r>
               <a:rPr lang="en-US" sz="1200" i="1" dirty="0">
                 <a:solidFill>
@@ -13543,6 +15269,7 @@
         <a:solidFill>
           <a:srgbClr val="FFFFFF"/>
         </a:solidFill>
+        <a:effectLst/>
       </p:bgPr>
     </p:bg>
     <p:spTree>
@@ -13580,11 +15307,11 @@
           <a:bodyPr wrap="square" lIns="0" tIns="0" rIns="0" bIns="0" rtlCol="0" anchor="ctr"/>
           <a:lstStyle/>
           <a:p>
-            <a:pPr indent="0" marL="0">
+            <a:pPr marL="0" indent="0">
               <a:buNone/>
             </a:pPr>
             <a:r>
-              <a:rPr lang="en-US" sz="1050" b="1" spc="200" kern="0" dirty="0">
+              <a:rPr lang="en-US" sz="1050" b="1" kern="0" spc="200" dirty="0">
                 <a:solidFill>
                   <a:srgbClr val="6B7C86"/>
                 </a:solidFill>
@@ -13617,17 +15344,24 @@
           </a:solidFill>
           <a:ln/>
         </p:spPr>
+        <p:txBody>
+          <a:bodyPr/>
+          <a:lstStyle/>
+          <a:p>
+            <a:endParaRPr lang="en-US"/>
+          </a:p>
+        </p:txBody>
       </p:sp>
       <p:pic>
         <p:nvPicPr>
-          <p:cNvPr id="4" name="Image 0" descr="preencoded.png">    </p:cNvPr>
+          <p:cNvPr id="4" name="Image 0" descr="preencoded.png"/>
           <p:cNvPicPr>
             <a:picLocks noChangeAspect="1"/>
           </p:cNvPicPr>
           <p:nvPr/>
         </p:nvPicPr>
         <p:blipFill>
-          <a:blip r:embed="rId1"/>
+          <a:blip r:embed="rId3"/>
           <a:stretch>
             <a:fillRect/>
           </a:stretch>
@@ -13663,7 +15397,7 @@
           <a:bodyPr wrap="square" lIns="0" tIns="0" rIns="0" bIns="0" rtlCol="0" anchor="ctr"/>
           <a:lstStyle/>
           <a:p>
-            <a:pPr indent="0" marL="0">
+            <a:pPr marL="0" indent="0">
               <a:buNone/>
             </a:pPr>
             <a:r>
@@ -13700,6 +15434,13 @@
           </a:solidFill>
           <a:ln/>
         </p:spPr>
+        <p:txBody>
+          <a:bodyPr/>
+          <a:lstStyle/>
+          <a:p>
+            <a:endParaRPr lang="en-US"/>
+          </a:p>
+        </p:txBody>
       </p:sp>
       <p:sp>
         <p:nvSpPr>
@@ -13720,6 +15461,13 @@
           </a:solidFill>
           <a:ln/>
         </p:spPr>
+        <p:txBody>
+          <a:bodyPr/>
+          <a:lstStyle/>
+          <a:p>
+            <a:endParaRPr lang="en-US"/>
+          </a:p>
+        </p:txBody>
       </p:sp>
       <p:sp>
         <p:nvSpPr>
@@ -13742,11 +15490,11 @@
           <a:bodyPr wrap="square" lIns="0" tIns="0" rIns="0" bIns="0" rtlCol="0" anchor="ctr"/>
           <a:lstStyle/>
           <a:p>
-            <a:pPr indent="0" marL="0">
+            <a:pPr marL="0" indent="0">
               <a:buNone/>
             </a:pPr>
             <a:r>
-              <a:rPr lang="en-US" sz="1050" b="1" spc="100" kern="0" dirty="0">
+              <a:rPr lang="en-US" sz="1050" b="1" kern="0" spc="100" dirty="0">
                 <a:solidFill>
                   <a:srgbClr val="D97706"/>
                 </a:solidFill>
@@ -13756,9 +15504,6 @@
               </a:rPr>
               <a:t>TAKEAWAY   </a:t>
             </a:r>
-            <a:pPr indent="0" marL="0">
-              <a:buNone/>
-            </a:pPr>
             <a:r>
               <a:rPr lang="en-US" sz="1300" dirty="0">
                 <a:solidFill>
@@ -13796,6 +15541,13 @@
             <a:prstDash val="solid"/>
           </a:ln>
         </p:spPr>
+        <p:txBody>
+          <a:bodyPr/>
+          <a:lstStyle/>
+          <a:p>
+            <a:endParaRPr lang="en-US"/>
+          </a:p>
+        </p:txBody>
       </p:sp>
       <p:sp>
         <p:nvSpPr>
@@ -13818,7 +15570,7 @@
           <a:bodyPr wrap="square" lIns="0" tIns="0" rIns="0" bIns="0" rtlCol="0" anchor="ctr"/>
           <a:lstStyle/>
           <a:p>
-            <a:pPr indent="0" marL="0">
+            <a:pPr marL="0" indent="0">
               <a:buNone/>
             </a:pPr>
             <a:r>
@@ -13857,7 +15609,7 @@
           <a:bodyPr wrap="square" lIns="0" tIns="0" rIns="0" bIns="0" rtlCol="0" anchor="ctr"/>
           <a:lstStyle/>
           <a:p>
-            <a:pPr algn="r" indent="0" marL="0">
+            <a:pPr marL="0" indent="0" algn="r">
               <a:buNone/>
             </a:pPr>
             <a:r>
@@ -13877,7 +15629,7 @@
       </p:sp>
       <p:graphicFrame>
         <p:nvGraphicFramePr>
-          <p:cNvPr id="6" name="Table 0"/>
+          <p:cNvPr id="12" name="Table 0"/>
           <p:cNvGraphicFramePr>
             <a:graphicFrameLocks noGrp="1"/>
           </p:cNvGraphicFramePr>
@@ -13891,16 +15643,34 @@
         </p:nvGraphicFramePr>
         <p:xfrm>
           <a:off x="566928" y="2395728"/>
-          <a:ext cx="11055096" cy="914400"/>
+          <a:ext cx="11055096" cy="3438144"/>
         </p:xfrm>
         <a:graphic>
           <a:graphicData uri="http://schemas.openxmlformats.org/drawingml/2006/table">
             <a:tbl>
               <a:tblPr/>
               <a:tblGrid>
-                <a:gridCol w="2331720"/>
-                <a:gridCol w="3794760"/>
-                <a:gridCol w="4928616"/>
+                <a:gridCol w="2331720">
+                  <a:extLst>
+                    <a:ext uri="{9D8B030D-6E8A-4147-A177-3AD203B41FA5}">
+                      <a16:colId xmlns:a16="http://schemas.microsoft.com/office/drawing/2014/main" val="20000"/>
+                    </a:ext>
+                  </a:extLst>
+                </a:gridCol>
+                <a:gridCol w="3794760">
+                  <a:extLst>
+                    <a:ext uri="{9D8B030D-6E8A-4147-A177-3AD203B41FA5}">
+                      <a16:colId xmlns:a16="http://schemas.microsoft.com/office/drawing/2014/main" val="20001"/>
+                    </a:ext>
+                  </a:extLst>
+                </a:gridCol>
+                <a:gridCol w="4928616">
+                  <a:extLst>
+                    <a:ext uri="{9D8B030D-6E8A-4147-A177-3AD203B41FA5}">
+                      <a16:colId xmlns:a16="http://schemas.microsoft.com/office/drawing/2014/main" val="20002"/>
+                    </a:ext>
+                  </a:extLst>
+                </a:gridCol>
               </a:tblGrid>
               <a:tr h="329184">
                 <a:tc>
@@ -13908,7 +15678,7 @@
                     <a:bodyPr/>
                     <a:lstStyle/>
                     <a:p>
-                      <a:pPr indent="0" marL="0">
+                      <a:pPr marL="0" indent="0">
                         <a:buNone/>
                       </a:pPr>
                       <a:r>
@@ -13969,7 +15739,7 @@
                     <a:bodyPr/>
                     <a:lstStyle/>
                     <a:p>
-                      <a:pPr indent="0" marL="0">
+                      <a:pPr marL="0" indent="0">
                         <a:buNone/>
                       </a:pPr>
                       <a:r>
@@ -14030,7 +15800,7 @@
                     <a:bodyPr/>
                     <a:lstStyle/>
                     <a:p>
-                      <a:pPr indent="0" marL="0">
+                      <a:pPr marL="0" indent="0">
                         <a:buNone/>
                       </a:pPr>
                       <a:r>
@@ -14086,6 +15856,11 @@
                     </a:solidFill>
                   </a:tcPr>
                 </a:tc>
+                <a:extLst>
+                  <a:ext uri="{0D108BD9-81ED-4DB2-BD59-A6C34878D82A}">
+                    <a16:rowId xmlns:a16="http://schemas.microsoft.com/office/drawing/2014/main" val="10000"/>
+                  </a:ext>
+                </a:extLst>
               </a:tr>
               <a:tr h="658368">
                 <a:tc>
@@ -14093,7 +15868,7 @@
                     <a:bodyPr/>
                     <a:lstStyle/>
                     <a:p>
-                      <a:pPr indent="0" marL="0">
+                      <a:pPr marL="0" indent="0">
                         <a:buNone/>
                       </a:pPr>
                       <a:r>
@@ -14154,7 +15929,7 @@
                     <a:bodyPr/>
                     <a:lstStyle/>
                     <a:p>
-                      <a:pPr indent="0" marL="0">
+                      <a:pPr marL="0" indent="0">
                         <a:buNone/>
                       </a:pPr>
                       <a:r>
@@ -14215,7 +15990,7 @@
                     <a:bodyPr/>
                     <a:lstStyle/>
                     <a:p>
-                      <a:pPr indent="0" marL="0">
+                      <a:pPr marL="0" indent="0">
                         <a:buNone/>
                       </a:pPr>
                       <a:r>
@@ -14271,6 +16046,11 @@
                     </a:solidFill>
                   </a:tcPr>
                 </a:tc>
+                <a:extLst>
+                  <a:ext uri="{0D108BD9-81ED-4DB2-BD59-A6C34878D82A}">
+                    <a16:rowId xmlns:a16="http://schemas.microsoft.com/office/drawing/2014/main" val="10001"/>
+                  </a:ext>
+                </a:extLst>
               </a:tr>
               <a:tr h="658368">
                 <a:tc>
@@ -14278,7 +16058,7 @@
                     <a:bodyPr/>
                     <a:lstStyle/>
                     <a:p>
-                      <a:pPr indent="0" marL="0">
+                      <a:pPr marL="0" indent="0">
                         <a:buNone/>
                       </a:pPr>
                       <a:r>
@@ -14339,7 +16119,7 @@
                     <a:bodyPr/>
                     <a:lstStyle/>
                     <a:p>
-                      <a:pPr indent="0" marL="0">
+                      <a:pPr marL="0" indent="0">
                         <a:buNone/>
                       </a:pPr>
                       <a:r>
@@ -14400,7 +16180,7 @@
                     <a:bodyPr/>
                     <a:lstStyle/>
                     <a:p>
-                      <a:pPr indent="0" marL="0">
+                      <a:pPr marL="0" indent="0">
                         <a:buNone/>
                       </a:pPr>
                       <a:r>
@@ -14456,6 +16236,11 @@
                     </a:solidFill>
                   </a:tcPr>
                 </a:tc>
+                <a:extLst>
+                  <a:ext uri="{0D108BD9-81ED-4DB2-BD59-A6C34878D82A}">
+                    <a16:rowId xmlns:a16="http://schemas.microsoft.com/office/drawing/2014/main" val="10002"/>
+                  </a:ext>
+                </a:extLst>
               </a:tr>
               <a:tr h="566928">
                 <a:tc>
@@ -14463,7 +16248,7 @@
                     <a:bodyPr/>
                     <a:lstStyle/>
                     <a:p>
-                      <a:pPr indent="0" marL="0">
+                      <a:pPr marL="0" indent="0">
                         <a:buNone/>
                       </a:pPr>
                       <a:r>
@@ -14524,7 +16309,7 @@
                     <a:bodyPr/>
                     <a:lstStyle/>
                     <a:p>
-                      <a:pPr indent="0" marL="0">
+                      <a:pPr marL="0" indent="0">
                         <a:buNone/>
                       </a:pPr>
                       <a:r>
@@ -14585,7 +16370,7 @@
                     <a:bodyPr/>
                     <a:lstStyle/>
                     <a:p>
-                      <a:pPr indent="0" marL="0">
+                      <a:pPr marL="0" indent="0">
                         <a:buNone/>
                       </a:pPr>
                       <a:r>
@@ -14641,6 +16426,11 @@
                     </a:solidFill>
                   </a:tcPr>
                 </a:tc>
+                <a:extLst>
+                  <a:ext uri="{0D108BD9-81ED-4DB2-BD59-A6C34878D82A}">
+                    <a16:rowId xmlns:a16="http://schemas.microsoft.com/office/drawing/2014/main" val="10003"/>
+                  </a:ext>
+                </a:extLst>
               </a:tr>
               <a:tr h="658368">
                 <a:tc>
@@ -14648,7 +16438,7 @@
                     <a:bodyPr/>
                     <a:lstStyle/>
                     <a:p>
-                      <a:pPr indent="0" marL="0">
+                      <a:pPr marL="0" indent="0">
                         <a:buNone/>
                       </a:pPr>
                       <a:r>
@@ -14709,7 +16499,7 @@
                     <a:bodyPr/>
                     <a:lstStyle/>
                     <a:p>
-                      <a:pPr indent="0" marL="0">
+                      <a:pPr marL="0" indent="0">
                         <a:buNone/>
                       </a:pPr>
                       <a:r>
@@ -14770,7 +16560,7 @@
                     <a:bodyPr/>
                     <a:lstStyle/>
                     <a:p>
-                      <a:pPr indent="0" marL="0">
+                      <a:pPr marL="0" indent="0">
                         <a:buNone/>
                       </a:pPr>
                       <a:r>
@@ -14826,6 +16616,11 @@
                     </a:solidFill>
                   </a:tcPr>
                 </a:tc>
+                <a:extLst>
+                  <a:ext uri="{0D108BD9-81ED-4DB2-BD59-A6C34878D82A}">
+                    <a16:rowId xmlns:a16="http://schemas.microsoft.com/office/drawing/2014/main" val="10004"/>
+                  </a:ext>
+                </a:extLst>
               </a:tr>
               <a:tr h="566928">
                 <a:tc>
@@ -14833,7 +16628,7 @@
                     <a:bodyPr/>
                     <a:lstStyle/>
                     <a:p>
-                      <a:pPr indent="0" marL="0">
+                      <a:pPr marL="0" indent="0">
                         <a:buNone/>
                       </a:pPr>
                       <a:r>
@@ -14894,7 +16689,7 @@
                     <a:bodyPr/>
                     <a:lstStyle/>
                     <a:p>
-                      <a:pPr indent="0" marL="0">
+                      <a:pPr marL="0" indent="0">
                         <a:buNone/>
                       </a:pPr>
                       <a:r>
@@ -14955,7 +16750,7 @@
                     <a:bodyPr/>
                     <a:lstStyle/>
                     <a:p>
-                      <a:pPr indent="0" marL="0">
+                      <a:pPr marL="0" indent="0">
                         <a:buNone/>
                       </a:pPr>
                       <a:r>
@@ -15011,6 +16806,11 @@
                     </a:solidFill>
                   </a:tcPr>
                 </a:tc>
+                <a:extLst>
+                  <a:ext uri="{0D108BD9-81ED-4DB2-BD59-A6C34878D82A}">
+                    <a16:rowId xmlns:a16="http://schemas.microsoft.com/office/drawing/2014/main" val="10005"/>
+                  </a:ext>
+                </a:extLst>
               </a:tr>
             </a:tbl>
           </a:graphicData>
@@ -15032,6 +16832,7 @@
         <a:solidFill>
           <a:srgbClr val="FFFFFF"/>
         </a:solidFill>
+        <a:effectLst/>
       </p:bgPr>
     </p:bg>
     <p:spTree>
@@ -15069,11 +16870,11 @@
           <a:bodyPr wrap="square" lIns="0" tIns="0" rIns="0" bIns="0" rtlCol="0" anchor="ctr"/>
           <a:lstStyle/>
           <a:p>
-            <a:pPr indent="0" marL="0">
+            <a:pPr marL="0" indent="0">
               <a:buNone/>
             </a:pPr>
             <a:r>
-              <a:rPr lang="en-US" sz="1050" b="1" spc="200" kern="0" dirty="0">
+              <a:rPr lang="en-US" sz="1050" b="1" kern="0" spc="200" dirty="0">
                 <a:solidFill>
                   <a:srgbClr val="6B7C86"/>
                 </a:solidFill>
@@ -15106,17 +16907,24 @@
           </a:solidFill>
           <a:ln/>
         </p:spPr>
+        <p:txBody>
+          <a:bodyPr/>
+          <a:lstStyle/>
+          <a:p>
+            <a:endParaRPr lang="en-US"/>
+          </a:p>
+        </p:txBody>
       </p:sp>
       <p:pic>
         <p:nvPicPr>
-          <p:cNvPr id="4" name="Image 0" descr="preencoded.png">    </p:cNvPr>
+          <p:cNvPr id="4" name="Image 0" descr="preencoded.png"/>
           <p:cNvPicPr>
             <a:picLocks noChangeAspect="1"/>
           </p:cNvPicPr>
           <p:nvPr/>
         </p:nvPicPr>
         <p:blipFill>
-          <a:blip r:embed="rId1"/>
+          <a:blip r:embed="rId3"/>
           <a:stretch>
             <a:fillRect/>
           </a:stretch>
@@ -15152,7 +16960,7 @@
           <a:bodyPr wrap="square" lIns="0" tIns="0" rIns="0" bIns="0" rtlCol="0" anchor="ctr"/>
           <a:lstStyle/>
           <a:p>
-            <a:pPr indent="0" marL="0">
+            <a:pPr marL="0" indent="0">
               <a:buNone/>
             </a:pPr>
             <a:r>
@@ -15189,6 +16997,13 @@
           </a:solidFill>
           <a:ln/>
         </p:spPr>
+        <p:txBody>
+          <a:bodyPr/>
+          <a:lstStyle/>
+          <a:p>
+            <a:endParaRPr lang="en-US"/>
+          </a:p>
+        </p:txBody>
       </p:sp>
       <p:sp>
         <p:nvSpPr>
@@ -15209,6 +17024,13 @@
           </a:solidFill>
           <a:ln/>
         </p:spPr>
+        <p:txBody>
+          <a:bodyPr/>
+          <a:lstStyle/>
+          <a:p>
+            <a:endParaRPr lang="en-US"/>
+          </a:p>
+        </p:txBody>
       </p:sp>
       <p:sp>
         <p:nvSpPr>
@@ -15231,11 +17053,11 @@
           <a:bodyPr wrap="square" lIns="0" tIns="0" rIns="0" bIns="0" rtlCol="0" anchor="ctr"/>
           <a:lstStyle/>
           <a:p>
-            <a:pPr indent="0" marL="0">
+            <a:pPr marL="0" indent="0">
               <a:buNone/>
             </a:pPr>
             <a:r>
-              <a:rPr lang="en-US" sz="1050" b="1" spc="100" kern="0" dirty="0">
+              <a:rPr lang="en-US" sz="1050" b="1" kern="0" spc="100" dirty="0">
                 <a:solidFill>
                   <a:srgbClr val="D97706"/>
                 </a:solidFill>
@@ -15245,9 +17067,6 @@
               </a:rPr>
               <a:t>TAKEAWAY   </a:t>
             </a:r>
-            <a:pPr indent="0" marL="0">
-              <a:buNone/>
-            </a:pPr>
             <a:r>
               <a:rPr lang="en-US" sz="1300" dirty="0">
                 <a:solidFill>
@@ -15285,6 +17104,13 @@
             <a:prstDash val="solid"/>
           </a:ln>
         </p:spPr>
+        <p:txBody>
+          <a:bodyPr/>
+          <a:lstStyle/>
+          <a:p>
+            <a:endParaRPr lang="en-US"/>
+          </a:p>
+        </p:txBody>
       </p:sp>
       <p:sp>
         <p:nvSpPr>
@@ -15307,7 +17133,7 @@
           <a:bodyPr wrap="square" lIns="0" tIns="0" rIns="0" bIns="0" rtlCol="0" anchor="ctr"/>
           <a:lstStyle/>
           <a:p>
-            <a:pPr indent="0" marL="0">
+            <a:pPr marL="0" indent="0">
               <a:buNone/>
             </a:pPr>
             <a:r>
@@ -15346,7 +17172,7 @@
           <a:bodyPr wrap="square" lIns="0" tIns="0" rIns="0" bIns="0" rtlCol="0" anchor="ctr"/>
           <a:lstStyle/>
           <a:p>
-            <a:pPr algn="r" indent="0" marL="0">
+            <a:pPr marL="0" indent="0" algn="r">
               <a:buNone/>
             </a:pPr>
             <a:r>
@@ -15388,13 +17214,20 @@
             <a:prstDash val="solid"/>
           </a:ln>
           <a:effectLst>
-            <a:outerShdw sx="100000" sy="100000" kx="0" ky="0" algn="bl" rotWithShape="0" blurRad="88900" dist="38100" dir="8100000">
+            <a:outerShdw blurRad="88900" dist="38100" dir="8100000" algn="bl" rotWithShape="0">
               <a:srgbClr val="1C2440">
                 <a:alpha val="13000"/>
               </a:srgbClr>
             </a:outerShdw>
           </a:effectLst>
         </p:spPr>
+        <p:txBody>
+          <a:bodyPr/>
+          <a:lstStyle/>
+          <a:p>
+            <a:endParaRPr lang="en-US"/>
+          </a:p>
+        </p:txBody>
       </p:sp>
       <p:sp>
         <p:nvSpPr>
@@ -15415,6 +17248,13 @@
           </a:solidFill>
           <a:ln/>
         </p:spPr>
+        <p:txBody>
+          <a:bodyPr/>
+          <a:lstStyle/>
+          <a:p>
+            <a:endParaRPr lang="en-US"/>
+          </a:p>
+        </p:txBody>
       </p:sp>
       <p:sp>
         <p:nvSpPr>
@@ -15437,11 +17277,11 @@
           <a:bodyPr wrap="square" lIns="0" tIns="0" rIns="0" bIns="0" rtlCol="0" anchor="ctr"/>
           <a:lstStyle/>
           <a:p>
-            <a:pPr indent="0" marL="0">
+            <a:pPr marL="0" indent="0">
               <a:buNone/>
             </a:pPr>
             <a:r>
-              <a:rPr lang="en-US" sz="1300" b="1" spc="200" kern="0" dirty="0">
+              <a:rPr lang="en-US" sz="1300" b="1" kern="0" spc="200" dirty="0">
                 <a:solidFill>
                   <a:srgbClr val="FFFFFF"/>
                 </a:solidFill>
@@ -15564,13 +17404,20 @@
             <a:prstDash val="solid"/>
           </a:ln>
           <a:effectLst>
-            <a:outerShdw sx="100000" sy="100000" kx="0" ky="0" algn="bl" rotWithShape="0" blurRad="88900" dist="38100" dir="8100000">
+            <a:outerShdw blurRad="88900" dist="38100" dir="8100000" algn="bl" rotWithShape="0">
               <a:srgbClr val="1C2440">
                 <a:alpha val="13000"/>
               </a:srgbClr>
             </a:outerShdw>
           </a:effectLst>
         </p:spPr>
+        <p:txBody>
+          <a:bodyPr/>
+          <a:lstStyle/>
+          <a:p>
+            <a:endParaRPr lang="en-US"/>
+          </a:p>
+        </p:txBody>
       </p:sp>
       <p:sp>
         <p:nvSpPr>
@@ -15591,6 +17438,13 @@
           </a:solidFill>
           <a:ln/>
         </p:spPr>
+        <p:txBody>
+          <a:bodyPr/>
+          <a:lstStyle/>
+          <a:p>
+            <a:endParaRPr lang="en-US"/>
+          </a:p>
+        </p:txBody>
       </p:sp>
       <p:sp>
         <p:nvSpPr>
@@ -15613,11 +17467,11 @@
           <a:bodyPr wrap="square" lIns="0" tIns="0" rIns="0" bIns="0" rtlCol="0" anchor="ctr"/>
           <a:lstStyle/>
           <a:p>
-            <a:pPr indent="0" marL="0">
+            <a:pPr marL="0" indent="0">
               <a:buNone/>
             </a:pPr>
             <a:r>
-              <a:rPr lang="en-US" sz="1300" b="1" spc="200" kern="0" dirty="0">
+              <a:rPr lang="en-US" sz="1300" b="1" kern="0" spc="200" dirty="0">
                 <a:solidFill>
                   <a:srgbClr val="0F1F2B"/>
                 </a:solidFill>
@@ -15735,6 +17589,13 @@
           </a:solidFill>
           <a:ln/>
         </p:spPr>
+        <p:txBody>
+          <a:bodyPr/>
+          <a:lstStyle/>
+          <a:p>
+            <a:endParaRPr lang="en-US"/>
+          </a:p>
+        </p:txBody>
       </p:sp>
       <p:sp>
         <p:nvSpPr>
@@ -15755,6 +17616,13 @@
           </a:solidFill>
           <a:ln/>
         </p:spPr>
+        <p:txBody>
+          <a:bodyPr/>
+          <a:lstStyle/>
+          <a:p>
+            <a:endParaRPr lang="en-US"/>
+          </a:p>
+        </p:txBody>
       </p:sp>
       <p:sp>
         <p:nvSpPr>
@@ -15777,11 +17645,11 @@
           <a:bodyPr wrap="square" lIns="0" tIns="0" rIns="0" bIns="0" rtlCol="0" anchor="ctr"/>
           <a:lstStyle/>
           <a:p>
-            <a:pPr indent="0" marL="0">
+            <a:pPr marL="0" indent="0">
               <a:buNone/>
             </a:pPr>
             <a:r>
-              <a:rPr lang="en-US" sz="1050" b="1" spc="100" kern="0" dirty="0">
+              <a:rPr lang="en-US" sz="1050" b="1" kern="0" spc="100" dirty="0">
                 <a:solidFill>
                   <a:srgbClr val="D97706"/>
                 </a:solidFill>
@@ -15791,9 +17659,6 @@
               </a:rPr>
               <a:t>WHY IT MATTERS   </a:t>
             </a:r>
-            <a:pPr indent="0" marL="0">
-              <a:buNone/>
-            </a:pPr>
             <a:r>
               <a:rPr lang="en-US" sz="1200" dirty="0">
                 <a:solidFill>
@@ -15825,6 +17690,7 @@
         <a:solidFill>
           <a:srgbClr val="0F1F2B"/>
         </a:solidFill>
+        <a:effectLst/>
       </p:bgPr>
     </p:bg>
     <p:spTree>
@@ -15862,11 +17728,11 @@
           <a:bodyPr wrap="square" lIns="0" tIns="0" rIns="0" bIns="0" rtlCol="0" anchor="ctr"/>
           <a:lstStyle/>
           <a:p>
-            <a:pPr indent="0" marL="0">
+            <a:pPr marL="0" indent="0">
               <a:buNone/>
             </a:pPr>
             <a:r>
-              <a:rPr lang="en-US" sz="1050" b="1" spc="200" kern="0" dirty="0">
+              <a:rPr lang="en-US" sz="1050" b="1" kern="0" spc="200" dirty="0">
                 <a:solidFill>
                   <a:srgbClr val="D97706"/>
                 </a:solidFill>
@@ -15899,17 +17765,24 @@
           </a:solidFill>
           <a:ln/>
         </p:spPr>
+        <p:txBody>
+          <a:bodyPr/>
+          <a:lstStyle/>
+          <a:p>
+            <a:endParaRPr lang="en-US"/>
+          </a:p>
+        </p:txBody>
       </p:sp>
       <p:pic>
         <p:nvPicPr>
-          <p:cNvPr id="4" name="Image 0" descr="preencoded.png">    </p:cNvPr>
+          <p:cNvPr id="4" name="Image 0" descr="preencoded.png"/>
           <p:cNvPicPr>
             <a:picLocks noChangeAspect="1"/>
           </p:cNvPicPr>
           <p:nvPr/>
         </p:nvPicPr>
         <p:blipFill>
-          <a:blip r:embed="rId1"/>
+          <a:blip r:embed="rId3"/>
           <a:stretch>
             <a:fillRect/>
           </a:stretch>
@@ -15945,7 +17818,7 @@
           <a:bodyPr wrap="square" lIns="0" tIns="0" rIns="0" bIns="0" rtlCol="0" anchor="ctr"/>
           <a:lstStyle/>
           <a:p>
-            <a:pPr indent="0" marL="0">
+            <a:pPr marL="0" indent="0">
               <a:buNone/>
             </a:pPr>
             <a:r>
@@ -15984,7 +17857,7 @@
           <a:bodyPr wrap="square" lIns="0" tIns="0" rIns="0" bIns="0" rtlCol="0" anchor="t"/>
           <a:lstStyle/>
           <a:p>
-            <a:pPr indent="0" marL="0">
+            <a:pPr marL="0" indent="0">
               <a:buNone/>
             </a:pPr>
             <a:r>
@@ -16001,7 +17874,7 @@
             <a:endParaRPr lang="en-US" sz="3000" dirty="0"/>
           </a:p>
           <a:p>
-            <a:pPr indent="0" marL="0">
+            <a:pPr marL="0" indent="0">
               <a:buNone/>
             </a:pPr>
             <a:r>
@@ -16038,6 +17911,13 @@
           </a:solidFill>
           <a:ln/>
         </p:spPr>
+        <p:txBody>
+          <a:bodyPr/>
+          <a:lstStyle/>
+          <a:p>
+            <a:endParaRPr lang="en-US"/>
+          </a:p>
+        </p:txBody>
       </p:sp>
       <p:sp>
         <p:nvSpPr>
@@ -16058,6 +17938,13 @@
           </a:solidFill>
           <a:ln/>
         </p:spPr>
+        <p:txBody>
+          <a:bodyPr/>
+          <a:lstStyle/>
+          <a:p>
+            <a:endParaRPr lang="en-US"/>
+          </a:p>
+        </p:txBody>
       </p:sp>
       <p:sp>
         <p:nvSpPr>
@@ -16080,7 +17967,7 @@
           <a:bodyPr wrap="square" lIns="0" tIns="0" rIns="0" bIns="0" rtlCol="0" anchor="ctr"/>
           <a:lstStyle/>
           <a:p>
-            <a:pPr indent="0" marL="0">
+            <a:pPr marL="0" indent="0">
               <a:buNone/>
             </a:pPr>
             <a:r>
@@ -16094,9 +17981,6 @@
               </a:rPr>
               <a:t>The symptoms follow from the two gaps.   </a:t>
             </a:r>
-            <a:pPr indent="0" marL="0">
-              <a:buNone/>
-            </a:pPr>
             <a:r>
               <a:rPr lang="en-US" sz="1250" dirty="0">
                 <a:solidFill>
@@ -16131,6 +18015,13 @@
           </a:solidFill>
           <a:ln/>
         </p:spPr>
+        <p:txBody>
+          <a:bodyPr/>
+          <a:lstStyle/>
+          <a:p>
+            <a:endParaRPr lang="en-US"/>
+          </a:p>
+        </p:txBody>
       </p:sp>
       <p:sp>
         <p:nvSpPr>
@@ -16151,6 +18042,13 @@
           </a:solidFill>
           <a:ln/>
         </p:spPr>
+        <p:txBody>
+          <a:bodyPr/>
+          <a:lstStyle/>
+          <a:p>
+            <a:endParaRPr lang="en-US"/>
+          </a:p>
+        </p:txBody>
       </p:sp>
       <p:sp>
         <p:nvSpPr>
@@ -16173,7 +18071,7 @@
           <a:bodyPr wrap="square" lIns="0" tIns="0" rIns="0" bIns="0" rtlCol="0" anchor="ctr"/>
           <a:lstStyle/>
           <a:p>
-            <a:pPr indent="0" marL="0">
+            <a:pPr marL="0" indent="0">
               <a:buNone/>
             </a:pPr>
             <a:r>
@@ -16187,9 +18085,6 @@
               </a:rPr>
               <a:t>This is not a routing-algorithm problem.   </a:t>
             </a:r>
-            <a:pPr indent="0" marL="0">
-              <a:buNone/>
-            </a:pPr>
             <a:r>
               <a:rPr lang="en-US" sz="1250" dirty="0">
                 <a:solidFill>
@@ -16224,6 +18119,13 @@
           </a:solidFill>
           <a:ln/>
         </p:spPr>
+        <p:txBody>
+          <a:bodyPr/>
+          <a:lstStyle/>
+          <a:p>
+            <a:endParaRPr lang="en-US"/>
+          </a:p>
+        </p:txBody>
       </p:sp>
       <p:sp>
         <p:nvSpPr>
@@ -16244,6 +18146,13 @@
           </a:solidFill>
           <a:ln/>
         </p:spPr>
+        <p:txBody>
+          <a:bodyPr/>
+          <a:lstStyle/>
+          <a:p>
+            <a:endParaRPr lang="en-US"/>
+          </a:p>
+        </p:txBody>
       </p:sp>
       <p:sp>
         <p:nvSpPr>
@@ -16266,11 +18175,11 @@
           <a:bodyPr wrap="square" lIns="0" tIns="0" rIns="0" bIns="0" rtlCol="0" anchor="ctr"/>
           <a:lstStyle/>
           <a:p>
-            <a:pPr indent="0" marL="0">
+            <a:pPr marL="0" indent="0">
               <a:buNone/>
             </a:pPr>
             <a:r>
-              <a:rPr lang="en-US" sz="1100" b="1" spc="100" kern="0" dirty="0">
+              <a:rPr lang="en-US" sz="1100" b="1" kern="0" spc="100" dirty="0">
                 <a:solidFill>
                   <a:srgbClr val="D97706"/>
                 </a:solidFill>
@@ -16280,9 +18189,6 @@
               </a:rPr>
               <a:t>IN YOUR WORDS   </a:t>
             </a:r>
-            <a:pPr indent="0" marL="0">
-              <a:buNone/>
-            </a:pPr>
             <a:r>
               <a:rPr lang="en-US" sz="1250" i="1" dirty="0">
                 <a:solidFill>
@@ -16314,6 +18220,7 @@
         <a:solidFill>
           <a:srgbClr val="FFFFFF"/>
         </a:solidFill>
+        <a:effectLst/>
       </p:bgPr>
     </p:bg>
     <p:spTree>
@@ -16351,11 +18258,11 @@
           <a:bodyPr wrap="square" lIns="0" tIns="0" rIns="0" bIns="0" rtlCol="0" anchor="ctr"/>
           <a:lstStyle/>
           <a:p>
-            <a:pPr indent="0" marL="0">
+            <a:pPr marL="0" indent="0">
               <a:buNone/>
             </a:pPr>
             <a:r>
-              <a:rPr lang="en-US" sz="1050" b="1" spc="200" kern="0" dirty="0">
+              <a:rPr lang="en-US" sz="1050" b="1" kern="0" spc="200" dirty="0">
                 <a:solidFill>
                   <a:srgbClr val="6B7C86"/>
                 </a:solidFill>
@@ -16388,17 +18295,24 @@
           </a:solidFill>
           <a:ln/>
         </p:spPr>
+        <p:txBody>
+          <a:bodyPr/>
+          <a:lstStyle/>
+          <a:p>
+            <a:endParaRPr lang="en-US"/>
+          </a:p>
+        </p:txBody>
       </p:sp>
       <p:pic>
         <p:nvPicPr>
-          <p:cNvPr id="4" name="Image 0" descr="preencoded.png">    </p:cNvPr>
+          <p:cNvPr id="4" name="Image 0" descr="preencoded.png"/>
           <p:cNvPicPr>
             <a:picLocks noChangeAspect="1"/>
           </p:cNvPicPr>
           <p:nvPr/>
         </p:nvPicPr>
         <p:blipFill>
-          <a:blip r:embed="rId1"/>
+          <a:blip r:embed="rId3"/>
           <a:stretch>
             <a:fillRect/>
           </a:stretch>
@@ -16434,7 +18348,7 @@
           <a:bodyPr wrap="square" lIns="0" tIns="0" rIns="0" bIns="0" rtlCol="0" anchor="ctr"/>
           <a:lstStyle/>
           <a:p>
-            <a:pPr indent="0" marL="0">
+            <a:pPr marL="0" indent="0">
               <a:buNone/>
             </a:pPr>
             <a:r>
@@ -16471,6 +18385,13 @@
           </a:solidFill>
           <a:ln/>
         </p:spPr>
+        <p:txBody>
+          <a:bodyPr/>
+          <a:lstStyle/>
+          <a:p>
+            <a:endParaRPr lang="en-US"/>
+          </a:p>
+        </p:txBody>
       </p:sp>
       <p:sp>
         <p:nvSpPr>
@@ -16491,6 +18412,13 @@
           </a:solidFill>
           <a:ln/>
         </p:spPr>
+        <p:txBody>
+          <a:bodyPr/>
+          <a:lstStyle/>
+          <a:p>
+            <a:endParaRPr lang="en-US"/>
+          </a:p>
+        </p:txBody>
       </p:sp>
       <p:sp>
         <p:nvSpPr>
@@ -16513,11 +18441,11 @@
           <a:bodyPr wrap="square" lIns="0" tIns="0" rIns="0" bIns="0" rtlCol="0" anchor="ctr"/>
           <a:lstStyle/>
           <a:p>
-            <a:pPr indent="0" marL="0">
+            <a:pPr marL="0" indent="0">
               <a:buNone/>
             </a:pPr>
             <a:r>
-              <a:rPr lang="en-US" sz="1050" b="1" spc="100" kern="0" dirty="0">
+              <a:rPr lang="en-US" sz="1050" b="1" kern="0" spc="100" dirty="0">
                 <a:solidFill>
                   <a:srgbClr val="D97706"/>
                 </a:solidFill>
@@ -16527,9 +18455,6 @@
               </a:rPr>
               <a:t>TAKEAWAY   </a:t>
             </a:r>
-            <a:pPr indent="0" marL="0">
-              <a:buNone/>
-            </a:pPr>
             <a:r>
               <a:rPr lang="en-US" sz="1300" dirty="0">
                 <a:solidFill>
@@ -16567,6 +18492,13 @@
             <a:prstDash val="solid"/>
           </a:ln>
         </p:spPr>
+        <p:txBody>
+          <a:bodyPr/>
+          <a:lstStyle/>
+          <a:p>
+            <a:endParaRPr lang="en-US"/>
+          </a:p>
+        </p:txBody>
       </p:sp>
       <p:sp>
         <p:nvSpPr>
@@ -16589,7 +18521,7 @@
           <a:bodyPr wrap="square" lIns="0" tIns="0" rIns="0" bIns="0" rtlCol="0" anchor="ctr"/>
           <a:lstStyle/>
           <a:p>
-            <a:pPr indent="0" marL="0">
+            <a:pPr marL="0" indent="0">
               <a:buNone/>
             </a:pPr>
             <a:r>
@@ -16628,7 +18560,7 @@
           <a:bodyPr wrap="square" lIns="0" tIns="0" rIns="0" bIns="0" rtlCol="0" anchor="ctr"/>
           <a:lstStyle/>
           <a:p>
-            <a:pPr algn="r" indent="0" marL="0">
+            <a:pPr marL="0" indent="0" algn="r">
               <a:buNone/>
             </a:pPr>
             <a:r>
@@ -16670,13 +18602,20 @@
             <a:prstDash val="solid"/>
           </a:ln>
           <a:effectLst>
-            <a:outerShdw sx="100000" sy="100000" kx="0" ky="0" algn="bl" rotWithShape="0" blurRad="88900" dist="38100" dir="8100000">
+            <a:outerShdw blurRad="88900" dist="38100" dir="8100000" algn="bl" rotWithShape="0">
               <a:srgbClr val="1C2440">
                 <a:alpha val="13000"/>
               </a:srgbClr>
             </a:outerShdw>
           </a:effectLst>
         </p:spPr>
+        <p:txBody>
+          <a:bodyPr/>
+          <a:lstStyle/>
+          <a:p>
+            <a:endParaRPr lang="en-US"/>
+          </a:p>
+        </p:txBody>
       </p:sp>
       <p:sp>
         <p:nvSpPr>
@@ -16697,6 +18636,13 @@
           </a:solidFill>
           <a:ln/>
         </p:spPr>
+        <p:txBody>
+          <a:bodyPr/>
+          <a:lstStyle/>
+          <a:p>
+            <a:endParaRPr lang="en-US"/>
+          </a:p>
+        </p:txBody>
       </p:sp>
       <p:sp>
         <p:nvSpPr>
@@ -16719,7 +18665,7 @@
           <a:bodyPr wrap="square" lIns="0" tIns="0" rIns="0" bIns="0" rtlCol="0" anchor="ctr"/>
           <a:lstStyle/>
           <a:p>
-            <a:pPr indent="0" marL="0">
+            <a:pPr marL="0" indent="0">
               <a:buNone/>
             </a:pPr>
             <a:r>
@@ -16758,7 +18704,7 @@
           <a:bodyPr wrap="square" lIns="0" tIns="0" rIns="0" bIns="0" rtlCol="0" anchor="ctr"/>
           <a:lstStyle/>
           <a:p>
-            <a:pPr indent="0" marL="0">
+            <a:pPr marL="0" indent="0">
               <a:buNone/>
             </a:pPr>
             <a:r>
@@ -16885,13 +18831,20 @@
             <a:prstDash val="solid"/>
           </a:ln>
           <a:effectLst>
-            <a:outerShdw sx="100000" sy="100000" kx="0" ky="0" algn="bl" rotWithShape="0" blurRad="88900" dist="38100" dir="8100000">
+            <a:outerShdw blurRad="88900" dist="38100" dir="8100000" algn="bl" rotWithShape="0">
               <a:srgbClr val="1C2440">
                 <a:alpha val="13000"/>
               </a:srgbClr>
             </a:outerShdw>
           </a:effectLst>
         </p:spPr>
+        <p:txBody>
+          <a:bodyPr/>
+          <a:lstStyle/>
+          <a:p>
+            <a:endParaRPr lang="en-US"/>
+          </a:p>
+        </p:txBody>
       </p:sp>
       <p:sp>
         <p:nvSpPr>
@@ -16912,6 +18865,13 @@
           </a:solidFill>
           <a:ln/>
         </p:spPr>
+        <p:txBody>
+          <a:bodyPr/>
+          <a:lstStyle/>
+          <a:p>
+            <a:endParaRPr lang="en-US"/>
+          </a:p>
+        </p:txBody>
       </p:sp>
       <p:sp>
         <p:nvSpPr>
@@ -16934,7 +18894,7 @@
           <a:bodyPr wrap="square" lIns="0" tIns="0" rIns="0" bIns="0" rtlCol="0" anchor="ctr"/>
           <a:lstStyle/>
           <a:p>
-            <a:pPr indent="0" marL="0">
+            <a:pPr marL="0" indent="0">
               <a:buNone/>
             </a:pPr>
             <a:r>
@@ -16973,7 +18933,7 @@
           <a:bodyPr wrap="square" lIns="0" tIns="0" rIns="0" bIns="0" rtlCol="0" anchor="ctr"/>
           <a:lstStyle/>
           <a:p>
-            <a:pPr indent="0" marL="0">
+            <a:pPr marL="0" indent="0">
               <a:buNone/>
             </a:pPr>
             <a:r>
@@ -17100,13 +19060,20 @@
             <a:prstDash val="solid"/>
           </a:ln>
           <a:effectLst>
-            <a:outerShdw sx="100000" sy="100000" kx="0" ky="0" algn="bl" rotWithShape="0" blurRad="88900" dist="38100" dir="8100000">
+            <a:outerShdw blurRad="88900" dist="38100" dir="8100000" algn="bl" rotWithShape="0">
               <a:srgbClr val="1C2440">
                 <a:alpha val="13000"/>
               </a:srgbClr>
             </a:outerShdw>
           </a:effectLst>
         </p:spPr>
+        <p:txBody>
+          <a:bodyPr/>
+          <a:lstStyle/>
+          <a:p>
+            <a:endParaRPr lang="en-US"/>
+          </a:p>
+        </p:txBody>
       </p:sp>
       <p:sp>
         <p:nvSpPr>
@@ -17127,6 +19094,13 @@
           </a:solidFill>
           <a:ln/>
         </p:spPr>
+        <p:txBody>
+          <a:bodyPr/>
+          <a:lstStyle/>
+          <a:p>
+            <a:endParaRPr lang="en-US"/>
+          </a:p>
+        </p:txBody>
       </p:sp>
       <p:sp>
         <p:nvSpPr>
@@ -17149,7 +19123,7 @@
           <a:bodyPr wrap="square" lIns="0" tIns="0" rIns="0" bIns="0" rtlCol="0" anchor="ctr"/>
           <a:lstStyle/>
           <a:p>
-            <a:pPr indent="0" marL="0">
+            <a:pPr marL="0" indent="0">
               <a:buNone/>
             </a:pPr>
             <a:r>
@@ -17188,7 +19162,7 @@
           <a:bodyPr wrap="square" lIns="0" tIns="0" rIns="0" bIns="0" rtlCol="0" anchor="ctr"/>
           <a:lstStyle/>
           <a:p>
-            <a:pPr indent="0" marL="0">
+            <a:pPr marL="0" indent="0">
               <a:buNone/>
             </a:pPr>
             <a:r>
@@ -17310,6 +19284,13 @@
           </a:solidFill>
           <a:ln/>
         </p:spPr>
+        <p:txBody>
+          <a:bodyPr/>
+          <a:lstStyle/>
+          <a:p>
+            <a:endParaRPr lang="en-US"/>
+          </a:p>
+        </p:txBody>
       </p:sp>
       <p:sp>
         <p:nvSpPr>
@@ -17330,6 +19311,13 @@
           </a:solidFill>
           <a:ln/>
         </p:spPr>
+        <p:txBody>
+          <a:bodyPr/>
+          <a:lstStyle/>
+          <a:p>
+            <a:endParaRPr lang="en-US"/>
+          </a:p>
+        </p:txBody>
       </p:sp>
       <p:sp>
         <p:nvSpPr>
@@ -17352,11 +19340,11 @@
           <a:bodyPr wrap="square" lIns="0" tIns="0" rIns="0" bIns="0" rtlCol="0" anchor="ctr"/>
           <a:lstStyle/>
           <a:p>
-            <a:pPr indent="0" marL="0">
+            <a:pPr marL="0" indent="0">
               <a:buNone/>
             </a:pPr>
             <a:r>
-              <a:rPr lang="en-US" sz="1050" b="1" spc="100" kern="0" dirty="0">
+              <a:rPr lang="en-US" sz="1050" b="1" kern="0" spc="100" dirty="0">
                 <a:solidFill>
                   <a:srgbClr val="D97706"/>
                 </a:solidFill>
@@ -17366,9 +19354,6 @@
               </a:rPr>
               <a:t>SEQUENCE   </a:t>
             </a:r>
-            <a:pPr indent="0" marL="0">
-              <a:buNone/>
-            </a:pPr>
             <a:r>
               <a:rPr lang="en-US" sz="1200" dirty="0">
                 <a:solidFill>
@@ -17400,6 +19385,7 @@
         <a:solidFill>
           <a:srgbClr val="FFFFFF"/>
         </a:solidFill>
+        <a:effectLst/>
       </p:bgPr>
     </p:bg>
     <p:spTree>
@@ -17437,11 +19423,11 @@
           <a:bodyPr wrap="square" lIns="0" tIns="0" rIns="0" bIns="0" rtlCol="0" anchor="ctr"/>
           <a:lstStyle/>
           <a:p>
-            <a:pPr indent="0" marL="0">
+            <a:pPr marL="0" indent="0">
               <a:buNone/>
             </a:pPr>
             <a:r>
-              <a:rPr lang="en-US" sz="1050" b="1" spc="200" kern="0" dirty="0">
+              <a:rPr lang="en-US" sz="1050" b="1" kern="0" spc="200" dirty="0">
                 <a:solidFill>
                   <a:srgbClr val="6B7C86"/>
                 </a:solidFill>
@@ -17474,17 +19460,24 @@
           </a:solidFill>
           <a:ln/>
         </p:spPr>
+        <p:txBody>
+          <a:bodyPr/>
+          <a:lstStyle/>
+          <a:p>
+            <a:endParaRPr lang="en-US"/>
+          </a:p>
+        </p:txBody>
       </p:sp>
       <p:pic>
         <p:nvPicPr>
-          <p:cNvPr id="4" name="Image 0" descr="preencoded.png">    </p:cNvPr>
+          <p:cNvPr id="4" name="Image 0" descr="preencoded.png"/>
           <p:cNvPicPr>
             <a:picLocks noChangeAspect="1"/>
           </p:cNvPicPr>
           <p:nvPr/>
         </p:nvPicPr>
         <p:blipFill>
-          <a:blip r:embed="rId1"/>
+          <a:blip r:embed="rId3"/>
           <a:stretch>
             <a:fillRect/>
           </a:stretch>
@@ -17520,7 +19513,7 @@
           <a:bodyPr wrap="square" lIns="0" tIns="0" rIns="0" bIns="0" rtlCol="0" anchor="ctr"/>
           <a:lstStyle/>
           <a:p>
-            <a:pPr indent="0" marL="0">
+            <a:pPr marL="0" indent="0">
               <a:buNone/>
             </a:pPr>
             <a:r>
@@ -17557,6 +19550,13 @@
           </a:solidFill>
           <a:ln/>
         </p:spPr>
+        <p:txBody>
+          <a:bodyPr/>
+          <a:lstStyle/>
+          <a:p>
+            <a:endParaRPr lang="en-US"/>
+          </a:p>
+        </p:txBody>
       </p:sp>
       <p:sp>
         <p:nvSpPr>
@@ -17577,6 +19577,13 @@
           </a:solidFill>
           <a:ln/>
         </p:spPr>
+        <p:txBody>
+          <a:bodyPr/>
+          <a:lstStyle/>
+          <a:p>
+            <a:endParaRPr lang="en-US"/>
+          </a:p>
+        </p:txBody>
       </p:sp>
       <p:sp>
         <p:nvSpPr>
@@ -17599,11 +19606,11 @@
           <a:bodyPr wrap="square" lIns="0" tIns="0" rIns="0" bIns="0" rtlCol="0" anchor="ctr"/>
           <a:lstStyle/>
           <a:p>
-            <a:pPr indent="0" marL="0">
+            <a:pPr marL="0" indent="0">
               <a:buNone/>
             </a:pPr>
             <a:r>
-              <a:rPr lang="en-US" sz="1050" b="1" spc="100" kern="0" dirty="0">
+              <a:rPr lang="en-US" sz="1050" b="1" kern="0" spc="100" dirty="0">
                 <a:solidFill>
                   <a:srgbClr val="D97706"/>
                 </a:solidFill>
@@ -17613,9 +19620,6 @@
               </a:rPr>
               <a:t>TAKEAWAY   </a:t>
             </a:r>
-            <a:pPr indent="0" marL="0">
-              <a:buNone/>
-            </a:pPr>
             <a:r>
               <a:rPr lang="en-US" sz="1300" dirty="0">
                 <a:solidFill>
@@ -17653,6 +19657,13 @@
             <a:prstDash val="solid"/>
           </a:ln>
         </p:spPr>
+        <p:txBody>
+          <a:bodyPr/>
+          <a:lstStyle/>
+          <a:p>
+            <a:endParaRPr lang="en-US"/>
+          </a:p>
+        </p:txBody>
       </p:sp>
       <p:sp>
         <p:nvSpPr>
@@ -17675,7 +19686,7 @@
           <a:bodyPr wrap="square" lIns="0" tIns="0" rIns="0" bIns="0" rtlCol="0" anchor="ctr"/>
           <a:lstStyle/>
           <a:p>
-            <a:pPr indent="0" marL="0">
+            <a:pPr marL="0" indent="0">
               <a:buNone/>
             </a:pPr>
             <a:r>
@@ -17714,7 +19725,7 @@
           <a:bodyPr wrap="square" lIns="0" tIns="0" rIns="0" bIns="0" rtlCol="0" anchor="ctr"/>
           <a:lstStyle/>
           <a:p>
-            <a:pPr algn="r" indent="0" marL="0">
+            <a:pPr marL="0" indent="0" algn="r">
               <a:buNone/>
             </a:pPr>
             <a:r>
@@ -17756,13 +19767,20 @@
             <a:prstDash val="solid"/>
           </a:ln>
           <a:effectLst>
-            <a:outerShdw sx="100000" sy="100000" kx="0" ky="0" algn="bl" rotWithShape="0" blurRad="88900" dist="38100" dir="8100000">
+            <a:outerShdw blurRad="88900" dist="38100" dir="8100000" algn="bl" rotWithShape="0">
               <a:srgbClr val="1C2440">
                 <a:alpha val="13000"/>
               </a:srgbClr>
             </a:outerShdw>
           </a:effectLst>
         </p:spPr>
+        <p:txBody>
+          <a:bodyPr/>
+          <a:lstStyle/>
+          <a:p>
+            <a:endParaRPr lang="en-US"/>
+          </a:p>
+        </p:txBody>
       </p:sp>
       <p:sp>
         <p:nvSpPr>
@@ -17785,7 +19803,7 @@
           <a:bodyPr wrap="square" lIns="0" tIns="0" rIns="0" bIns="0" rtlCol="0" anchor="ctr"/>
           <a:lstStyle/>
           <a:p>
-            <a:pPr indent="0" marL="0">
+            <a:pPr marL="0" indent="0">
               <a:buNone/>
             </a:pPr>
             <a:r>
@@ -17799,9 +19817,6 @@
               </a:rPr>
               <a:t>■ </a:t>
             </a:r>
-            <a:pPr indent="0" marL="0">
-              <a:buNone/>
-            </a:pPr>
             <a:r>
               <a:rPr lang="en-US" sz="1300" b="1" dirty="0">
                 <a:solidFill>
@@ -17942,13 +19957,20 @@
           </a:solidFill>
           <a:ln/>
           <a:effectLst>
-            <a:outerShdw sx="100000" sy="100000" kx="0" ky="0" algn="bl" rotWithShape="0" blurRad="88900" dist="38100" dir="8100000">
+            <a:outerShdw blurRad="88900" dist="38100" dir="8100000" algn="bl" rotWithShape="0">
               <a:srgbClr val="1C2440">
                 <a:alpha val="13000"/>
               </a:srgbClr>
             </a:outerShdw>
           </a:effectLst>
         </p:spPr>
+        <p:txBody>
+          <a:bodyPr/>
+          <a:lstStyle/>
+          <a:p>
+            <a:endParaRPr lang="en-US"/>
+          </a:p>
+        </p:txBody>
       </p:sp>
       <p:sp>
         <p:nvSpPr>
@@ -17971,7 +19993,7 @@
           <a:bodyPr wrap="square" lIns="0" tIns="0" rIns="0" bIns="0" rtlCol="0" anchor="ctr"/>
           <a:lstStyle/>
           <a:p>
-            <a:pPr indent="0" marL="0">
+            <a:pPr marL="0" indent="0">
               <a:buNone/>
             </a:pPr>
             <a:r>
@@ -17985,9 +20007,6 @@
               </a:rPr>
               <a:t>■ </a:t>
             </a:r>
-            <a:pPr indent="0" marL="0">
-              <a:buNone/>
-            </a:pPr>
             <a:r>
               <a:rPr lang="en-US" sz="1300" b="1" dirty="0">
                 <a:solidFill>
@@ -18128,6 +20147,13 @@
           </a:solidFill>
           <a:ln/>
         </p:spPr>
+        <p:txBody>
+          <a:bodyPr/>
+          <a:lstStyle/>
+          <a:p>
+            <a:endParaRPr lang="en-US"/>
+          </a:p>
+        </p:txBody>
       </p:sp>
       <p:sp>
         <p:nvSpPr>
@@ -18148,6 +20174,13 @@
           </a:solidFill>
           <a:ln/>
         </p:spPr>
+        <p:txBody>
+          <a:bodyPr/>
+          <a:lstStyle/>
+          <a:p>
+            <a:endParaRPr lang="en-US"/>
+          </a:p>
+        </p:txBody>
       </p:sp>
       <p:sp>
         <p:nvSpPr>
@@ -18170,11 +20203,11 @@
           <a:bodyPr wrap="square" lIns="0" tIns="0" rIns="0" bIns="0" rtlCol="0" anchor="ctr"/>
           <a:lstStyle/>
           <a:p>
-            <a:pPr indent="0" marL="0">
+            <a:pPr marL="0" indent="0">
               <a:buNone/>
             </a:pPr>
             <a:r>
-              <a:rPr lang="en-US" sz="1050" b="1" spc="100" kern="0" dirty="0">
+              <a:rPr lang="en-US" sz="1050" b="1" kern="0" spc="100" dirty="0">
                 <a:solidFill>
                   <a:srgbClr val="D97706"/>
                 </a:solidFill>
@@ -18184,9 +20217,6 @@
               </a:rPr>
               <a:t>IN YOUR WORDS   </a:t>
             </a:r>
-            <a:pPr indent="0" marL="0">
-              <a:buNone/>
-            </a:pPr>
             <a:r>
               <a:rPr lang="en-US" sz="1200" i="1" dirty="0">
                 <a:solidFill>
@@ -18503,4 +20533,319 @@
     </a:ext>
   </a:extLst>
 </a:theme>
+</file>
+
+<file path=ppt/theme/theme2.xml><?xml version="1.0" encoding="utf-8"?>
+<a:theme xmlns:a="http://schemas.openxmlformats.org/drawingml/2006/main" name="Office Theme">
+  <a:themeElements>
+    <a:clrScheme name="Office">
+      <a:dk1>
+        <a:sysClr val="windowText" lastClr="000000"/>
+      </a:dk1>
+      <a:lt1>
+        <a:sysClr val="window" lastClr="FFFFFF"/>
+      </a:lt1>
+      <a:dk2>
+        <a:srgbClr val="0E2841"/>
+      </a:dk2>
+      <a:lt2>
+        <a:srgbClr val="E8E8E8"/>
+      </a:lt2>
+      <a:accent1>
+        <a:srgbClr val="156082"/>
+      </a:accent1>
+      <a:accent2>
+        <a:srgbClr val="E97132"/>
+      </a:accent2>
+      <a:accent3>
+        <a:srgbClr val="196B24"/>
+      </a:accent3>
+      <a:accent4>
+        <a:srgbClr val="0F9ED5"/>
+      </a:accent4>
+      <a:accent5>
+        <a:srgbClr val="A02B93"/>
+      </a:accent5>
+      <a:accent6>
+        <a:srgbClr val="4EA72E"/>
+      </a:accent6>
+      <a:hlink>
+        <a:srgbClr val="467886"/>
+      </a:hlink>
+      <a:folHlink>
+        <a:srgbClr val="96607D"/>
+      </a:folHlink>
+    </a:clrScheme>
+    <a:fontScheme name="Office">
+      <a:majorFont>
+        <a:latin typeface="Aptos Display" panose="02110004020202020204"/>
+        <a:ea typeface=""/>
+        <a:cs typeface=""/>
+        <a:font script="Jpan" typeface="游ゴシック Light"/>
+        <a:font script="Hang" typeface="맑은 고딕"/>
+        <a:font script="Hans" typeface="等线 Light"/>
+        <a:font script="Hant" typeface="新細明體"/>
+        <a:font script="Arab" typeface="Times New Roman"/>
+        <a:font script="Hebr" typeface="Times New Roman"/>
+        <a:font script="Thai" typeface="Angsana New"/>
+        <a:font script="Ethi" typeface="Nyala"/>
+        <a:font script="Beng" typeface="Vrinda"/>
+        <a:font script="Gujr" typeface="Shruti"/>
+        <a:font script="Khmr" typeface="MoolBoran"/>
+        <a:font script="Knda" typeface="Tunga"/>
+        <a:font script="Guru" typeface="Raavi"/>
+        <a:font script="Cans" typeface="Euphemia"/>
+        <a:font script="Cher" typeface="Plantagenet Cherokee"/>
+        <a:font script="Yiii" typeface="Microsoft Yi Baiti"/>
+        <a:font script="Tibt" typeface="Microsoft Himalaya"/>
+        <a:font script="Thaa" typeface="MV Boli"/>
+        <a:font script="Deva" typeface="Mangal"/>
+        <a:font script="Telu" typeface="Gautami"/>
+        <a:font script="Taml" typeface="Latha"/>
+        <a:font script="Syrc" typeface="Estrangelo Edessa"/>
+        <a:font script="Orya" typeface="Kalinga"/>
+        <a:font script="Mlym" typeface="Kartika"/>
+        <a:font script="Laoo" typeface="DokChampa"/>
+        <a:font script="Sinh" typeface="Iskoola Pota"/>
+        <a:font script="Mong" typeface="Mongolian Baiti"/>
+        <a:font script="Viet" typeface="Times New Roman"/>
+        <a:font script="Uigh" typeface="Microsoft Uighur"/>
+        <a:font script="Geor" typeface="Sylfaen"/>
+        <a:font script="Armn" typeface="Arial"/>
+        <a:font script="Bugi" typeface="Leelawadee UI"/>
+        <a:font script="Bopo" typeface="Microsoft JhengHei"/>
+        <a:font script="Java" typeface="Javanese Text"/>
+        <a:font script="Lisu" typeface="Segoe UI"/>
+        <a:font script="Mymr" typeface="Myanmar Text"/>
+        <a:font script="Nkoo" typeface="Ebrima"/>
+        <a:font script="Olck" typeface="Nirmala UI"/>
+        <a:font script="Osma" typeface="Ebrima"/>
+        <a:font script="Phag" typeface="Phagspa"/>
+        <a:font script="Syrn" typeface="Estrangelo Edessa"/>
+        <a:font script="Syrj" typeface="Estrangelo Edessa"/>
+        <a:font script="Syre" typeface="Estrangelo Edessa"/>
+        <a:font script="Sora" typeface="Nirmala UI"/>
+        <a:font script="Tale" typeface="Microsoft Tai Le"/>
+        <a:font script="Talu" typeface="Microsoft New Tai Lue"/>
+        <a:font script="Tfng" typeface="Ebrima"/>
+      </a:majorFont>
+      <a:minorFont>
+        <a:latin typeface="Aptos" panose="02110004020202020204"/>
+        <a:ea typeface=""/>
+        <a:cs typeface=""/>
+        <a:font script="Jpan" typeface="游ゴシック"/>
+        <a:font script="Hang" typeface="맑은 고딕"/>
+        <a:font script="Hans" typeface="等线"/>
+        <a:font script="Hant" typeface="新細明體"/>
+        <a:font script="Arab" typeface="Arial"/>
+        <a:font script="Hebr" typeface="Arial"/>
+        <a:font script="Thai" typeface="Cordia New"/>
+        <a:font script="Ethi" typeface="Nyala"/>
+        <a:font script="Beng" typeface="Vrinda"/>
+        <a:font script="Gujr" typeface="Shruti"/>
+        <a:font script="Khmr" typeface="DaunPenh"/>
+        <a:font script="Knda" typeface="Tunga"/>
+        <a:font script="Guru" typeface="Raavi"/>
+        <a:font script="Cans" typeface="Euphemia"/>
+        <a:font script="Cher" typeface="Plantagenet Cherokee"/>
+        <a:font script="Yiii" typeface="Microsoft Yi Baiti"/>
+        <a:font script="Tibt" typeface="Microsoft Himalaya"/>
+        <a:font script="Thaa" typeface="MV Boli"/>
+        <a:font script="Deva" typeface="Mangal"/>
+        <a:font script="Telu" typeface="Gautami"/>
+        <a:font script="Taml" typeface="Latha"/>
+        <a:font script="Syrc" typeface="Estrangelo Edessa"/>
+        <a:font script="Orya" typeface="Kalinga"/>
+        <a:font script="Mlym" typeface="Kartika"/>
+        <a:font script="Laoo" typeface="DokChampa"/>
+        <a:font script="Sinh" typeface="Iskoola Pota"/>
+        <a:font script="Mong" typeface="Mongolian Baiti"/>
+        <a:font script="Viet" typeface="Arial"/>
+        <a:font script="Uigh" typeface="Microsoft Uighur"/>
+        <a:font script="Geor" typeface="Sylfaen"/>
+        <a:font script="Armn" typeface="Arial"/>
+        <a:font script="Bugi" typeface="Leelawadee UI"/>
+        <a:font script="Bopo" typeface="Microsoft JhengHei"/>
+        <a:font script="Java" typeface="Javanese Text"/>
+        <a:font script="Lisu" typeface="Segoe UI"/>
+        <a:font script="Mymr" typeface="Myanmar Text"/>
+        <a:font script="Nkoo" typeface="Ebrima"/>
+        <a:font script="Olck" typeface="Nirmala UI"/>
+        <a:font script="Osma" typeface="Ebrima"/>
+        <a:font script="Phag" typeface="Phagspa"/>
+        <a:font script="Syrn" typeface="Estrangelo Edessa"/>
+        <a:font script="Syrj" typeface="Estrangelo Edessa"/>
+        <a:font script="Syre" typeface="Estrangelo Edessa"/>
+        <a:font script="Sora" typeface="Nirmala UI"/>
+        <a:font script="Tale" typeface="Microsoft Tai Le"/>
+        <a:font script="Talu" typeface="Microsoft New Tai Lue"/>
+        <a:font script="Tfng" typeface="Ebrima"/>
+      </a:minorFont>
+    </a:fontScheme>
+    <a:fmtScheme name="Office">
+      <a:fillStyleLst>
+        <a:solidFill>
+          <a:schemeClr val="phClr"/>
+        </a:solidFill>
+        <a:gradFill rotWithShape="1">
+          <a:gsLst>
+            <a:gs pos="0">
+              <a:schemeClr val="phClr">
+                <a:lumMod val="110000"/>
+                <a:satMod val="105000"/>
+                <a:tint val="67000"/>
+              </a:schemeClr>
+            </a:gs>
+            <a:gs pos="50000">
+              <a:schemeClr val="phClr">
+                <a:lumMod val="105000"/>
+                <a:satMod val="103000"/>
+                <a:tint val="73000"/>
+              </a:schemeClr>
+            </a:gs>
+            <a:gs pos="100000">
+              <a:schemeClr val="phClr">
+                <a:lumMod val="105000"/>
+                <a:satMod val="109000"/>
+                <a:tint val="81000"/>
+              </a:schemeClr>
+            </a:gs>
+          </a:gsLst>
+          <a:lin ang="5400000" scaled="0"/>
+        </a:gradFill>
+        <a:gradFill rotWithShape="1">
+          <a:gsLst>
+            <a:gs pos="0">
+              <a:schemeClr val="phClr">
+                <a:satMod val="103000"/>
+                <a:lumMod val="102000"/>
+                <a:tint val="94000"/>
+              </a:schemeClr>
+            </a:gs>
+            <a:gs pos="50000">
+              <a:schemeClr val="phClr">
+                <a:satMod val="110000"/>
+                <a:lumMod val="100000"/>
+                <a:shade val="100000"/>
+              </a:schemeClr>
+            </a:gs>
+            <a:gs pos="100000">
+              <a:schemeClr val="phClr">
+                <a:lumMod val="99000"/>
+                <a:satMod val="120000"/>
+                <a:shade val="78000"/>
+              </a:schemeClr>
+            </a:gs>
+          </a:gsLst>
+          <a:lin ang="5400000" scaled="0"/>
+        </a:gradFill>
+      </a:fillStyleLst>
+      <a:lnStyleLst>
+        <a:ln w="12700" cap="flat" cmpd="sng" algn="ctr">
+          <a:solidFill>
+            <a:schemeClr val="phClr"/>
+          </a:solidFill>
+          <a:prstDash val="solid"/>
+          <a:miter lim="800000"/>
+        </a:ln>
+        <a:ln w="19050" cap="flat" cmpd="sng" algn="ctr">
+          <a:solidFill>
+            <a:schemeClr val="phClr"/>
+          </a:solidFill>
+          <a:prstDash val="solid"/>
+          <a:miter lim="800000"/>
+        </a:ln>
+        <a:ln w="25400" cap="flat" cmpd="sng" algn="ctr">
+          <a:solidFill>
+            <a:schemeClr val="phClr"/>
+          </a:solidFill>
+          <a:prstDash val="solid"/>
+          <a:miter lim="800000"/>
+        </a:ln>
+      </a:lnStyleLst>
+      <a:effectStyleLst>
+        <a:effectStyle>
+          <a:effectLst/>
+        </a:effectStyle>
+        <a:effectStyle>
+          <a:effectLst/>
+        </a:effectStyle>
+        <a:effectStyle>
+          <a:effectLst>
+            <a:outerShdw blurRad="57150" dist="19050" dir="5400000" algn="ctr" rotWithShape="0">
+              <a:srgbClr val="000000">
+                <a:alpha val="63000"/>
+              </a:srgbClr>
+            </a:outerShdw>
+          </a:effectLst>
+        </a:effectStyle>
+      </a:effectStyleLst>
+      <a:bgFillStyleLst>
+        <a:solidFill>
+          <a:schemeClr val="phClr"/>
+        </a:solidFill>
+        <a:solidFill>
+          <a:schemeClr val="phClr">
+            <a:tint val="95000"/>
+            <a:satMod val="170000"/>
+          </a:schemeClr>
+        </a:solidFill>
+        <a:gradFill rotWithShape="1">
+          <a:gsLst>
+            <a:gs pos="0">
+              <a:schemeClr val="phClr">
+                <a:tint val="93000"/>
+                <a:satMod val="150000"/>
+                <a:shade val="98000"/>
+                <a:lumMod val="102000"/>
+              </a:schemeClr>
+            </a:gs>
+            <a:gs pos="50000">
+              <a:schemeClr val="phClr">
+                <a:tint val="98000"/>
+                <a:satMod val="130000"/>
+                <a:shade val="90000"/>
+                <a:lumMod val="103000"/>
+              </a:schemeClr>
+            </a:gs>
+            <a:gs pos="100000">
+              <a:schemeClr val="phClr">
+                <a:shade val="63000"/>
+                <a:satMod val="120000"/>
+              </a:schemeClr>
+            </a:gs>
+          </a:gsLst>
+          <a:lin ang="5400000" scaled="0"/>
+        </a:gradFill>
+      </a:bgFillStyleLst>
+    </a:fmtScheme>
+  </a:themeElements>
+  <a:objectDefaults>
+    <a:lnDef>
+      <a:spPr/>
+      <a:bodyPr/>
+      <a:lstStyle/>
+      <a:style>
+        <a:lnRef idx="2">
+          <a:schemeClr val="accent1"/>
+        </a:lnRef>
+        <a:fillRef idx="0">
+          <a:schemeClr val="accent1"/>
+        </a:fillRef>
+        <a:effectRef idx="1">
+          <a:schemeClr val="accent1"/>
+        </a:effectRef>
+        <a:fontRef idx="minor">
+          <a:schemeClr val="tx1"/>
+        </a:fontRef>
+      </a:style>
+    </a:lnDef>
+  </a:objectDefaults>
+  <a:extraClrSchemeLst/>
+  <a:extLst>
+    <a:ext uri="{05A4C25C-085E-4340-85A3-A5531E510DB2}">
+      <thm15:themeFamily xmlns:thm15="http://schemas.microsoft.com/office/thememl/2012/main" name="Office Theme" id="{2E142A2C-CD16-42D6-873A-C26D2A0506FA}" vid="{1BDDFF52-6CD6-40A5-AB3C-68EB2F1E4D0A}"/>
+    </a:ext>
+  </a:extLst>
+</a:theme>
 </file>